--- a/Legacy_School_EduSphere_Executive_Presentation.pptx
+++ b/Legacy_School_EduSphere_Executive_Presentation.pptx
@@ -16,6 +16,9 @@
     <p:sldId id="264" r:id="rId15"/>
     <p:sldId id="265" r:id="rId16"/>
     <p:sldId id="266" r:id="rId17"/>
+    <p:sldId id="267" r:id="rId18"/>
+    <p:sldId id="268" r:id="rId19"/>
+    <p:sldId id="269" r:id="rId20"/>
   </p:sldIdLst>
   <p:sldSz cx="12191695" cy="6858000" type="screen4x3"/>
   <p:notesSz cx="6858000" cy="9144000"/>
@@ -3149,8 +3152,8 @@
         </p:nvSpPr>
         <p:spPr>
           <a:xfrm>
-            <a:off x="731520" y="1097280"/>
-            <a:ext cx="10728655" cy="4663440"/>
+            <a:off x="731520" y="1005840"/>
+            <a:ext cx="10728655" cy="4846320"/>
           </a:xfrm>
           <a:prstGeom prst="roundRect">
             <a:avLst/>
@@ -3194,8 +3197,8 @@
         </p:nvSpPr>
         <p:spPr>
           <a:xfrm>
-            <a:off x="1097280" y="1463040"/>
-            <a:ext cx="9966960" cy="914400"/>
+            <a:off x="1097280" y="1371600"/>
+            <a:ext cx="9966960" cy="1097280"/>
           </a:xfrm>
           <a:prstGeom prst="rect">
             <a:avLst/>
@@ -3221,14 +3224,14 @@
           </a:p>
           <a:p>
             <a:pPr>
-              <a:defRPr sz="3000" b="1">
+              <a:defRPr sz="2800" b="1">
                 <a:solidFill>
                   <a:srgbClr val="FFFFFF"/>
                 </a:solidFill>
               </a:defRPr>
             </a:pPr>
             <a:r>
-              <a:t>EduSphere SMIS: Enterprise Sovereign Modernization</a:t>
+              <a:t>EduSphere SMIS: Enterprise Stakeholder Master Deck</a:t>
             </a:r>
           </a:p>
         </p:txBody>
@@ -3266,19 +3269,11 @@
               </a:defRPr>
             </a:pPr>
             <a:r>
-              <a:t>Comprehensive Multi-Campus Management, Automated Revenue Recovery, ECZ Academic Markbooks, 360° Boarding Safeguarding &amp; Smart Transport Network with Contactless ID Card Boarding.</a:t>
-            </a:r>
-          </a:p>
-          <a:p>
-            <a:pPr>
-              <a:defRPr sz="1200" b="1">
-                <a:solidFill>
-                  <a:srgbClr val="D4AF37"/>
-                </a:solidFill>
-              </a:defRPr>
-            </a:pPr>
-            <a:r>
-              <a:t>Tailored for the Board of Directors, Managing Director &amp; Principal: Mr. Emmanuel Mwansa</a:t>
+              <a:t>Sovereign Multi-Campus School Management System • 2026 Term 3 Live Operational Session</a:t>
+            </a:r>
+            <a:br/>
+            <a:r>
+              <a:t>Mushitala Day Campus &amp; Kansanshi Boarding Campus • Solwezi, North-Western Province, Zambia</a:t>
             </a:r>
           </a:p>
         </p:txBody>
@@ -3291,8 +3286,8 @@
         </p:nvSpPr>
         <p:spPr>
           <a:xfrm>
-            <a:off x="1097280" y="4754880"/>
-            <a:ext cx="9601200" cy="548640"/>
+            <a:off x="1097280" y="4114800"/>
+            <a:ext cx="9601200" cy="1371600"/>
           </a:xfrm>
           <a:prstGeom prst="rect">
             <a:avLst/>
@@ -3300,20 +3295,32 @@
           <a:noFill/>
         </p:spPr>
         <p:txBody>
-          <a:bodyPr wrap="none">
+          <a:bodyPr wrap="square">
             <a:spAutoFit/>
           </a:bodyPr>
           <a:lstStyle/>
           <a:p>
             <a:pPr>
-              <a:defRPr sz="1100">
+              <a:defRPr sz="1100" b="1">
+                <a:solidFill>
+                  <a:srgbClr val="D4AF37"/>
+                </a:solidFill>
+              </a:defRPr>
+            </a:pPr>
+            <a:r>
+              <a:t>Presented to: School Board, Director Mr. Emmanuel Mwansa, Ministry of Education, and Key Stakeholders</a:t>
+            </a:r>
+          </a:p>
+          <a:p>
+            <a:pPr>
+              <a:defRPr sz="1000">
                 <a:solidFill>
                   <a:srgbClr val="94A3B8"/>
                 </a:solidFill>
               </a:defRPr>
             </a:pPr>
             <a:r>
-              <a:t>Date: 18th October 2026  •  Campus Locations: Mushitala (Secondary/Boarding) &amp; Urban (ECE/Primary Day)  •  Solwezi, Zambia</a:t>
+              <a:t>Key Pillars: Zero-Loss Financial Ledger • 5-Horizon Attendance • 360° Boarding Curfew • Native Android APK • ECZ Markbooks</a:t>
             </a:r>
           </a:p>
         </p:txBody>
@@ -3487,7 +3494,7 @@
               </a:defRPr>
             </a:pPr>
             <a:r>
-              <a:t>Deployment Timeline: 4-Week Fast-Track Execution Schedule</a:t>
+              <a:t>Parent Portal: Modern Guardian Engagement &amp; Transparency</a:t>
             </a:r>
           </a:p>
         </p:txBody>
@@ -3500,8 +3507,8 @@
         </p:nvSpPr>
         <p:spPr>
           <a:xfrm>
-            <a:off x="731520" y="1371600"/>
-            <a:ext cx="2606040" cy="3931920"/>
+            <a:off x="731520" y="1280160"/>
+            <a:ext cx="3383280" cy="5029200"/>
           </a:xfrm>
           <a:prstGeom prst="roundRect">
             <a:avLst/>
@@ -3509,7 +3516,7 @@
           <a:solidFill>
             <a:srgbClr val="FFFFFF"/>
           </a:solidFill>
-          <a:ln>
+          <a:ln w="12700">
             <a:solidFill>
               <a:srgbClr val="E2E8F0"/>
             </a:solidFill>
@@ -3545,8 +3552,8 @@
         </p:nvSpPr>
         <p:spPr>
           <a:xfrm>
-            <a:off x="731520" y="1371600"/>
-            <a:ext cx="2606040" cy="91440"/>
+            <a:off x="731520" y="1280160"/>
+            <a:ext cx="3383280" cy="73152"/>
           </a:xfrm>
           <a:prstGeom prst="rect">
             <a:avLst/>
@@ -3588,8 +3595,8 @@
         </p:nvSpPr>
         <p:spPr>
           <a:xfrm>
-            <a:off x="868680" y="1554480"/>
-            <a:ext cx="2331720" cy="3566160"/>
+            <a:off x="868680" y="1389888"/>
+            <a:ext cx="3108960" cy="4800600"/>
           </a:xfrm>
           <a:prstGeom prst="rect">
             <a:avLst/>
@@ -3604,16 +3611,16 @@
           <a:p>
             <a:pPr>
               <a:spcAft>
-                <a:spcPts val="1000"/>
-              </a:spcAft>
-              <a:defRPr sz="1100" b="1">
+                <a:spcPts val="200"/>
+              </a:spcAft>
+              <a:defRPr sz="1200" b="1">
                 <a:solidFill>
                   <a:srgbClr val="0B2545"/>
                 </a:solidFill>
               </a:defRPr>
             </a:pPr>
             <a:r>
-              <a:t>Week 1: Sovereign Setup &amp; Cloud Architecture</a:t>
+              <a:t>Unified Family Dashboard</a:t>
             </a:r>
           </a:p>
           <a:p>
@@ -3621,6 +3628,21 @@
               <a:spcAft>
                 <a:spcPts val="600"/>
               </a:spcAft>
+              <a:defRPr sz="850">
+                <a:solidFill>
+                  <a:srgbClr val="64748B"/>
+                </a:solidFill>
+              </a:defRPr>
+            </a:pPr>
+            <a:r>
+              <a:t>Single-Pane Guardian View</a:t>
+            </a:r>
+          </a:p>
+          <a:p>
+            <a:pPr>
+              <a:spcAft>
+                <a:spcPts val="400"/>
+              </a:spcAft>
               <a:defRPr sz="950">
                 <a:solidFill>
                   <a:srgbClr val="1E293B"/>
@@ -3628,13 +3650,13 @@
               </a:defRPr>
             </a:pPr>
             <a:r>
-              <a:t>✔ Deploy Dockerized PostgreSQL &amp; Next.js engine</a:t>
-            </a:r>
-          </a:p>
-          <a:p>
-            <a:pPr>
-              <a:spcAft>
-                <a:spcPts val="600"/>
+              <a:t>• Multi-Child Single Login: Parents with siblings in ECE, Primary, and Secondary view all accounts in one view.</a:t>
+            </a:r>
+          </a:p>
+          <a:p>
+            <a:pPr>
+              <a:spcAft>
+                <a:spcPts val="400"/>
               </a:spcAft>
               <a:defRPr sz="950">
                 <a:solidFill>
@@ -3643,13 +3665,13 @@
               </a:defRPr>
             </a:pPr>
             <a:r>
-              <a:t>✔ Configure automated nightly off-site database backups</a:t>
-            </a:r>
-          </a:p>
-          <a:p>
-            <a:pPr>
-              <a:spcAft>
-                <a:spcPts val="600"/>
+              <a:t>• Real-Time Attendance Feed: Know instantly if a child is marked late or absent during morning roll-call.</a:t>
+            </a:r>
+          </a:p>
+          <a:p>
+            <a:pPr>
+              <a:spcAft>
+                <a:spcPts val="400"/>
               </a:spcAft>
               <a:defRPr sz="950">
                 <a:solidFill>
@@ -3658,22 +3680,7 @@
               </a:defRPr>
             </a:pPr>
             <a:r>
-              <a:t>✔ Migrate 780 legacy learner profiles and fee balances</a:t>
-            </a:r>
-          </a:p>
-          <a:p>
-            <a:pPr>
-              <a:spcAft>
-                <a:spcPts val="600"/>
-              </a:spcAft>
-              <a:defRPr sz="950">
-                <a:solidFill>
-                  <a:srgbClr val="1E293B"/>
-                </a:solidFill>
-              </a:defRPr>
-            </a:pPr>
-            <a:r>
-              <a:t>✔ Finalize custom theme colors &amp; school crest branding</a:t>
+              <a:t>• Behavior &amp; Pastoral Notes: Direct communication on commendations, sports achievements, or discipline.</a:t>
             </a:r>
           </a:p>
         </p:txBody>
@@ -3686,8 +3693,8 @@
         </p:nvSpPr>
         <p:spPr>
           <a:xfrm>
-            <a:off x="3429000" y="1371600"/>
-            <a:ext cx="2606040" cy="3931920"/>
+            <a:off x="4389120" y="1280160"/>
+            <a:ext cx="3383280" cy="5029200"/>
           </a:xfrm>
           <a:prstGeom prst="roundRect">
             <a:avLst/>
@@ -3695,7 +3702,7 @@
           <a:solidFill>
             <a:srgbClr val="FFFFFF"/>
           </a:solidFill>
-          <a:ln>
+          <a:ln w="12700">
             <a:solidFill>
               <a:srgbClr val="E2E8F0"/>
             </a:solidFill>
@@ -3731,14 +3738,14 @@
         </p:nvSpPr>
         <p:spPr>
           <a:xfrm>
-            <a:off x="3429000" y="1371600"/>
-            <a:ext cx="2606040" cy="91440"/>
+            <a:off x="4389120" y="1280160"/>
+            <a:ext cx="3383280" cy="73152"/>
           </a:xfrm>
           <a:prstGeom prst="rect">
             <a:avLst/>
           </a:prstGeom>
           <a:solidFill>
-            <a:srgbClr val="134074"/>
+            <a:srgbClr val="10B981"/>
           </a:solidFill>
           <a:ln>
             <a:noFill/>
@@ -3774,8 +3781,8 @@
         </p:nvSpPr>
         <p:spPr>
           <a:xfrm>
-            <a:off x="3566160" y="1554480"/>
-            <a:ext cx="2331720" cy="3566160"/>
+            <a:off x="4526280" y="1389888"/>
+            <a:ext cx="3108960" cy="4800600"/>
           </a:xfrm>
           <a:prstGeom prst="rect">
             <a:avLst/>
@@ -3790,16 +3797,16 @@
           <a:p>
             <a:pPr>
               <a:spcAft>
-                <a:spcPts val="1000"/>
-              </a:spcAft>
-              <a:defRPr sz="1100" b="1">
+                <a:spcPts val="200"/>
+              </a:spcAft>
+              <a:defRPr sz="1200" b="1">
                 <a:solidFill>
                   <a:srgbClr val="0B2545"/>
                 </a:solidFill>
               </a:defRPr>
             </a:pPr>
             <a:r>
-              <a:t>Week 2: Smart Bus IoT &amp; Hardware Deployment</a:t>
+              <a:t>Frictionless Fee Payments</a:t>
             </a:r>
           </a:p>
           <a:p>
@@ -3807,6 +3814,21 @@
               <a:spcAft>
                 <a:spcPts val="600"/>
               </a:spcAft>
+              <a:defRPr sz="850">
+                <a:solidFill>
+                  <a:srgbClr val="64748B"/>
+                </a:solidFill>
+              </a:defRPr>
+            </a:pPr>
+            <a:r>
+              <a:t>Revenue Acceleration</a:t>
+            </a:r>
+          </a:p>
+          <a:p>
+            <a:pPr>
+              <a:spcAft>
+                <a:spcPts val="400"/>
+              </a:spcAft>
               <a:defRPr sz="950">
                 <a:solidFill>
                   <a:srgbClr val="1E293B"/>
@@ -3814,13 +3836,13 @@
               </a:defRPr>
             </a:pPr>
             <a:r>
-              <a:t>✔ Procure and program 800 MIFARE NFC student ID cards</a:t>
-            </a:r>
-          </a:p>
-          <a:p>
-            <a:pPr>
-              <a:spcAft>
-                <a:spcPts val="600"/>
+              <a:t>• Itemized Tuition Statements: Complete breakdown of tuition, boarding, uniforms, and book charges.</a:t>
+            </a:r>
+          </a:p>
+          <a:p>
+            <a:pPr>
+              <a:spcAft>
+                <a:spcPts val="400"/>
               </a:spcAft>
               <a:defRPr sz="950">
                 <a:solidFill>
@@ -3829,13 +3851,13 @@
               </a:defRPr>
             </a:pPr>
             <a:r>
-              <a:t>✔ Install 2x Android in-bus GPS telematics tablets</a:t>
-            </a:r>
-          </a:p>
-          <a:p>
-            <a:pPr>
-              <a:spcAft>
-                <a:spcPts val="600"/>
+              <a:t>• 1-Tap Mobile Money Checkout: Pay directly with Airtel Money or MTN MoMo from the handset.</a:t>
+            </a:r>
+          </a:p>
+          <a:p>
+            <a:pPr>
+              <a:spcAft>
+                <a:spcPts val="400"/>
               </a:spcAft>
               <a:defRPr sz="950">
                 <a:solidFill>
@@ -3844,22 +3866,7 @@
               </a:defRPr>
             </a:pPr>
             <a:r>
-              <a:t>✔ Set up cellular 4G SIMs and offline store-and-forward</a:t>
-            </a:r>
-          </a:p>
-          <a:p>
-            <a:pPr>
-              <a:spcAft>
-                <a:spcPts val="600"/>
-              </a:spcAft>
-              <a:defRPr sz="950">
-                <a:solidFill>
-                  <a:srgbClr val="1E293B"/>
-                </a:solidFill>
-              </a:defRPr>
-            </a:pPr>
-            <a:r>
-              <a:t>✔ Test driver route navigation and geofenced bus stops</a:t>
+              <a:t>• Instant Digital Receipts: Downloadable receipts for employer bursary reimbursement.</a:t>
             </a:r>
           </a:p>
         </p:txBody>
@@ -3872,8 +3879,8 @@
         </p:nvSpPr>
         <p:spPr>
           <a:xfrm>
-            <a:off x="6126480" y="1371600"/>
-            <a:ext cx="2606040" cy="3931920"/>
+            <a:off x="8046720" y="1280160"/>
+            <a:ext cx="3383280" cy="5029200"/>
           </a:xfrm>
           <a:prstGeom prst="roundRect">
             <a:avLst/>
@@ -3881,7 +3888,7 @@
           <a:solidFill>
             <a:srgbClr val="FFFFFF"/>
           </a:solidFill>
-          <a:ln>
+          <a:ln w="12700">
             <a:solidFill>
               <a:srgbClr val="E2E8F0"/>
             </a:solidFill>
@@ -3917,14 +3924,14 @@
         </p:nvSpPr>
         <p:spPr>
           <a:xfrm>
-            <a:off x="6126480" y="1371600"/>
-            <a:ext cx="2606040" cy="91440"/>
+            <a:off x="8046720" y="1280160"/>
+            <a:ext cx="3383280" cy="73152"/>
           </a:xfrm>
           <a:prstGeom prst="rect">
             <a:avLst/>
           </a:prstGeom>
           <a:solidFill>
-            <a:srgbClr val="134074"/>
+            <a:srgbClr val="D4AF37"/>
           </a:solidFill>
           <a:ln>
             <a:noFill/>
@@ -3960,8 +3967,8 @@
         </p:nvSpPr>
         <p:spPr>
           <a:xfrm>
-            <a:off x="6263640" y="1554480"/>
-            <a:ext cx="2331720" cy="3566160"/>
+            <a:off x="8183880" y="1389888"/>
+            <a:ext cx="3108960" cy="4800600"/>
           </a:xfrm>
           <a:prstGeom prst="rect">
             <a:avLst/>
@@ -3976,16 +3983,16 @@
           <a:p>
             <a:pPr>
               <a:spcAft>
-                <a:spcPts val="1000"/>
-              </a:spcAft>
-              <a:defRPr sz="1100" b="1">
+                <a:spcPts val="200"/>
+              </a:spcAft>
+              <a:defRPr sz="1200" b="1">
                 <a:solidFill>
                   <a:srgbClr val="0B2545"/>
                 </a:solidFill>
               </a:defRPr>
             </a:pPr>
             <a:r>
-              <a:t>Week 3: Staff Training &amp; Academic Markbook Pilot</a:t>
+              <a:t>Academic Progress &amp; Reports</a:t>
             </a:r>
           </a:p>
           <a:p>
@@ -3993,6 +4000,21 @@
               <a:spcAft>
                 <a:spcPts val="600"/>
               </a:spcAft>
+              <a:defRPr sz="850">
+                <a:solidFill>
+                  <a:srgbClr val="64748B"/>
+                </a:solidFill>
+              </a:defRPr>
+            </a:pPr>
+            <a:r>
+              <a:t>Academic Transparency</a:t>
+            </a:r>
+          </a:p>
+          <a:p>
+            <a:pPr>
+              <a:spcAft>
+                <a:spcPts val="400"/>
+              </a:spcAft>
               <a:defRPr sz="950">
                 <a:solidFill>
                   <a:srgbClr val="1E293B"/>
@@ -4000,13 +4022,13 @@
               </a:defRPr>
             </a:pPr>
             <a:r>
-              <a:t>✔ Conduct workshops for 48 staff members across cadres</a:t>
-            </a:r>
-          </a:p>
-          <a:p>
-            <a:pPr>
-              <a:spcAft>
-                <a:spcPts val="600"/>
+              <a:t>• Continuous Assessment Tracker: Monitor performance throughout the term rather than waiting for term end.</a:t>
+            </a:r>
+          </a:p>
+          <a:p>
+            <a:pPr>
+              <a:spcAft>
+                <a:spcPts val="400"/>
               </a:spcAft>
               <a:defRPr sz="950">
                 <a:solidFill>
@@ -4015,13 +4037,13 @@
               </a:defRPr>
             </a:pPr>
             <a:r>
-              <a:t>✔ Train teachers on topic test, CA, and mock exam entry</a:t>
-            </a:r>
-          </a:p>
-          <a:p>
-            <a:pPr>
-              <a:spcAft>
-                <a:spcPts val="600"/>
+              <a:t>• Terminal Report Card Download: High-resolution PDF reports accessible immediately upon headteacher release.</a:t>
+            </a:r>
+          </a:p>
+          <a:p>
+            <a:pPr>
+              <a:spcAft>
+                <a:spcPts val="400"/>
               </a:spcAft>
               <a:defRPr sz="950">
                 <a:solidFill>
@@ -4030,288 +4052,7 @@
               </a:defRPr>
             </a:pPr>
             <a:r>
-              <a:t>✔ Train bursar and finance staff on cashbook vouchers</a:t>
-            </a:r>
-          </a:p>
-          <a:p>
-            <a:pPr>
-              <a:spcAft>
-                <a:spcPts val="600"/>
-              </a:spcAft>
-              <a:defRPr sz="950">
-                <a:solidFill>
-                  <a:srgbClr val="1E293B"/>
-                </a:solidFill>
-              </a:defRPr>
-            </a:pPr>
-            <a:r>
-              <a:t>✔ Conduct mock roll-call attendance on shuttle routes</a:t>
-            </a:r>
-          </a:p>
-        </p:txBody>
-      </p:sp>
-      <p:sp>
-        <p:nvSpPr>
-          <p:cNvPr id="15" name="Rounded Rectangle 14"/>
-          <p:cNvSpPr/>
-          <p:nvPr/>
-        </p:nvSpPr>
-        <p:spPr>
-          <a:xfrm>
-            <a:off x="8823960" y="1371600"/>
-            <a:ext cx="2606040" cy="3931920"/>
-          </a:xfrm>
-          <a:prstGeom prst="roundRect">
-            <a:avLst/>
-          </a:prstGeom>
-          <a:solidFill>
-            <a:srgbClr val="FFFFFF"/>
-          </a:solidFill>
-          <a:ln>
-            <a:solidFill>
-              <a:srgbClr val="E2E8F0"/>
-            </a:solidFill>
-          </a:ln>
-        </p:spPr>
-        <p:style>
-          <a:lnRef idx="1">
-            <a:schemeClr val="accent1"/>
-          </a:lnRef>
-          <a:fillRef idx="3">
-            <a:schemeClr val="accent1"/>
-          </a:fillRef>
-          <a:effectRef idx="2">
-            <a:schemeClr val="accent1"/>
-          </a:effectRef>
-          <a:fontRef idx="minor">
-            <a:schemeClr val="lt1"/>
-          </a:fontRef>
-        </p:style>
-        <p:txBody>
-          <a:bodyPr rtlCol="0" anchor="ctr"/>
-          <a:lstStyle/>
-          <a:p>
-            <a:pPr algn="ctr"/>
-          </a:p>
-        </p:txBody>
-      </p:sp>
-      <p:sp>
-        <p:nvSpPr>
-          <p:cNvPr id="16" name="Rectangle 15"/>
-          <p:cNvSpPr/>
-          <p:nvPr/>
-        </p:nvSpPr>
-        <p:spPr>
-          <a:xfrm>
-            <a:off x="8823960" y="1371600"/>
-            <a:ext cx="2606040" cy="91440"/>
-          </a:xfrm>
-          <a:prstGeom prst="rect">
-            <a:avLst/>
-          </a:prstGeom>
-          <a:solidFill>
-            <a:srgbClr val="134074"/>
-          </a:solidFill>
-          <a:ln>
-            <a:noFill/>
-          </a:ln>
-        </p:spPr>
-        <p:style>
-          <a:lnRef idx="1">
-            <a:schemeClr val="accent1"/>
-          </a:lnRef>
-          <a:fillRef idx="3">
-            <a:schemeClr val="accent1"/>
-          </a:fillRef>
-          <a:effectRef idx="2">
-            <a:schemeClr val="accent1"/>
-          </a:effectRef>
-          <a:fontRef idx="minor">
-            <a:schemeClr val="lt1"/>
-          </a:fontRef>
-        </p:style>
-        <p:txBody>
-          <a:bodyPr rtlCol="0" anchor="ctr"/>
-          <a:lstStyle/>
-          <a:p>
-            <a:pPr algn="ctr"/>
-          </a:p>
-        </p:txBody>
-      </p:sp>
-      <p:sp>
-        <p:nvSpPr>
-          <p:cNvPr id="17" name="TextBox 16"/>
-          <p:cNvSpPr txBox="1"/>
-          <p:nvPr/>
-        </p:nvSpPr>
-        <p:spPr>
-          <a:xfrm>
-            <a:off x="8961120" y="1554480"/>
-            <a:ext cx="2331720" cy="3566160"/>
-          </a:xfrm>
-          <a:prstGeom prst="rect">
-            <a:avLst/>
-          </a:prstGeom>
-          <a:noFill/>
-        </p:spPr>
-        <p:txBody>
-          <a:bodyPr wrap="square">
-            <a:spAutoFit/>
-          </a:bodyPr>
-          <a:lstStyle/>
-          <a:p>
-            <a:pPr>
-              <a:spcAft>
-                <a:spcPts val="1000"/>
-              </a:spcAft>
-              <a:defRPr sz="1100" b="1">
-                <a:solidFill>
-                  <a:srgbClr val="0B2545"/>
-                </a:solidFill>
-              </a:defRPr>
-            </a:pPr>
-            <a:r>
-              <a:t>Week 4: Parent Portal Launch &amp; Full Go-Live</a:t>
-            </a:r>
-          </a:p>
-          <a:p>
-            <a:pPr>
-              <a:spcAft>
-                <a:spcPts val="600"/>
-              </a:spcAft>
-              <a:defRPr sz="950">
-                <a:solidFill>
-                  <a:srgbClr val="1E293B"/>
-                </a:solidFill>
-              </a:defRPr>
-            </a:pPr>
-            <a:r>
-              <a:t>✔ Dispatch parent SMS credentials and onboarding guide</a:t>
-            </a:r>
-          </a:p>
-          <a:p>
-            <a:pPr>
-              <a:spcAft>
-                <a:spcPts val="600"/>
-              </a:spcAft>
-              <a:defRPr sz="950">
-                <a:solidFill>
-                  <a:srgbClr val="1E293B"/>
-                </a:solidFill>
-              </a:defRPr>
-            </a:pPr>
-            <a:r>
-              <a:t>✔ Open Airtel &amp; MTN Mobile Money payment channels</a:t>
-            </a:r>
-          </a:p>
-          <a:p>
-            <a:pPr>
-              <a:spcAft>
-                <a:spcPts val="600"/>
-              </a:spcAft>
-              <a:defRPr sz="950">
-                <a:solidFill>
-                  <a:srgbClr val="1E293B"/>
-                </a:solidFill>
-              </a:defRPr>
-            </a:pPr>
-            <a:r>
-              <a:t>✔ Publish official Term 1 digital report cards</a:t>
-            </a:r>
-          </a:p>
-          <a:p>
-            <a:pPr>
-              <a:spcAft>
-                <a:spcPts val="600"/>
-              </a:spcAft>
-              <a:defRPr sz="950">
-                <a:solidFill>
-                  <a:srgbClr val="1E293B"/>
-                </a:solidFill>
-              </a:defRPr>
-            </a:pPr>
-            <a:r>
-              <a:t>✔ Transition to 24/7 technical monitoring &amp; SLA support</a:t>
-            </a:r>
-          </a:p>
-        </p:txBody>
-      </p:sp>
-      <p:sp>
-        <p:nvSpPr>
-          <p:cNvPr id="18" name="Rounded Rectangle 17"/>
-          <p:cNvSpPr/>
-          <p:nvPr/>
-        </p:nvSpPr>
-        <p:spPr>
-          <a:xfrm>
-            <a:off x="731520" y="5486400"/>
-            <a:ext cx="10728655" cy="914400"/>
-          </a:xfrm>
-          <a:prstGeom prst="roundRect">
-            <a:avLst/>
-          </a:prstGeom>
-          <a:solidFill>
-            <a:srgbClr val="F0FDF4"/>
-          </a:solidFill>
-          <a:ln>
-            <a:solidFill>
-              <a:srgbClr val="BBF7D0"/>
-            </a:solidFill>
-          </a:ln>
-        </p:spPr>
-        <p:style>
-          <a:lnRef idx="1">
-            <a:schemeClr val="accent1"/>
-          </a:lnRef>
-          <a:fillRef idx="3">
-            <a:schemeClr val="accent1"/>
-          </a:fillRef>
-          <a:effectRef idx="2">
-            <a:schemeClr val="accent1"/>
-          </a:effectRef>
-          <a:fontRef idx="minor">
-            <a:schemeClr val="lt1"/>
-          </a:fontRef>
-        </p:style>
-        <p:txBody>
-          <a:bodyPr rtlCol="0" anchor="ctr"/>
-          <a:lstStyle/>
-          <a:p>
-            <a:pPr algn="ctr"/>
-          </a:p>
-        </p:txBody>
-      </p:sp>
-      <p:sp>
-        <p:nvSpPr>
-          <p:cNvPr id="19" name="TextBox 18"/>
-          <p:cNvSpPr txBox="1"/>
-          <p:nvPr/>
-        </p:nvSpPr>
-        <p:spPr>
-          <a:xfrm>
-            <a:off x="914400" y="5532120"/>
-            <a:ext cx="10332720" cy="777240"/>
-          </a:xfrm>
-          <a:prstGeom prst="rect">
-            <a:avLst/>
-          </a:prstGeom>
-          <a:noFill/>
-        </p:spPr>
-        <p:txBody>
-          <a:bodyPr wrap="square">
-            <a:spAutoFit/>
-          </a:bodyPr>
-          <a:lstStyle/>
-          <a:p>
-            <a:pPr>
-              <a:defRPr sz="1050" b="1">
-                <a:solidFill>
-                  <a:srgbClr val="166534"/>
-                </a:solidFill>
-              </a:defRPr>
-            </a:pPr>
-            <a:r>
-              <a:t>Enterprise Service Level Agreement (SLA): 99.9% Uptime Guarantee  •  Daily Encrypted Off-Site Backups  •  Dedicated On-Call Technical Support for Solwezi Operations</a:t>
+              <a:t>• Teacher Meeting Scheduling: Seamless booking of parent-teacher consultation sessions.</a:t>
             </a:r>
           </a:p>
         </p:txBody>
@@ -4349,6 +4090,2468 @@
             <a:avLst/>
           </a:prstGeom>
           <a:solidFill>
+            <a:srgbClr val="F8FAFC"/>
+          </a:solidFill>
+          <a:ln>
+            <a:noFill/>
+          </a:ln>
+        </p:spPr>
+        <p:style>
+          <a:lnRef idx="1">
+            <a:schemeClr val="accent1"/>
+          </a:lnRef>
+          <a:fillRef idx="3">
+            <a:schemeClr val="accent1"/>
+          </a:fillRef>
+          <a:effectRef idx="2">
+            <a:schemeClr val="accent1"/>
+          </a:effectRef>
+          <a:fontRef idx="minor">
+            <a:schemeClr val="lt1"/>
+          </a:fontRef>
+        </p:style>
+        <p:txBody>
+          <a:bodyPr rtlCol="0" anchor="ctr"/>
+          <a:lstStyle/>
+          <a:p>
+            <a:pPr algn="ctr"/>
+          </a:p>
+        </p:txBody>
+      </p:sp>
+      <p:sp>
+        <p:nvSpPr>
+          <p:cNvPr id="3" name="Rectangle 2"/>
+          <p:cNvSpPr/>
+          <p:nvPr/>
+        </p:nvSpPr>
+        <p:spPr>
+          <a:xfrm>
+            <a:off x="0" y="0"/>
+            <a:ext cx="12191695" cy="1005840"/>
+          </a:xfrm>
+          <a:prstGeom prst="rect">
+            <a:avLst/>
+          </a:prstGeom>
+          <a:solidFill>
+            <a:srgbClr val="0B2545"/>
+          </a:solidFill>
+          <a:ln>
+            <a:noFill/>
+          </a:ln>
+        </p:spPr>
+        <p:style>
+          <a:lnRef idx="1">
+            <a:schemeClr val="accent1"/>
+          </a:lnRef>
+          <a:fillRef idx="3">
+            <a:schemeClr val="accent1"/>
+          </a:fillRef>
+          <a:effectRef idx="2">
+            <a:schemeClr val="accent1"/>
+          </a:effectRef>
+          <a:fontRef idx="minor">
+            <a:schemeClr val="lt1"/>
+          </a:fontRef>
+        </p:style>
+        <p:txBody>
+          <a:bodyPr rtlCol="0" anchor="ctr"/>
+          <a:lstStyle/>
+          <a:p>
+            <a:pPr algn="ctr"/>
+          </a:p>
+        </p:txBody>
+      </p:sp>
+      <p:sp>
+        <p:nvSpPr>
+          <p:cNvPr id="4" name="TextBox 3"/>
+          <p:cNvSpPr txBox="1"/>
+          <p:nvPr/>
+        </p:nvSpPr>
+        <p:spPr>
+          <a:xfrm>
+            <a:off x="731520" y="109728"/>
+            <a:ext cx="10698480" cy="256032"/>
+          </a:xfrm>
+          <a:prstGeom prst="rect">
+            <a:avLst/>
+          </a:prstGeom>
+          <a:noFill/>
+        </p:spPr>
+        <p:txBody>
+          <a:bodyPr wrap="square">
+            <a:spAutoFit/>
+          </a:bodyPr>
+          <a:lstStyle/>
+          <a:p>
+            <a:pPr>
+              <a:defRPr sz="900" b="1">
+                <a:solidFill>
+                  <a:srgbClr val="D4AF37"/>
+                </a:solidFill>
+              </a:defRPr>
+            </a:pPr>
+            <a:r>
+              <a:t>LEGACY SCHOOL SOLWEZI • EXECUTIVE STRATEGY &amp; TECHNOLOGY DEPLOYMENT</a:t>
+            </a:r>
+          </a:p>
+        </p:txBody>
+      </p:sp>
+      <p:sp>
+        <p:nvSpPr>
+          <p:cNvPr id="5" name="TextBox 4"/>
+          <p:cNvSpPr txBox="1"/>
+          <p:nvPr/>
+        </p:nvSpPr>
+        <p:spPr>
+          <a:xfrm>
+            <a:off x="731520" y="347472"/>
+            <a:ext cx="10698480" cy="502920"/>
+          </a:xfrm>
+          <a:prstGeom prst="rect">
+            <a:avLst/>
+          </a:prstGeom>
+          <a:noFill/>
+        </p:spPr>
+        <p:txBody>
+          <a:bodyPr wrap="square">
+            <a:spAutoFit/>
+          </a:bodyPr>
+          <a:lstStyle/>
+          <a:p>
+            <a:pPr>
+              <a:defRPr sz="2000" b="1">
+                <a:solidFill>
+                  <a:srgbClr val="FFFFFF"/>
+                </a:solidFill>
+              </a:defRPr>
+            </a:pPr>
+            <a:r>
+              <a:t>Native Android App (APK): Operational Agility in the Field</a:t>
+            </a:r>
+          </a:p>
+        </p:txBody>
+      </p:sp>
+      <p:sp>
+        <p:nvSpPr>
+          <p:cNvPr id="6" name="Rounded Rectangle 5"/>
+          <p:cNvSpPr/>
+          <p:nvPr/>
+        </p:nvSpPr>
+        <p:spPr>
+          <a:xfrm>
+            <a:off x="731520" y="1280160"/>
+            <a:ext cx="3383280" cy="5029200"/>
+          </a:xfrm>
+          <a:prstGeom prst="roundRect">
+            <a:avLst/>
+          </a:prstGeom>
+          <a:solidFill>
+            <a:srgbClr val="FFFFFF"/>
+          </a:solidFill>
+          <a:ln w="12700">
+            <a:solidFill>
+              <a:srgbClr val="E2E8F0"/>
+            </a:solidFill>
+          </a:ln>
+        </p:spPr>
+        <p:style>
+          <a:lnRef idx="1">
+            <a:schemeClr val="accent1"/>
+          </a:lnRef>
+          <a:fillRef idx="3">
+            <a:schemeClr val="accent1"/>
+          </a:fillRef>
+          <a:effectRef idx="2">
+            <a:schemeClr val="accent1"/>
+          </a:effectRef>
+          <a:fontRef idx="minor">
+            <a:schemeClr val="lt1"/>
+          </a:fontRef>
+        </p:style>
+        <p:txBody>
+          <a:bodyPr rtlCol="0" anchor="ctr"/>
+          <a:lstStyle/>
+          <a:p>
+            <a:pPr algn="ctr"/>
+          </a:p>
+        </p:txBody>
+      </p:sp>
+      <p:sp>
+        <p:nvSpPr>
+          <p:cNvPr id="7" name="Rectangle 6"/>
+          <p:cNvSpPr/>
+          <p:nvPr/>
+        </p:nvSpPr>
+        <p:spPr>
+          <a:xfrm>
+            <a:off x="731520" y="1280160"/>
+            <a:ext cx="3383280" cy="73152"/>
+          </a:xfrm>
+          <a:prstGeom prst="rect">
+            <a:avLst/>
+          </a:prstGeom>
+          <a:solidFill>
+            <a:srgbClr val="0B2545"/>
+          </a:solidFill>
+          <a:ln>
+            <a:noFill/>
+          </a:ln>
+        </p:spPr>
+        <p:style>
+          <a:lnRef idx="1">
+            <a:schemeClr val="accent1"/>
+          </a:lnRef>
+          <a:fillRef idx="3">
+            <a:schemeClr val="accent1"/>
+          </a:fillRef>
+          <a:effectRef idx="2">
+            <a:schemeClr val="accent1"/>
+          </a:effectRef>
+          <a:fontRef idx="minor">
+            <a:schemeClr val="lt1"/>
+          </a:fontRef>
+        </p:style>
+        <p:txBody>
+          <a:bodyPr rtlCol="0" anchor="ctr"/>
+          <a:lstStyle/>
+          <a:p>
+            <a:pPr algn="ctr"/>
+          </a:p>
+        </p:txBody>
+      </p:sp>
+      <p:sp>
+        <p:nvSpPr>
+          <p:cNvPr id="8" name="TextBox 7"/>
+          <p:cNvSpPr txBox="1"/>
+          <p:nvPr/>
+        </p:nvSpPr>
+        <p:spPr>
+          <a:xfrm>
+            <a:off x="868680" y="1389888"/>
+            <a:ext cx="3108960" cy="4800600"/>
+          </a:xfrm>
+          <a:prstGeom prst="rect">
+            <a:avLst/>
+          </a:prstGeom>
+          <a:noFill/>
+        </p:spPr>
+        <p:txBody>
+          <a:bodyPr wrap="square">
+            <a:spAutoFit/>
+          </a:bodyPr>
+          <a:lstStyle/>
+          <a:p>
+            <a:pPr>
+              <a:spcAft>
+                <a:spcPts val="200"/>
+              </a:spcAft>
+              <a:defRPr sz="1200" b="1">
+                <a:solidFill>
+                  <a:srgbClr val="0B2545"/>
+                </a:solidFill>
+              </a:defRPr>
+            </a:pPr>
+            <a:r>
+              <a:t>1. Mobile-First Field UX</a:t>
+            </a:r>
+          </a:p>
+          <a:p>
+            <a:pPr>
+              <a:spcAft>
+                <a:spcPts val="600"/>
+              </a:spcAft>
+              <a:defRPr sz="850">
+                <a:solidFill>
+                  <a:srgbClr val="64748B"/>
+                </a:solidFill>
+              </a:defRPr>
+            </a:pPr>
+            <a:r>
+              <a:t>Engineered for Mobility</a:t>
+            </a:r>
+          </a:p>
+          <a:p>
+            <a:pPr>
+              <a:spcAft>
+                <a:spcPts val="400"/>
+              </a:spcAft>
+              <a:defRPr sz="950">
+                <a:solidFill>
+                  <a:srgbClr val="1E293B"/>
+                </a:solidFill>
+              </a:defRPr>
+            </a:pPr>
+            <a:r>
+              <a:t>• Package ID: com.legacyschool.edusphere</a:t>
+            </a:r>
+          </a:p>
+          <a:p>
+            <a:pPr>
+              <a:spcAft>
+                <a:spcPts val="400"/>
+              </a:spcAft>
+              <a:defRPr sz="950">
+                <a:solidFill>
+                  <a:srgbClr val="1E293B"/>
+                </a:solidFill>
+              </a:defRPr>
+            </a:pPr>
+            <a:r>
+              <a:t>• Persistent Mobile Bottom Bar: 1-tap navigation for Dashboard, Attendance, Boarding, Finance, and All Modules.</a:t>
+            </a:r>
+          </a:p>
+          <a:p>
+            <a:pPr>
+              <a:spcAft>
+                <a:spcPts val="400"/>
+              </a:spcAft>
+              <a:defRPr sz="950">
+                <a:solidFill>
+                  <a:srgbClr val="1E293B"/>
+                </a:solidFill>
+              </a:defRPr>
+            </a:pPr>
+            <a:r>
+              <a:t>• One-Handed Smartphone Operation: Tailored for teachers walking classroom rows and housemasters patrolling dorms.</a:t>
+            </a:r>
+          </a:p>
+        </p:txBody>
+      </p:sp>
+      <p:sp>
+        <p:nvSpPr>
+          <p:cNvPr id="9" name="Rounded Rectangle 8"/>
+          <p:cNvSpPr/>
+          <p:nvPr/>
+        </p:nvSpPr>
+        <p:spPr>
+          <a:xfrm>
+            <a:off x="4389120" y="1280160"/>
+            <a:ext cx="3383280" cy="5029200"/>
+          </a:xfrm>
+          <a:prstGeom prst="roundRect">
+            <a:avLst/>
+          </a:prstGeom>
+          <a:solidFill>
+            <a:srgbClr val="FFFFFF"/>
+          </a:solidFill>
+          <a:ln w="12700">
+            <a:solidFill>
+              <a:srgbClr val="E2E8F0"/>
+            </a:solidFill>
+          </a:ln>
+        </p:spPr>
+        <p:style>
+          <a:lnRef idx="1">
+            <a:schemeClr val="accent1"/>
+          </a:lnRef>
+          <a:fillRef idx="3">
+            <a:schemeClr val="accent1"/>
+          </a:fillRef>
+          <a:effectRef idx="2">
+            <a:schemeClr val="accent1"/>
+          </a:effectRef>
+          <a:fontRef idx="minor">
+            <a:schemeClr val="lt1"/>
+          </a:fontRef>
+        </p:style>
+        <p:txBody>
+          <a:bodyPr rtlCol="0" anchor="ctr"/>
+          <a:lstStyle/>
+          <a:p>
+            <a:pPr algn="ctr"/>
+          </a:p>
+        </p:txBody>
+      </p:sp>
+      <p:sp>
+        <p:nvSpPr>
+          <p:cNvPr id="10" name="Rectangle 9"/>
+          <p:cNvSpPr/>
+          <p:nvPr/>
+        </p:nvSpPr>
+        <p:spPr>
+          <a:xfrm>
+            <a:off x="4389120" y="1280160"/>
+            <a:ext cx="3383280" cy="73152"/>
+          </a:xfrm>
+          <a:prstGeom prst="rect">
+            <a:avLst/>
+          </a:prstGeom>
+          <a:solidFill>
+            <a:srgbClr val="10B981"/>
+          </a:solidFill>
+          <a:ln>
+            <a:noFill/>
+          </a:ln>
+        </p:spPr>
+        <p:style>
+          <a:lnRef idx="1">
+            <a:schemeClr val="accent1"/>
+          </a:lnRef>
+          <a:fillRef idx="3">
+            <a:schemeClr val="accent1"/>
+          </a:fillRef>
+          <a:effectRef idx="2">
+            <a:schemeClr val="accent1"/>
+          </a:effectRef>
+          <a:fontRef idx="minor">
+            <a:schemeClr val="lt1"/>
+          </a:fontRef>
+        </p:style>
+        <p:txBody>
+          <a:bodyPr rtlCol="0" anchor="ctr"/>
+          <a:lstStyle/>
+          <a:p>
+            <a:pPr algn="ctr"/>
+          </a:p>
+        </p:txBody>
+      </p:sp>
+      <p:sp>
+        <p:nvSpPr>
+          <p:cNvPr id="11" name="TextBox 10"/>
+          <p:cNvSpPr txBox="1"/>
+          <p:nvPr/>
+        </p:nvSpPr>
+        <p:spPr>
+          <a:xfrm>
+            <a:off x="4526280" y="1389888"/>
+            <a:ext cx="3108960" cy="4800600"/>
+          </a:xfrm>
+          <a:prstGeom prst="rect">
+            <a:avLst/>
+          </a:prstGeom>
+          <a:noFill/>
+        </p:spPr>
+        <p:txBody>
+          <a:bodyPr wrap="square">
+            <a:spAutoFit/>
+          </a:bodyPr>
+          <a:lstStyle/>
+          <a:p>
+            <a:pPr>
+              <a:spcAft>
+                <a:spcPts val="200"/>
+              </a:spcAft>
+              <a:defRPr sz="1200" b="1">
+                <a:solidFill>
+                  <a:srgbClr val="0B2545"/>
+                </a:solidFill>
+              </a:defRPr>
+            </a:pPr>
+            <a:r>
+              <a:t>2. Hardware Integrations</a:t>
+            </a:r>
+          </a:p>
+          <a:p>
+            <a:pPr>
+              <a:spcAft>
+                <a:spcPts val="600"/>
+              </a:spcAft>
+              <a:defRPr sz="850">
+                <a:solidFill>
+                  <a:srgbClr val="64748B"/>
+                </a:solidFill>
+              </a:defRPr>
+            </a:pPr>
+            <a:r>
+              <a:t>Native Device Power</a:t>
+            </a:r>
+          </a:p>
+          <a:p>
+            <a:pPr>
+              <a:spcAft>
+                <a:spcPts val="400"/>
+              </a:spcAft>
+              <a:defRPr sz="950">
+                <a:solidFill>
+                  <a:srgbClr val="1E293B"/>
+                </a:solidFill>
+              </a:defRPr>
+            </a:pPr>
+            <a:r>
+              <a:t>• Camera Barcode/QR Scanner: Scan student ID badges for instant cafeteria meal access, bus boarding, and gate exeats.</a:t>
+            </a:r>
+          </a:p>
+          <a:p>
+            <a:pPr>
+              <a:spcAft>
+                <a:spcPts val="400"/>
+              </a:spcAft>
+              <a:defRPr sz="950">
+                <a:solidFill>
+                  <a:srgbClr val="1E293B"/>
+                </a:solidFill>
+              </a:defRPr>
+            </a:pPr>
+            <a:r>
+              <a:t>• Safe Area &amp; Touch Optimizations: Built to adhere to modern Android status and navigation bar gesture ergonomics.</a:t>
+            </a:r>
+          </a:p>
+          <a:p>
+            <a:pPr>
+              <a:spcAft>
+                <a:spcPts val="400"/>
+              </a:spcAft>
+              <a:defRPr sz="950">
+                <a:solidFill>
+                  <a:srgbClr val="1E293B"/>
+                </a:solidFill>
+              </a:defRPr>
+            </a:pPr>
+            <a:r>
+              <a:t>• Lightweight APK Footprint: Compact 4.1 MB binary that installs cleanly on entry-level Android smartphones.</a:t>
+            </a:r>
+          </a:p>
+        </p:txBody>
+      </p:sp>
+      <p:sp>
+        <p:nvSpPr>
+          <p:cNvPr id="12" name="Rounded Rectangle 11"/>
+          <p:cNvSpPr/>
+          <p:nvPr/>
+        </p:nvSpPr>
+        <p:spPr>
+          <a:xfrm>
+            <a:off x="8046720" y="1280160"/>
+            <a:ext cx="3383280" cy="5029200"/>
+          </a:xfrm>
+          <a:prstGeom prst="roundRect">
+            <a:avLst/>
+          </a:prstGeom>
+          <a:solidFill>
+            <a:srgbClr val="FFFFFF"/>
+          </a:solidFill>
+          <a:ln w="12700">
+            <a:solidFill>
+              <a:srgbClr val="E2E8F0"/>
+            </a:solidFill>
+          </a:ln>
+        </p:spPr>
+        <p:style>
+          <a:lnRef idx="1">
+            <a:schemeClr val="accent1"/>
+          </a:lnRef>
+          <a:fillRef idx="3">
+            <a:schemeClr val="accent1"/>
+          </a:fillRef>
+          <a:effectRef idx="2">
+            <a:schemeClr val="accent1"/>
+          </a:effectRef>
+          <a:fontRef idx="minor">
+            <a:schemeClr val="lt1"/>
+          </a:fontRef>
+        </p:style>
+        <p:txBody>
+          <a:bodyPr rtlCol="0" anchor="ctr"/>
+          <a:lstStyle/>
+          <a:p>
+            <a:pPr algn="ctr"/>
+          </a:p>
+        </p:txBody>
+      </p:sp>
+      <p:sp>
+        <p:nvSpPr>
+          <p:cNvPr id="13" name="Rectangle 12"/>
+          <p:cNvSpPr/>
+          <p:nvPr/>
+        </p:nvSpPr>
+        <p:spPr>
+          <a:xfrm>
+            <a:off x="8046720" y="1280160"/>
+            <a:ext cx="3383280" cy="73152"/>
+          </a:xfrm>
+          <a:prstGeom prst="rect">
+            <a:avLst/>
+          </a:prstGeom>
+          <a:solidFill>
+            <a:srgbClr val="D4AF37"/>
+          </a:solidFill>
+          <a:ln>
+            <a:noFill/>
+          </a:ln>
+        </p:spPr>
+        <p:style>
+          <a:lnRef idx="1">
+            <a:schemeClr val="accent1"/>
+          </a:lnRef>
+          <a:fillRef idx="3">
+            <a:schemeClr val="accent1"/>
+          </a:fillRef>
+          <a:effectRef idx="2">
+            <a:schemeClr val="accent1"/>
+          </a:effectRef>
+          <a:fontRef idx="minor">
+            <a:schemeClr val="lt1"/>
+          </a:fontRef>
+        </p:style>
+        <p:txBody>
+          <a:bodyPr rtlCol="0" anchor="ctr"/>
+          <a:lstStyle/>
+          <a:p>
+            <a:pPr algn="ctr"/>
+          </a:p>
+        </p:txBody>
+      </p:sp>
+      <p:sp>
+        <p:nvSpPr>
+          <p:cNvPr id="14" name="TextBox 13"/>
+          <p:cNvSpPr txBox="1"/>
+          <p:nvPr/>
+        </p:nvSpPr>
+        <p:spPr>
+          <a:xfrm>
+            <a:off x="8183880" y="1389888"/>
+            <a:ext cx="3108960" cy="4800600"/>
+          </a:xfrm>
+          <a:prstGeom prst="rect">
+            <a:avLst/>
+          </a:prstGeom>
+          <a:noFill/>
+        </p:spPr>
+        <p:txBody>
+          <a:bodyPr wrap="square">
+            <a:spAutoFit/>
+          </a:bodyPr>
+          <a:lstStyle/>
+          <a:p>
+            <a:pPr>
+              <a:spcAft>
+                <a:spcPts val="200"/>
+              </a:spcAft>
+              <a:defRPr sz="1200" b="1">
+                <a:solidFill>
+                  <a:srgbClr val="0B2545"/>
+                </a:solidFill>
+              </a:defRPr>
+            </a:pPr>
+            <a:r>
+              <a:t>3. Over-The-Air (OTA) Updates</a:t>
+            </a:r>
+          </a:p>
+          <a:p>
+            <a:pPr>
+              <a:spcAft>
+                <a:spcPts val="600"/>
+              </a:spcAft>
+              <a:defRPr sz="850">
+                <a:solidFill>
+                  <a:srgbClr val="64748B"/>
+                </a:solidFill>
+              </a:defRPr>
+            </a:pPr>
+            <a:r>
+              <a:t>Continuous Delivery</a:t>
+            </a:r>
+          </a:p>
+          <a:p>
+            <a:pPr>
+              <a:spcAft>
+                <a:spcPts val="400"/>
+              </a:spcAft>
+              <a:defRPr sz="950">
+                <a:solidFill>
+                  <a:srgbClr val="1E293B"/>
+                </a:solidFill>
+              </a:defRPr>
+            </a:pPr>
+            <a:r>
+              <a:t>• Live Production Bridge: Configured to sync seamlessly with https://legacyschool.lamtoninvestments.com.</a:t>
+            </a:r>
+          </a:p>
+          <a:p>
+            <a:pPr>
+              <a:spcAft>
+                <a:spcPts val="400"/>
+              </a:spcAft>
+              <a:defRPr sz="950">
+                <a:solidFill>
+                  <a:srgbClr val="1E293B"/>
+                </a:solidFill>
+              </a:defRPr>
+            </a:pPr>
+            <a:r>
+              <a:t>• Zero Maintenance Friction: Feature enhancements reflect instantly in the app without requiring manual APK reinstallation.</a:t>
+            </a:r>
+          </a:p>
+          <a:p>
+            <a:pPr>
+              <a:spcAft>
+                <a:spcPts val="400"/>
+              </a:spcAft>
+              <a:defRPr sz="950">
+                <a:solidFill>
+                  <a:srgbClr val="1E293B"/>
+                </a:solidFill>
+              </a:defRPr>
+            </a:pPr>
+            <a:r>
+              <a:t>• Direct Portal Download: Hosted on the school web server for easy distribution to staff and parents.</a:t>
+            </a:r>
+          </a:p>
+        </p:txBody>
+      </p:sp>
+    </p:spTree>
+  </p:cSld>
+  <p:clrMapOvr>
+    <a:masterClrMapping/>
+  </p:clrMapOvr>
+</p:sld>
+</file>
+
+<file path=ppt/slides/slide12.xml><?xml version="1.0" encoding="utf-8"?>
+<p:sld xmlns:a="http://schemas.openxmlformats.org/drawingml/2006/main" xmlns:p="http://schemas.openxmlformats.org/presentationml/2006/main" xmlns:r="http://schemas.openxmlformats.org/officeDocument/2006/relationships">
+  <p:cSld>
+    <p:spTree>
+      <p:nvGrpSpPr>
+        <p:cNvPr id="1" name=""/>
+        <p:cNvGrpSpPr/>
+        <p:nvPr/>
+      </p:nvGrpSpPr>
+      <p:grpSpPr/>
+      <p:sp>
+        <p:nvSpPr>
+          <p:cNvPr id="2" name="Rectangle 1"/>
+          <p:cNvSpPr/>
+          <p:nvPr/>
+        </p:nvSpPr>
+        <p:spPr>
+          <a:xfrm>
+            <a:off x="0" y="0"/>
+            <a:ext cx="12191695" cy="6858000"/>
+          </a:xfrm>
+          <a:prstGeom prst="rect">
+            <a:avLst/>
+          </a:prstGeom>
+          <a:solidFill>
+            <a:srgbClr val="F8FAFC"/>
+          </a:solidFill>
+          <a:ln>
+            <a:noFill/>
+          </a:ln>
+        </p:spPr>
+        <p:style>
+          <a:lnRef idx="1">
+            <a:schemeClr val="accent1"/>
+          </a:lnRef>
+          <a:fillRef idx="3">
+            <a:schemeClr val="accent1"/>
+          </a:fillRef>
+          <a:effectRef idx="2">
+            <a:schemeClr val="accent1"/>
+          </a:effectRef>
+          <a:fontRef idx="minor">
+            <a:schemeClr val="lt1"/>
+          </a:fontRef>
+        </p:style>
+        <p:txBody>
+          <a:bodyPr rtlCol="0" anchor="ctr"/>
+          <a:lstStyle/>
+          <a:p>
+            <a:pPr algn="ctr"/>
+          </a:p>
+        </p:txBody>
+      </p:sp>
+      <p:sp>
+        <p:nvSpPr>
+          <p:cNvPr id="3" name="Rectangle 2"/>
+          <p:cNvSpPr/>
+          <p:nvPr/>
+        </p:nvSpPr>
+        <p:spPr>
+          <a:xfrm>
+            <a:off x="0" y="0"/>
+            <a:ext cx="12191695" cy="1005840"/>
+          </a:xfrm>
+          <a:prstGeom prst="rect">
+            <a:avLst/>
+          </a:prstGeom>
+          <a:solidFill>
+            <a:srgbClr val="0B2545"/>
+          </a:solidFill>
+          <a:ln>
+            <a:noFill/>
+          </a:ln>
+        </p:spPr>
+        <p:style>
+          <a:lnRef idx="1">
+            <a:schemeClr val="accent1"/>
+          </a:lnRef>
+          <a:fillRef idx="3">
+            <a:schemeClr val="accent1"/>
+          </a:fillRef>
+          <a:effectRef idx="2">
+            <a:schemeClr val="accent1"/>
+          </a:effectRef>
+          <a:fontRef idx="minor">
+            <a:schemeClr val="lt1"/>
+          </a:fontRef>
+        </p:style>
+        <p:txBody>
+          <a:bodyPr rtlCol="0" anchor="ctr"/>
+          <a:lstStyle/>
+          <a:p>
+            <a:pPr algn="ctr"/>
+          </a:p>
+        </p:txBody>
+      </p:sp>
+      <p:sp>
+        <p:nvSpPr>
+          <p:cNvPr id="4" name="TextBox 3"/>
+          <p:cNvSpPr txBox="1"/>
+          <p:nvPr/>
+        </p:nvSpPr>
+        <p:spPr>
+          <a:xfrm>
+            <a:off x="731520" y="109728"/>
+            <a:ext cx="10698480" cy="256032"/>
+          </a:xfrm>
+          <a:prstGeom prst="rect">
+            <a:avLst/>
+          </a:prstGeom>
+          <a:noFill/>
+        </p:spPr>
+        <p:txBody>
+          <a:bodyPr wrap="square">
+            <a:spAutoFit/>
+          </a:bodyPr>
+          <a:lstStyle/>
+          <a:p>
+            <a:pPr>
+              <a:defRPr sz="900" b="1">
+                <a:solidFill>
+                  <a:srgbClr val="D4AF37"/>
+                </a:solidFill>
+              </a:defRPr>
+            </a:pPr>
+            <a:r>
+              <a:t>LEGACY SCHOOL SOLWEZI • EXECUTIVE STRATEGY &amp; TECHNOLOGY DEPLOYMENT</a:t>
+            </a:r>
+          </a:p>
+        </p:txBody>
+      </p:sp>
+      <p:sp>
+        <p:nvSpPr>
+          <p:cNvPr id="5" name="TextBox 4"/>
+          <p:cNvSpPr txBox="1"/>
+          <p:nvPr/>
+        </p:nvSpPr>
+        <p:spPr>
+          <a:xfrm>
+            <a:off x="731520" y="347472"/>
+            <a:ext cx="10698480" cy="502920"/>
+          </a:xfrm>
+          <a:prstGeom prst="rect">
+            <a:avLst/>
+          </a:prstGeom>
+          <a:noFill/>
+        </p:spPr>
+        <p:txBody>
+          <a:bodyPr wrap="square">
+            <a:spAutoFit/>
+          </a:bodyPr>
+          <a:lstStyle/>
+          <a:p>
+            <a:pPr>
+              <a:defRPr sz="2000" b="1">
+                <a:solidFill>
+                  <a:srgbClr val="FFFFFF"/>
+                </a:solidFill>
+              </a:defRPr>
+            </a:pPr>
+            <a:r>
+              <a:t>Statutory Compliance: Ministry of Education &amp; Regulatory Alignment</a:t>
+            </a:r>
+          </a:p>
+        </p:txBody>
+      </p:sp>
+      <p:sp>
+        <p:nvSpPr>
+          <p:cNvPr id="6" name="Rounded Rectangle 5"/>
+          <p:cNvSpPr/>
+          <p:nvPr/>
+        </p:nvSpPr>
+        <p:spPr>
+          <a:xfrm>
+            <a:off x="731520" y="1280160"/>
+            <a:ext cx="3383280" cy="5029200"/>
+          </a:xfrm>
+          <a:prstGeom prst="roundRect">
+            <a:avLst/>
+          </a:prstGeom>
+          <a:solidFill>
+            <a:srgbClr val="FFFFFF"/>
+          </a:solidFill>
+          <a:ln w="12700">
+            <a:solidFill>
+              <a:srgbClr val="E2E8F0"/>
+            </a:solidFill>
+          </a:ln>
+        </p:spPr>
+        <p:style>
+          <a:lnRef idx="1">
+            <a:schemeClr val="accent1"/>
+          </a:lnRef>
+          <a:fillRef idx="3">
+            <a:schemeClr val="accent1"/>
+          </a:fillRef>
+          <a:effectRef idx="2">
+            <a:schemeClr val="accent1"/>
+          </a:effectRef>
+          <a:fontRef idx="minor">
+            <a:schemeClr val="lt1"/>
+          </a:fontRef>
+        </p:style>
+        <p:txBody>
+          <a:bodyPr rtlCol="0" anchor="ctr"/>
+          <a:lstStyle/>
+          <a:p>
+            <a:pPr algn="ctr"/>
+          </a:p>
+        </p:txBody>
+      </p:sp>
+      <p:sp>
+        <p:nvSpPr>
+          <p:cNvPr id="7" name="Rectangle 6"/>
+          <p:cNvSpPr/>
+          <p:nvPr/>
+        </p:nvSpPr>
+        <p:spPr>
+          <a:xfrm>
+            <a:off x="731520" y="1280160"/>
+            <a:ext cx="3383280" cy="73152"/>
+          </a:xfrm>
+          <a:prstGeom prst="rect">
+            <a:avLst/>
+          </a:prstGeom>
+          <a:solidFill>
+            <a:srgbClr val="0B2545"/>
+          </a:solidFill>
+          <a:ln>
+            <a:noFill/>
+          </a:ln>
+        </p:spPr>
+        <p:style>
+          <a:lnRef idx="1">
+            <a:schemeClr val="accent1"/>
+          </a:lnRef>
+          <a:fillRef idx="3">
+            <a:schemeClr val="accent1"/>
+          </a:fillRef>
+          <a:effectRef idx="2">
+            <a:schemeClr val="accent1"/>
+          </a:effectRef>
+          <a:fontRef idx="minor">
+            <a:schemeClr val="lt1"/>
+          </a:fontRef>
+        </p:style>
+        <p:txBody>
+          <a:bodyPr rtlCol="0" anchor="ctr"/>
+          <a:lstStyle/>
+          <a:p>
+            <a:pPr algn="ctr"/>
+          </a:p>
+        </p:txBody>
+      </p:sp>
+      <p:sp>
+        <p:nvSpPr>
+          <p:cNvPr id="8" name="TextBox 7"/>
+          <p:cNvSpPr txBox="1"/>
+          <p:nvPr/>
+        </p:nvSpPr>
+        <p:spPr>
+          <a:xfrm>
+            <a:off x="868680" y="1389888"/>
+            <a:ext cx="3108960" cy="4800600"/>
+          </a:xfrm>
+          <a:prstGeom prst="rect">
+            <a:avLst/>
+          </a:prstGeom>
+          <a:noFill/>
+        </p:spPr>
+        <p:txBody>
+          <a:bodyPr wrap="square">
+            <a:spAutoFit/>
+          </a:bodyPr>
+          <a:lstStyle/>
+          <a:p>
+            <a:pPr>
+              <a:spcAft>
+                <a:spcPts val="200"/>
+              </a:spcAft>
+              <a:defRPr sz="1200" b="1">
+                <a:solidFill>
+                  <a:srgbClr val="0B2545"/>
+                </a:solidFill>
+              </a:defRPr>
+            </a:pPr>
+            <a:r>
+              <a:t>Ministry of Education Form 12A</a:t>
+            </a:r>
+          </a:p>
+          <a:p>
+            <a:pPr>
+              <a:spcAft>
+                <a:spcPts val="600"/>
+              </a:spcAft>
+              <a:defRPr sz="850">
+                <a:solidFill>
+                  <a:srgbClr val="64748B"/>
+                </a:solidFill>
+              </a:defRPr>
+            </a:pPr>
+            <a:r>
+              <a:t>DEBS Solwezi Compliance</a:t>
+            </a:r>
+          </a:p>
+          <a:p>
+            <a:pPr>
+              <a:spcAft>
+                <a:spcPts val="400"/>
+              </a:spcAft>
+              <a:defRPr sz="950">
+                <a:solidFill>
+                  <a:srgbClr val="1E293B"/>
+                </a:solidFill>
+              </a:defRPr>
+            </a:pPr>
+            <a:r>
+              <a:t>• Statutory Statistical Return: Pre-aggregates learner headcounts by gender, age, and grade cohort.</a:t>
+            </a:r>
+          </a:p>
+          <a:p>
+            <a:pPr>
+              <a:spcAft>
+                <a:spcPts val="400"/>
+              </a:spcAft>
+              <a:defRPr sz="950">
+                <a:solidFill>
+                  <a:srgbClr val="1E293B"/>
+                </a:solidFill>
+              </a:defRPr>
+            </a:pPr>
+            <a:r>
+              <a:t>• Teacher-Pupil Ratio Compliance: Generates statutory staffing returns for District Education Board Secretary (DEBS).</a:t>
+            </a:r>
+          </a:p>
+          <a:p>
+            <a:pPr>
+              <a:spcAft>
+                <a:spcPts val="400"/>
+              </a:spcAft>
+              <a:defRPr sz="950">
+                <a:solidFill>
+                  <a:srgbClr val="1E293B"/>
+                </a:solidFill>
+              </a:defRPr>
+            </a:pPr>
+            <a:r>
+              <a:t>• Infrastructure Audit: Reports classroom capacity, boarding bed density, and sanitation facilities.</a:t>
+            </a:r>
+          </a:p>
+        </p:txBody>
+      </p:sp>
+      <p:sp>
+        <p:nvSpPr>
+          <p:cNvPr id="9" name="Rounded Rectangle 8"/>
+          <p:cNvSpPr/>
+          <p:nvPr/>
+        </p:nvSpPr>
+        <p:spPr>
+          <a:xfrm>
+            <a:off x="4389120" y="1280160"/>
+            <a:ext cx="3383280" cy="5029200"/>
+          </a:xfrm>
+          <a:prstGeom prst="roundRect">
+            <a:avLst/>
+          </a:prstGeom>
+          <a:solidFill>
+            <a:srgbClr val="FFFFFF"/>
+          </a:solidFill>
+          <a:ln w="12700">
+            <a:solidFill>
+              <a:srgbClr val="E2E8F0"/>
+            </a:solidFill>
+          </a:ln>
+        </p:spPr>
+        <p:style>
+          <a:lnRef idx="1">
+            <a:schemeClr val="accent1"/>
+          </a:lnRef>
+          <a:fillRef idx="3">
+            <a:schemeClr val="accent1"/>
+          </a:fillRef>
+          <a:effectRef idx="2">
+            <a:schemeClr val="accent1"/>
+          </a:effectRef>
+          <a:fontRef idx="minor">
+            <a:schemeClr val="lt1"/>
+          </a:fontRef>
+        </p:style>
+        <p:txBody>
+          <a:bodyPr rtlCol="0" anchor="ctr"/>
+          <a:lstStyle/>
+          <a:p>
+            <a:pPr algn="ctr"/>
+          </a:p>
+        </p:txBody>
+      </p:sp>
+      <p:sp>
+        <p:nvSpPr>
+          <p:cNvPr id="10" name="Rectangle 9"/>
+          <p:cNvSpPr/>
+          <p:nvPr/>
+        </p:nvSpPr>
+        <p:spPr>
+          <a:xfrm>
+            <a:off x="4389120" y="1280160"/>
+            <a:ext cx="3383280" cy="73152"/>
+          </a:xfrm>
+          <a:prstGeom prst="rect">
+            <a:avLst/>
+          </a:prstGeom>
+          <a:solidFill>
+            <a:srgbClr val="134074"/>
+          </a:solidFill>
+          <a:ln>
+            <a:noFill/>
+          </a:ln>
+        </p:spPr>
+        <p:style>
+          <a:lnRef idx="1">
+            <a:schemeClr val="accent1"/>
+          </a:lnRef>
+          <a:fillRef idx="3">
+            <a:schemeClr val="accent1"/>
+          </a:fillRef>
+          <a:effectRef idx="2">
+            <a:schemeClr val="accent1"/>
+          </a:effectRef>
+          <a:fontRef idx="minor">
+            <a:schemeClr val="lt1"/>
+          </a:fontRef>
+        </p:style>
+        <p:txBody>
+          <a:bodyPr rtlCol="0" anchor="ctr"/>
+          <a:lstStyle/>
+          <a:p>
+            <a:pPr algn="ctr"/>
+          </a:p>
+        </p:txBody>
+      </p:sp>
+      <p:sp>
+        <p:nvSpPr>
+          <p:cNvPr id="11" name="TextBox 10"/>
+          <p:cNvSpPr txBox="1"/>
+          <p:nvPr/>
+        </p:nvSpPr>
+        <p:spPr>
+          <a:xfrm>
+            <a:off x="4526280" y="1389888"/>
+            <a:ext cx="3108960" cy="4800600"/>
+          </a:xfrm>
+          <a:prstGeom prst="rect">
+            <a:avLst/>
+          </a:prstGeom>
+          <a:noFill/>
+        </p:spPr>
+        <p:txBody>
+          <a:bodyPr wrap="square">
+            <a:spAutoFit/>
+          </a:bodyPr>
+          <a:lstStyle/>
+          <a:p>
+            <a:pPr>
+              <a:spcAft>
+                <a:spcPts val="200"/>
+              </a:spcAft>
+              <a:defRPr sz="1200" b="1">
+                <a:solidFill>
+                  <a:srgbClr val="0B2545"/>
+                </a:solidFill>
+              </a:defRPr>
+            </a:pPr>
+            <a:r>
+              <a:t>ECZ National Examination Centre</a:t>
+            </a:r>
+          </a:p>
+          <a:p>
+            <a:pPr>
+              <a:spcAft>
+                <a:spcPts val="600"/>
+              </a:spcAft>
+              <a:defRPr sz="850">
+                <a:solidFill>
+                  <a:srgbClr val="64748B"/>
+                </a:solidFill>
+              </a:defRPr>
+            </a:pPr>
+            <a:r>
+              <a:t>Examinations Council of Zambia</a:t>
+            </a:r>
+          </a:p>
+          <a:p>
+            <a:pPr>
+              <a:spcAft>
+                <a:spcPts val="400"/>
+              </a:spcAft>
+              <a:defRPr sz="950">
+                <a:solidFill>
+                  <a:srgbClr val="1E293B"/>
+                </a:solidFill>
+              </a:defRPr>
+            </a:pPr>
+            <a:r>
+              <a:t>• Candidate Eligibility Gatekeeper: Ensures candidates satisfy the mandatory 75% attendance threshold.</a:t>
+            </a:r>
+          </a:p>
+          <a:p>
+            <a:pPr>
+              <a:spcAft>
+                <a:spcPts val="400"/>
+              </a:spcAft>
+              <a:defRPr sz="950">
+                <a:solidFill>
+                  <a:srgbClr val="1E293B"/>
+                </a:solidFill>
+              </a:defRPr>
+            </a:pPr>
+            <a:r>
+              <a:t>• Financial Clearance Lock: Prevents issuance of exam numbers to delinquent accounts while honoring bursaries.</a:t>
+            </a:r>
+          </a:p>
+          <a:p>
+            <a:pPr>
+              <a:spcAft>
+                <a:spcPts val="400"/>
+              </a:spcAft>
+              <a:defRPr sz="950">
+                <a:solidFill>
+                  <a:srgbClr val="1E293B"/>
+                </a:solidFill>
+              </a:defRPr>
+            </a:pPr>
+            <a:r>
+              <a:t>• Syllabus Coverage Tracking: Confirms completion of national secondary curriculum requirements.</a:t>
+            </a:r>
+          </a:p>
+        </p:txBody>
+      </p:sp>
+      <p:sp>
+        <p:nvSpPr>
+          <p:cNvPr id="12" name="Rounded Rectangle 11"/>
+          <p:cNvSpPr/>
+          <p:nvPr/>
+        </p:nvSpPr>
+        <p:spPr>
+          <a:xfrm>
+            <a:off x="8046720" y="1280160"/>
+            <a:ext cx="3383280" cy="5029200"/>
+          </a:xfrm>
+          <a:prstGeom prst="roundRect">
+            <a:avLst/>
+          </a:prstGeom>
+          <a:solidFill>
+            <a:srgbClr val="FFFFFF"/>
+          </a:solidFill>
+          <a:ln w="12700">
+            <a:solidFill>
+              <a:srgbClr val="E2E8F0"/>
+            </a:solidFill>
+          </a:ln>
+        </p:spPr>
+        <p:style>
+          <a:lnRef idx="1">
+            <a:schemeClr val="accent1"/>
+          </a:lnRef>
+          <a:fillRef idx="3">
+            <a:schemeClr val="accent1"/>
+          </a:fillRef>
+          <a:effectRef idx="2">
+            <a:schemeClr val="accent1"/>
+          </a:effectRef>
+          <a:fontRef idx="minor">
+            <a:schemeClr val="lt1"/>
+          </a:fontRef>
+        </p:style>
+        <p:txBody>
+          <a:bodyPr rtlCol="0" anchor="ctr"/>
+          <a:lstStyle/>
+          <a:p>
+            <a:pPr algn="ctr"/>
+          </a:p>
+        </p:txBody>
+      </p:sp>
+      <p:sp>
+        <p:nvSpPr>
+          <p:cNvPr id="13" name="Rectangle 12"/>
+          <p:cNvSpPr/>
+          <p:nvPr/>
+        </p:nvSpPr>
+        <p:spPr>
+          <a:xfrm>
+            <a:off x="8046720" y="1280160"/>
+            <a:ext cx="3383280" cy="73152"/>
+          </a:xfrm>
+          <a:prstGeom prst="rect">
+            <a:avLst/>
+          </a:prstGeom>
+          <a:solidFill>
+            <a:srgbClr val="10B981"/>
+          </a:solidFill>
+          <a:ln>
+            <a:noFill/>
+          </a:ln>
+        </p:spPr>
+        <p:style>
+          <a:lnRef idx="1">
+            <a:schemeClr val="accent1"/>
+          </a:lnRef>
+          <a:fillRef idx="3">
+            <a:schemeClr val="accent1"/>
+          </a:fillRef>
+          <a:effectRef idx="2">
+            <a:schemeClr val="accent1"/>
+          </a:effectRef>
+          <a:fontRef idx="minor">
+            <a:schemeClr val="lt1"/>
+          </a:fontRef>
+        </p:style>
+        <p:txBody>
+          <a:bodyPr rtlCol="0" anchor="ctr"/>
+          <a:lstStyle/>
+          <a:p>
+            <a:pPr algn="ctr"/>
+          </a:p>
+        </p:txBody>
+      </p:sp>
+      <p:sp>
+        <p:nvSpPr>
+          <p:cNvPr id="14" name="TextBox 13"/>
+          <p:cNvSpPr txBox="1"/>
+          <p:nvPr/>
+        </p:nvSpPr>
+        <p:spPr>
+          <a:xfrm>
+            <a:off x="8183880" y="1389888"/>
+            <a:ext cx="3108960" cy="4800600"/>
+          </a:xfrm>
+          <a:prstGeom prst="rect">
+            <a:avLst/>
+          </a:prstGeom>
+          <a:noFill/>
+        </p:spPr>
+        <p:txBody>
+          <a:bodyPr wrap="square">
+            <a:spAutoFit/>
+          </a:bodyPr>
+          <a:lstStyle/>
+          <a:p>
+            <a:pPr>
+              <a:spcAft>
+                <a:spcPts val="200"/>
+              </a:spcAft>
+              <a:defRPr sz="1200" b="1">
+                <a:solidFill>
+                  <a:srgbClr val="0B2545"/>
+                </a:solidFill>
+              </a:defRPr>
+            </a:pPr>
+            <a:r>
+              <a:t>Teaching Council Governance</a:t>
+            </a:r>
+          </a:p>
+          <a:p>
+            <a:pPr>
+              <a:spcAft>
+                <a:spcPts val="600"/>
+              </a:spcAft>
+              <a:defRPr sz="850">
+                <a:solidFill>
+                  <a:srgbClr val="64748B"/>
+                </a:solidFill>
+              </a:defRPr>
+            </a:pPr>
+            <a:r>
+              <a:t>Teaching Council of Zambia</a:t>
+            </a:r>
+          </a:p>
+          <a:p>
+            <a:pPr>
+              <a:spcAft>
+                <a:spcPts val="400"/>
+              </a:spcAft>
+              <a:defRPr sz="950">
+                <a:solidFill>
+                  <a:srgbClr val="1E293B"/>
+                </a:solidFill>
+              </a:defRPr>
+            </a:pPr>
+            <a:r>
+              <a:t>• TCZ Registration Tracking: Logs teacher registration numbers and practising certificate validity.</a:t>
+            </a:r>
+          </a:p>
+          <a:p>
+            <a:pPr>
+              <a:spcAft>
+                <a:spcPts val="400"/>
+              </a:spcAft>
+              <a:defRPr sz="950">
+                <a:solidFill>
+                  <a:srgbClr val="1E293B"/>
+                </a:solidFill>
+              </a:defRPr>
+            </a:pPr>
+            <a:r>
+              <a:t>• Automated Expiry Warnings: Alerts administration 60 days before a teacher's practising license expires.</a:t>
+            </a:r>
+          </a:p>
+          <a:p>
+            <a:pPr>
+              <a:spcAft>
+                <a:spcPts val="400"/>
+              </a:spcAft>
+              <a:defRPr sz="950">
+                <a:solidFill>
+                  <a:srgbClr val="1E293B"/>
+                </a:solidFill>
+              </a:defRPr>
+            </a:pPr>
+            <a:r>
+              <a:t>• Staff Professional Development: Records continuous professional development (CPD) modules.</a:t>
+            </a:r>
+          </a:p>
+        </p:txBody>
+      </p:sp>
+    </p:spTree>
+  </p:cSld>
+  <p:clrMapOvr>
+    <a:masterClrMapping/>
+  </p:clrMapOvr>
+</p:sld>
+</file>
+
+<file path=ppt/slides/slide13.xml><?xml version="1.0" encoding="utf-8"?>
+<p:sld xmlns:a="http://schemas.openxmlformats.org/drawingml/2006/main" xmlns:p="http://schemas.openxmlformats.org/presentationml/2006/main" xmlns:r="http://schemas.openxmlformats.org/officeDocument/2006/relationships">
+  <p:cSld>
+    <p:spTree>
+      <p:nvGrpSpPr>
+        <p:cNvPr id="1" name=""/>
+        <p:cNvGrpSpPr/>
+        <p:nvPr/>
+      </p:nvGrpSpPr>
+      <p:grpSpPr/>
+      <p:sp>
+        <p:nvSpPr>
+          <p:cNvPr id="2" name="Rectangle 1"/>
+          <p:cNvSpPr/>
+          <p:nvPr/>
+        </p:nvSpPr>
+        <p:spPr>
+          <a:xfrm>
+            <a:off x="0" y="0"/>
+            <a:ext cx="12191695" cy="6858000"/>
+          </a:xfrm>
+          <a:prstGeom prst="rect">
+            <a:avLst/>
+          </a:prstGeom>
+          <a:solidFill>
+            <a:srgbClr val="F8FAFC"/>
+          </a:solidFill>
+          <a:ln>
+            <a:noFill/>
+          </a:ln>
+        </p:spPr>
+        <p:style>
+          <a:lnRef idx="1">
+            <a:schemeClr val="accent1"/>
+          </a:lnRef>
+          <a:fillRef idx="3">
+            <a:schemeClr val="accent1"/>
+          </a:fillRef>
+          <a:effectRef idx="2">
+            <a:schemeClr val="accent1"/>
+          </a:effectRef>
+          <a:fontRef idx="minor">
+            <a:schemeClr val="lt1"/>
+          </a:fontRef>
+        </p:style>
+        <p:txBody>
+          <a:bodyPr rtlCol="0" anchor="ctr"/>
+          <a:lstStyle/>
+          <a:p>
+            <a:pPr algn="ctr"/>
+          </a:p>
+        </p:txBody>
+      </p:sp>
+      <p:sp>
+        <p:nvSpPr>
+          <p:cNvPr id="3" name="Rectangle 2"/>
+          <p:cNvSpPr/>
+          <p:nvPr/>
+        </p:nvSpPr>
+        <p:spPr>
+          <a:xfrm>
+            <a:off x="0" y="0"/>
+            <a:ext cx="12191695" cy="1005840"/>
+          </a:xfrm>
+          <a:prstGeom prst="rect">
+            <a:avLst/>
+          </a:prstGeom>
+          <a:solidFill>
+            <a:srgbClr val="0B2545"/>
+          </a:solidFill>
+          <a:ln>
+            <a:noFill/>
+          </a:ln>
+        </p:spPr>
+        <p:style>
+          <a:lnRef idx="1">
+            <a:schemeClr val="accent1"/>
+          </a:lnRef>
+          <a:fillRef idx="3">
+            <a:schemeClr val="accent1"/>
+          </a:fillRef>
+          <a:effectRef idx="2">
+            <a:schemeClr val="accent1"/>
+          </a:effectRef>
+          <a:fontRef idx="minor">
+            <a:schemeClr val="lt1"/>
+          </a:fontRef>
+        </p:style>
+        <p:txBody>
+          <a:bodyPr rtlCol="0" anchor="ctr"/>
+          <a:lstStyle/>
+          <a:p>
+            <a:pPr algn="ctr"/>
+          </a:p>
+        </p:txBody>
+      </p:sp>
+      <p:sp>
+        <p:nvSpPr>
+          <p:cNvPr id="4" name="TextBox 3"/>
+          <p:cNvSpPr txBox="1"/>
+          <p:nvPr/>
+        </p:nvSpPr>
+        <p:spPr>
+          <a:xfrm>
+            <a:off x="731520" y="109728"/>
+            <a:ext cx="10698480" cy="256032"/>
+          </a:xfrm>
+          <a:prstGeom prst="rect">
+            <a:avLst/>
+          </a:prstGeom>
+          <a:noFill/>
+        </p:spPr>
+        <p:txBody>
+          <a:bodyPr wrap="square">
+            <a:spAutoFit/>
+          </a:bodyPr>
+          <a:lstStyle/>
+          <a:p>
+            <a:pPr>
+              <a:defRPr sz="900" b="1">
+                <a:solidFill>
+                  <a:srgbClr val="D4AF37"/>
+                </a:solidFill>
+              </a:defRPr>
+            </a:pPr>
+            <a:r>
+              <a:t>LEGACY SCHOOL SOLWEZI • EXECUTIVE STRATEGY &amp; TECHNOLOGY DEPLOYMENT</a:t>
+            </a:r>
+          </a:p>
+        </p:txBody>
+      </p:sp>
+      <p:sp>
+        <p:nvSpPr>
+          <p:cNvPr id="5" name="TextBox 4"/>
+          <p:cNvSpPr txBox="1"/>
+          <p:nvPr/>
+        </p:nvSpPr>
+        <p:spPr>
+          <a:xfrm>
+            <a:off x="731520" y="347472"/>
+            <a:ext cx="10698480" cy="502920"/>
+          </a:xfrm>
+          <a:prstGeom prst="rect">
+            <a:avLst/>
+          </a:prstGeom>
+          <a:noFill/>
+        </p:spPr>
+        <p:txBody>
+          <a:bodyPr wrap="square">
+            <a:spAutoFit/>
+          </a:bodyPr>
+          <a:lstStyle/>
+          <a:p>
+            <a:pPr>
+              <a:defRPr sz="2000" b="1">
+                <a:solidFill>
+                  <a:srgbClr val="FFFFFF"/>
+                </a:solidFill>
+              </a:defRPr>
+            </a:pPr>
+            <a:r>
+              <a:t>Operational Roadmap &amp; Enterprise Service Level Agreement (SLA)</a:t>
+            </a:r>
+          </a:p>
+        </p:txBody>
+      </p:sp>
+      <p:sp>
+        <p:nvSpPr>
+          <p:cNvPr id="6" name="Rounded Rectangle 5"/>
+          <p:cNvSpPr/>
+          <p:nvPr/>
+        </p:nvSpPr>
+        <p:spPr>
+          <a:xfrm>
+            <a:off x="731520" y="1371600"/>
+            <a:ext cx="2606040" cy="3931920"/>
+          </a:xfrm>
+          <a:prstGeom prst="roundRect">
+            <a:avLst/>
+          </a:prstGeom>
+          <a:solidFill>
+            <a:srgbClr val="FFFFFF"/>
+          </a:solidFill>
+          <a:ln>
+            <a:solidFill>
+              <a:srgbClr val="E2E8F0"/>
+            </a:solidFill>
+          </a:ln>
+        </p:spPr>
+        <p:style>
+          <a:lnRef idx="1">
+            <a:schemeClr val="accent1"/>
+          </a:lnRef>
+          <a:fillRef idx="3">
+            <a:schemeClr val="accent1"/>
+          </a:fillRef>
+          <a:effectRef idx="2">
+            <a:schemeClr val="accent1"/>
+          </a:effectRef>
+          <a:fontRef idx="minor">
+            <a:schemeClr val="lt1"/>
+          </a:fontRef>
+        </p:style>
+        <p:txBody>
+          <a:bodyPr rtlCol="0" anchor="ctr"/>
+          <a:lstStyle/>
+          <a:p>
+            <a:pPr algn="ctr"/>
+          </a:p>
+        </p:txBody>
+      </p:sp>
+      <p:sp>
+        <p:nvSpPr>
+          <p:cNvPr id="7" name="Rectangle 6"/>
+          <p:cNvSpPr/>
+          <p:nvPr/>
+        </p:nvSpPr>
+        <p:spPr>
+          <a:xfrm>
+            <a:off x="731520" y="1371600"/>
+            <a:ext cx="2606040" cy="91440"/>
+          </a:xfrm>
+          <a:prstGeom prst="rect">
+            <a:avLst/>
+          </a:prstGeom>
+          <a:solidFill>
+            <a:srgbClr val="134074"/>
+          </a:solidFill>
+          <a:ln>
+            <a:noFill/>
+          </a:ln>
+        </p:spPr>
+        <p:style>
+          <a:lnRef idx="1">
+            <a:schemeClr val="accent1"/>
+          </a:lnRef>
+          <a:fillRef idx="3">
+            <a:schemeClr val="accent1"/>
+          </a:fillRef>
+          <a:effectRef idx="2">
+            <a:schemeClr val="accent1"/>
+          </a:effectRef>
+          <a:fontRef idx="minor">
+            <a:schemeClr val="lt1"/>
+          </a:fontRef>
+        </p:style>
+        <p:txBody>
+          <a:bodyPr rtlCol="0" anchor="ctr"/>
+          <a:lstStyle/>
+          <a:p>
+            <a:pPr algn="ctr"/>
+          </a:p>
+        </p:txBody>
+      </p:sp>
+      <p:sp>
+        <p:nvSpPr>
+          <p:cNvPr id="8" name="TextBox 7"/>
+          <p:cNvSpPr txBox="1"/>
+          <p:nvPr/>
+        </p:nvSpPr>
+        <p:spPr>
+          <a:xfrm>
+            <a:off x="868680" y="1554480"/>
+            <a:ext cx="2331720" cy="3566160"/>
+          </a:xfrm>
+          <a:prstGeom prst="rect">
+            <a:avLst/>
+          </a:prstGeom>
+          <a:noFill/>
+        </p:spPr>
+        <p:txBody>
+          <a:bodyPr wrap="square">
+            <a:spAutoFit/>
+          </a:bodyPr>
+          <a:lstStyle/>
+          <a:p>
+            <a:pPr>
+              <a:spcAft>
+                <a:spcPts val="1000"/>
+              </a:spcAft>
+              <a:defRPr sz="1100" b="1">
+                <a:solidFill>
+                  <a:srgbClr val="0B2545"/>
+                </a:solidFill>
+              </a:defRPr>
+            </a:pPr>
+            <a:r>
+              <a:t>Week 1: Core Setup</a:t>
+            </a:r>
+          </a:p>
+          <a:p>
+            <a:pPr>
+              <a:spcAft>
+                <a:spcPts val="600"/>
+              </a:spcAft>
+              <a:defRPr sz="950">
+                <a:solidFill>
+                  <a:srgbClr val="1E293B"/>
+                </a:solidFill>
+              </a:defRPr>
+            </a:pPr>
+            <a:r>
+              <a:t>✔ Configure staff roles &amp; RBAC</a:t>
+            </a:r>
+          </a:p>
+          <a:p>
+            <a:pPr>
+              <a:spcAft>
+                <a:spcPts val="600"/>
+              </a:spcAft>
+              <a:defRPr sz="950">
+                <a:solidFill>
+                  <a:srgbClr val="1E293B"/>
+                </a:solidFill>
+              </a:defRPr>
+            </a:pPr>
+            <a:r>
+              <a:t>✔ Import existing student biodata</a:t>
+            </a:r>
+          </a:p>
+          <a:p>
+            <a:pPr>
+              <a:spcAft>
+                <a:spcPts val="600"/>
+              </a:spcAft>
+              <a:defRPr sz="950">
+                <a:solidFill>
+                  <a:srgbClr val="1E293B"/>
+                </a:solidFill>
+              </a:defRPr>
+            </a:pPr>
+            <a:r>
+              <a:t>✔ Initialize 2026 Term 3 ledgers</a:t>
+            </a:r>
+          </a:p>
+          <a:p>
+            <a:pPr>
+              <a:spcAft>
+                <a:spcPts val="600"/>
+              </a:spcAft>
+              <a:defRPr sz="950">
+                <a:solidFill>
+                  <a:srgbClr val="1E293B"/>
+                </a:solidFill>
+              </a:defRPr>
+            </a:pPr>
+            <a:r>
+              <a:t>✔ Deploy Android APK to leadership</a:t>
+            </a:r>
+          </a:p>
+        </p:txBody>
+      </p:sp>
+      <p:sp>
+        <p:nvSpPr>
+          <p:cNvPr id="9" name="Rounded Rectangle 8"/>
+          <p:cNvSpPr/>
+          <p:nvPr/>
+        </p:nvSpPr>
+        <p:spPr>
+          <a:xfrm>
+            <a:off x="3429000" y="1371600"/>
+            <a:ext cx="2606040" cy="3931920"/>
+          </a:xfrm>
+          <a:prstGeom prst="roundRect">
+            <a:avLst/>
+          </a:prstGeom>
+          <a:solidFill>
+            <a:srgbClr val="FFFFFF"/>
+          </a:solidFill>
+          <a:ln>
+            <a:solidFill>
+              <a:srgbClr val="E2E8F0"/>
+            </a:solidFill>
+          </a:ln>
+        </p:spPr>
+        <p:style>
+          <a:lnRef idx="1">
+            <a:schemeClr val="accent1"/>
+          </a:lnRef>
+          <a:fillRef idx="3">
+            <a:schemeClr val="accent1"/>
+          </a:fillRef>
+          <a:effectRef idx="2">
+            <a:schemeClr val="accent1"/>
+          </a:effectRef>
+          <a:fontRef idx="minor">
+            <a:schemeClr val="lt1"/>
+          </a:fontRef>
+        </p:style>
+        <p:txBody>
+          <a:bodyPr rtlCol="0" anchor="ctr"/>
+          <a:lstStyle/>
+          <a:p>
+            <a:pPr algn="ctr"/>
+          </a:p>
+        </p:txBody>
+      </p:sp>
+      <p:sp>
+        <p:nvSpPr>
+          <p:cNvPr id="10" name="Rectangle 9"/>
+          <p:cNvSpPr/>
+          <p:nvPr/>
+        </p:nvSpPr>
+        <p:spPr>
+          <a:xfrm>
+            <a:off x="3429000" y="1371600"/>
+            <a:ext cx="2606040" cy="91440"/>
+          </a:xfrm>
+          <a:prstGeom prst="rect">
+            <a:avLst/>
+          </a:prstGeom>
+          <a:solidFill>
+            <a:srgbClr val="134074"/>
+          </a:solidFill>
+          <a:ln>
+            <a:noFill/>
+          </a:ln>
+        </p:spPr>
+        <p:style>
+          <a:lnRef idx="1">
+            <a:schemeClr val="accent1"/>
+          </a:lnRef>
+          <a:fillRef idx="3">
+            <a:schemeClr val="accent1"/>
+          </a:fillRef>
+          <a:effectRef idx="2">
+            <a:schemeClr val="accent1"/>
+          </a:effectRef>
+          <a:fontRef idx="minor">
+            <a:schemeClr val="lt1"/>
+          </a:fontRef>
+        </p:style>
+        <p:txBody>
+          <a:bodyPr rtlCol="0" anchor="ctr"/>
+          <a:lstStyle/>
+          <a:p>
+            <a:pPr algn="ctr"/>
+          </a:p>
+        </p:txBody>
+      </p:sp>
+      <p:sp>
+        <p:nvSpPr>
+          <p:cNvPr id="11" name="TextBox 10"/>
+          <p:cNvSpPr txBox="1"/>
+          <p:nvPr/>
+        </p:nvSpPr>
+        <p:spPr>
+          <a:xfrm>
+            <a:off x="3566160" y="1554480"/>
+            <a:ext cx="2331720" cy="3566160"/>
+          </a:xfrm>
+          <a:prstGeom prst="rect">
+            <a:avLst/>
+          </a:prstGeom>
+          <a:noFill/>
+        </p:spPr>
+        <p:txBody>
+          <a:bodyPr wrap="square">
+            <a:spAutoFit/>
+          </a:bodyPr>
+          <a:lstStyle/>
+          <a:p>
+            <a:pPr>
+              <a:spcAft>
+                <a:spcPts val="1000"/>
+              </a:spcAft>
+              <a:defRPr sz="1100" b="1">
+                <a:solidFill>
+                  <a:srgbClr val="0B2545"/>
+                </a:solidFill>
+              </a:defRPr>
+            </a:pPr>
+            <a:r>
+              <a:t>Week 2: Staff Training</a:t>
+            </a:r>
+          </a:p>
+          <a:p>
+            <a:pPr>
+              <a:spcAft>
+                <a:spcPts val="600"/>
+              </a:spcAft>
+              <a:defRPr sz="950">
+                <a:solidFill>
+                  <a:srgbClr val="1E293B"/>
+                </a:solidFill>
+              </a:defRPr>
+            </a:pPr>
+            <a:r>
+              <a:t>✔ Teacher roll-call workshops</a:t>
+            </a:r>
+          </a:p>
+          <a:p>
+            <a:pPr>
+              <a:spcAft>
+                <a:spcPts val="600"/>
+              </a:spcAft>
+              <a:defRPr sz="950">
+                <a:solidFill>
+                  <a:srgbClr val="1E293B"/>
+                </a:solidFill>
+              </a:defRPr>
+            </a:pPr>
+            <a:r>
+              <a:t>✔ Housemaster curfew training</a:t>
+            </a:r>
+          </a:p>
+          <a:p>
+            <a:pPr>
+              <a:spcAft>
+                <a:spcPts val="600"/>
+              </a:spcAft>
+              <a:defRPr sz="950">
+                <a:solidFill>
+                  <a:srgbClr val="1E293B"/>
+                </a:solidFill>
+              </a:defRPr>
+            </a:pPr>
+            <a:r>
+              <a:t>✔ Bursary mobile money testing</a:t>
+            </a:r>
+          </a:p>
+          <a:p>
+            <a:pPr>
+              <a:spcAft>
+                <a:spcPts val="600"/>
+              </a:spcAft>
+              <a:defRPr sz="950">
+                <a:solidFill>
+                  <a:srgbClr val="1E293B"/>
+                </a:solidFill>
+              </a:defRPr>
+            </a:pPr>
+            <a:r>
+              <a:t>✔ Bus telematics route dry-runs</a:t>
+            </a:r>
+          </a:p>
+        </p:txBody>
+      </p:sp>
+      <p:sp>
+        <p:nvSpPr>
+          <p:cNvPr id="12" name="Rounded Rectangle 11"/>
+          <p:cNvSpPr/>
+          <p:nvPr/>
+        </p:nvSpPr>
+        <p:spPr>
+          <a:xfrm>
+            <a:off x="6126480" y="1371600"/>
+            <a:ext cx="2606040" cy="3931920"/>
+          </a:xfrm>
+          <a:prstGeom prst="roundRect">
+            <a:avLst/>
+          </a:prstGeom>
+          <a:solidFill>
+            <a:srgbClr val="FFFFFF"/>
+          </a:solidFill>
+          <a:ln>
+            <a:solidFill>
+              <a:srgbClr val="E2E8F0"/>
+            </a:solidFill>
+          </a:ln>
+        </p:spPr>
+        <p:style>
+          <a:lnRef idx="1">
+            <a:schemeClr val="accent1"/>
+          </a:lnRef>
+          <a:fillRef idx="3">
+            <a:schemeClr val="accent1"/>
+          </a:fillRef>
+          <a:effectRef idx="2">
+            <a:schemeClr val="accent1"/>
+          </a:effectRef>
+          <a:fontRef idx="minor">
+            <a:schemeClr val="lt1"/>
+          </a:fontRef>
+        </p:style>
+        <p:txBody>
+          <a:bodyPr rtlCol="0" anchor="ctr"/>
+          <a:lstStyle/>
+          <a:p>
+            <a:pPr algn="ctr"/>
+          </a:p>
+        </p:txBody>
+      </p:sp>
+      <p:sp>
+        <p:nvSpPr>
+          <p:cNvPr id="13" name="Rectangle 12"/>
+          <p:cNvSpPr/>
+          <p:nvPr/>
+        </p:nvSpPr>
+        <p:spPr>
+          <a:xfrm>
+            <a:off x="6126480" y="1371600"/>
+            <a:ext cx="2606040" cy="91440"/>
+          </a:xfrm>
+          <a:prstGeom prst="rect">
+            <a:avLst/>
+          </a:prstGeom>
+          <a:solidFill>
+            <a:srgbClr val="134074"/>
+          </a:solidFill>
+          <a:ln>
+            <a:noFill/>
+          </a:ln>
+        </p:spPr>
+        <p:style>
+          <a:lnRef idx="1">
+            <a:schemeClr val="accent1"/>
+          </a:lnRef>
+          <a:fillRef idx="3">
+            <a:schemeClr val="accent1"/>
+          </a:fillRef>
+          <a:effectRef idx="2">
+            <a:schemeClr val="accent1"/>
+          </a:effectRef>
+          <a:fontRef idx="minor">
+            <a:schemeClr val="lt1"/>
+          </a:fontRef>
+        </p:style>
+        <p:txBody>
+          <a:bodyPr rtlCol="0" anchor="ctr"/>
+          <a:lstStyle/>
+          <a:p>
+            <a:pPr algn="ctr"/>
+          </a:p>
+        </p:txBody>
+      </p:sp>
+      <p:sp>
+        <p:nvSpPr>
+          <p:cNvPr id="14" name="TextBox 13"/>
+          <p:cNvSpPr txBox="1"/>
+          <p:nvPr/>
+        </p:nvSpPr>
+        <p:spPr>
+          <a:xfrm>
+            <a:off x="6263640" y="1554480"/>
+            <a:ext cx="2331720" cy="3566160"/>
+          </a:xfrm>
+          <a:prstGeom prst="rect">
+            <a:avLst/>
+          </a:prstGeom>
+          <a:noFill/>
+        </p:spPr>
+        <p:txBody>
+          <a:bodyPr wrap="square">
+            <a:spAutoFit/>
+          </a:bodyPr>
+          <a:lstStyle/>
+          <a:p>
+            <a:pPr>
+              <a:spcAft>
+                <a:spcPts val="1000"/>
+              </a:spcAft>
+              <a:defRPr sz="1100" b="1">
+                <a:solidFill>
+                  <a:srgbClr val="0B2545"/>
+                </a:solidFill>
+              </a:defRPr>
+            </a:pPr>
+            <a:r>
+              <a:t>Week 3: Guardian Launch</a:t>
+            </a:r>
+          </a:p>
+          <a:p>
+            <a:pPr>
+              <a:spcAft>
+                <a:spcPts val="600"/>
+              </a:spcAft>
+              <a:defRPr sz="950">
+                <a:solidFill>
+                  <a:srgbClr val="1E293B"/>
+                </a:solidFill>
+              </a:defRPr>
+            </a:pPr>
+            <a:r>
+              <a:t>✔ SMS onboarding to parents</a:t>
+            </a:r>
+          </a:p>
+          <a:p>
+            <a:pPr>
+              <a:spcAft>
+                <a:spcPts val="600"/>
+              </a:spcAft>
+              <a:defRPr sz="950">
+                <a:solidFill>
+                  <a:srgbClr val="1E293B"/>
+                </a:solidFill>
+              </a:defRPr>
+            </a:pPr>
+            <a:r>
+              <a:t>✔ Parent portal login release</a:t>
+            </a:r>
+          </a:p>
+          <a:p>
+            <a:pPr>
+              <a:spcAft>
+                <a:spcPts val="600"/>
+              </a:spcAft>
+              <a:defRPr sz="950">
+                <a:solidFill>
+                  <a:srgbClr val="1E293B"/>
+                </a:solidFill>
+              </a:defRPr>
+            </a:pPr>
+            <a:r>
+              <a:t>✔ Airtel/MTN payment activation</a:t>
+            </a:r>
+          </a:p>
+          <a:p>
+            <a:pPr>
+              <a:spcAft>
+                <a:spcPts val="600"/>
+              </a:spcAft>
+              <a:defRPr sz="950">
+                <a:solidFill>
+                  <a:srgbClr val="1E293B"/>
+                </a:solidFill>
+              </a:defRPr>
+            </a:pPr>
+            <a:r>
+              <a:t>✔ Student ID card distribution</a:t>
+            </a:r>
+          </a:p>
+        </p:txBody>
+      </p:sp>
+      <p:sp>
+        <p:nvSpPr>
+          <p:cNvPr id="15" name="Rounded Rectangle 14"/>
+          <p:cNvSpPr/>
+          <p:nvPr/>
+        </p:nvSpPr>
+        <p:spPr>
+          <a:xfrm>
+            <a:off x="8823960" y="1371600"/>
+            <a:ext cx="2606040" cy="3931920"/>
+          </a:xfrm>
+          <a:prstGeom prst="roundRect">
+            <a:avLst/>
+          </a:prstGeom>
+          <a:solidFill>
+            <a:srgbClr val="FFFFFF"/>
+          </a:solidFill>
+          <a:ln>
+            <a:solidFill>
+              <a:srgbClr val="E2E8F0"/>
+            </a:solidFill>
+          </a:ln>
+        </p:spPr>
+        <p:style>
+          <a:lnRef idx="1">
+            <a:schemeClr val="accent1"/>
+          </a:lnRef>
+          <a:fillRef idx="3">
+            <a:schemeClr val="accent1"/>
+          </a:fillRef>
+          <a:effectRef idx="2">
+            <a:schemeClr val="accent1"/>
+          </a:effectRef>
+          <a:fontRef idx="minor">
+            <a:schemeClr val="lt1"/>
+          </a:fontRef>
+        </p:style>
+        <p:txBody>
+          <a:bodyPr rtlCol="0" anchor="ctr"/>
+          <a:lstStyle/>
+          <a:p>
+            <a:pPr algn="ctr"/>
+          </a:p>
+        </p:txBody>
+      </p:sp>
+      <p:sp>
+        <p:nvSpPr>
+          <p:cNvPr id="16" name="Rectangle 15"/>
+          <p:cNvSpPr/>
+          <p:nvPr/>
+        </p:nvSpPr>
+        <p:spPr>
+          <a:xfrm>
+            <a:off x="8823960" y="1371600"/>
+            <a:ext cx="2606040" cy="91440"/>
+          </a:xfrm>
+          <a:prstGeom prst="rect">
+            <a:avLst/>
+          </a:prstGeom>
+          <a:solidFill>
+            <a:srgbClr val="134074"/>
+          </a:solidFill>
+          <a:ln>
+            <a:noFill/>
+          </a:ln>
+        </p:spPr>
+        <p:style>
+          <a:lnRef idx="1">
+            <a:schemeClr val="accent1"/>
+          </a:lnRef>
+          <a:fillRef idx="3">
+            <a:schemeClr val="accent1"/>
+          </a:fillRef>
+          <a:effectRef idx="2">
+            <a:schemeClr val="accent1"/>
+          </a:effectRef>
+          <a:fontRef idx="minor">
+            <a:schemeClr val="lt1"/>
+          </a:fontRef>
+        </p:style>
+        <p:txBody>
+          <a:bodyPr rtlCol="0" anchor="ctr"/>
+          <a:lstStyle/>
+          <a:p>
+            <a:pPr algn="ctr"/>
+          </a:p>
+        </p:txBody>
+      </p:sp>
+      <p:sp>
+        <p:nvSpPr>
+          <p:cNvPr id="17" name="TextBox 16"/>
+          <p:cNvSpPr txBox="1"/>
+          <p:nvPr/>
+        </p:nvSpPr>
+        <p:spPr>
+          <a:xfrm>
+            <a:off x="8961120" y="1554480"/>
+            <a:ext cx="2331720" cy="3566160"/>
+          </a:xfrm>
+          <a:prstGeom prst="rect">
+            <a:avLst/>
+          </a:prstGeom>
+          <a:noFill/>
+        </p:spPr>
+        <p:txBody>
+          <a:bodyPr wrap="square">
+            <a:spAutoFit/>
+          </a:bodyPr>
+          <a:lstStyle/>
+          <a:p>
+            <a:pPr>
+              <a:spcAft>
+                <a:spcPts val="1000"/>
+              </a:spcAft>
+              <a:defRPr sz="1100" b="1">
+                <a:solidFill>
+                  <a:srgbClr val="0B2545"/>
+                </a:solidFill>
+              </a:defRPr>
+            </a:pPr>
+            <a:r>
+              <a:t>Week 4: Full Cutover</a:t>
+            </a:r>
+          </a:p>
+          <a:p>
+            <a:pPr>
+              <a:spcAft>
+                <a:spcPts val="600"/>
+              </a:spcAft>
+              <a:defRPr sz="950">
+                <a:solidFill>
+                  <a:srgbClr val="1E293B"/>
+                </a:solidFill>
+              </a:defRPr>
+            </a:pPr>
+            <a:r>
+              <a:t>✔ Decommission paper registers</a:t>
+            </a:r>
+          </a:p>
+          <a:p>
+            <a:pPr>
+              <a:spcAft>
+                <a:spcPts val="600"/>
+              </a:spcAft>
+              <a:defRPr sz="950">
+                <a:solidFill>
+                  <a:srgbClr val="1E293B"/>
+                </a:solidFill>
+              </a:defRPr>
+            </a:pPr>
+            <a:r>
+              <a:t>✔ Automate daily absentee SMS</a:t>
+            </a:r>
+          </a:p>
+          <a:p>
+            <a:pPr>
+              <a:spcAft>
+                <a:spcPts val="600"/>
+              </a:spcAft>
+              <a:defRPr sz="950">
+                <a:solidFill>
+                  <a:srgbClr val="1E293B"/>
+                </a:solidFill>
+              </a:defRPr>
+            </a:pPr>
+            <a:r>
+              <a:t>✔ Publish mid-term markbooks</a:t>
+            </a:r>
+          </a:p>
+          <a:p>
+            <a:pPr>
+              <a:spcAft>
+                <a:spcPts val="600"/>
+              </a:spcAft>
+              <a:defRPr sz="950">
+                <a:solidFill>
+                  <a:srgbClr val="1E293B"/>
+                </a:solidFill>
+              </a:defRPr>
+            </a:pPr>
+            <a:r>
+              <a:t>✔ First DEBS statutory return audit</a:t>
+            </a:r>
+          </a:p>
+        </p:txBody>
+      </p:sp>
+      <p:sp>
+        <p:nvSpPr>
+          <p:cNvPr id="18" name="Rounded Rectangle 17"/>
+          <p:cNvSpPr/>
+          <p:nvPr/>
+        </p:nvSpPr>
+        <p:spPr>
+          <a:xfrm>
+            <a:off x="731520" y="5486400"/>
+            <a:ext cx="10728655" cy="914400"/>
+          </a:xfrm>
+          <a:prstGeom prst="roundRect">
+            <a:avLst/>
+          </a:prstGeom>
+          <a:solidFill>
+            <a:srgbClr val="F0FDF4"/>
+          </a:solidFill>
+          <a:ln>
+            <a:solidFill>
+              <a:srgbClr val="BBF7D0"/>
+            </a:solidFill>
+          </a:ln>
+        </p:spPr>
+        <p:style>
+          <a:lnRef idx="1">
+            <a:schemeClr val="accent1"/>
+          </a:lnRef>
+          <a:fillRef idx="3">
+            <a:schemeClr val="accent1"/>
+          </a:fillRef>
+          <a:effectRef idx="2">
+            <a:schemeClr val="accent1"/>
+          </a:effectRef>
+          <a:fontRef idx="minor">
+            <a:schemeClr val="lt1"/>
+          </a:fontRef>
+        </p:style>
+        <p:txBody>
+          <a:bodyPr rtlCol="0" anchor="ctr"/>
+          <a:lstStyle/>
+          <a:p>
+            <a:pPr algn="ctr"/>
+          </a:p>
+        </p:txBody>
+      </p:sp>
+      <p:sp>
+        <p:nvSpPr>
+          <p:cNvPr id="19" name="TextBox 18"/>
+          <p:cNvSpPr txBox="1"/>
+          <p:nvPr/>
+        </p:nvSpPr>
+        <p:spPr>
+          <a:xfrm>
+            <a:off x="914400" y="5532120"/>
+            <a:ext cx="10332720" cy="777240"/>
+          </a:xfrm>
+          <a:prstGeom prst="rect">
+            <a:avLst/>
+          </a:prstGeom>
+          <a:noFill/>
+        </p:spPr>
+        <p:txBody>
+          <a:bodyPr wrap="square">
+            <a:spAutoFit/>
+          </a:bodyPr>
+          <a:lstStyle/>
+          <a:p>
+            <a:pPr>
+              <a:defRPr sz="1050" b="1">
+                <a:solidFill>
+                  <a:srgbClr val="166534"/>
+                </a:solidFill>
+              </a:defRPr>
+            </a:pPr>
+            <a:r>
+              <a:t>Enterprise Service Level Agreement (SLA): 99.9% Uptime Guarantee • Automated Nightly Encrypted Backups • Dedicated On-Site Technical Support for Solwezi Multi-Campus Operations</a:t>
+            </a:r>
+          </a:p>
+        </p:txBody>
+      </p:sp>
+    </p:spTree>
+  </p:cSld>
+  <p:clrMapOvr>
+    <a:masterClrMapping/>
+  </p:clrMapOvr>
+</p:sld>
+</file>
+
+<file path=ppt/slides/slide14.xml><?xml version="1.0" encoding="utf-8"?>
+<p:sld xmlns:a="http://schemas.openxmlformats.org/drawingml/2006/main" xmlns:p="http://schemas.openxmlformats.org/presentationml/2006/main" xmlns:r="http://schemas.openxmlformats.org/officeDocument/2006/relationships">
+  <p:cSld>
+    <p:spTree>
+      <p:nvGrpSpPr>
+        <p:cNvPr id="1" name=""/>
+        <p:cNvGrpSpPr/>
+        <p:nvPr/>
+      </p:nvGrpSpPr>
+      <p:grpSpPr/>
+      <p:sp>
+        <p:nvSpPr>
+          <p:cNvPr id="2" name="Rectangle 1"/>
+          <p:cNvSpPr/>
+          <p:nvPr/>
+        </p:nvSpPr>
+        <p:spPr>
+          <a:xfrm>
+            <a:off x="0" y="0"/>
+            <a:ext cx="12191695" cy="6858000"/>
+          </a:xfrm>
+          <a:prstGeom prst="rect">
+            <a:avLst/>
+          </a:prstGeom>
+          <a:solidFill>
             <a:srgbClr val="0B2545"/>
           </a:solidFill>
           <a:ln>
@@ -4446,76 +6649,91 @@
           <a:p>
             <a:pPr>
               <a:spcAft>
-                <a:spcPts val="1200"/>
-              </a:spcAft>
-              <a:defRPr sz="1400" b="1">
+                <a:spcPts val="1400"/>
+              </a:spcAft>
+              <a:defRPr sz="1500" b="1">
                 <a:solidFill>
                   <a:srgbClr val="D4AF37"/>
                 </a:solidFill>
               </a:defRPr>
             </a:pPr>
             <a:r>
-              <a:t>SUMMARY OF RECOMMENDATIONS FOR EXECUTIVE APPROVAL</a:t>
-            </a:r>
-          </a:p>
-          <a:p>
-            <a:pPr>
-              <a:spcAft>
-                <a:spcPts val="1000"/>
-              </a:spcAft>
-              <a:defRPr sz="1200" b="1">
+              <a:t>EXECUTIVE RECOMMENDATIONS FOR STAKEHOLDER &amp; BOARD APPROVAL</a:t>
+            </a:r>
+          </a:p>
+          <a:p>
+            <a:pPr>
+              <a:spcAft>
+                <a:spcPts val="800"/>
+              </a:spcAft>
+              <a:defRPr sz="1100" b="1">
                 <a:solidFill>
                   <a:srgbClr val="FFFFFF"/>
                 </a:solidFill>
               </a:defRPr>
             </a:pPr>
             <a:r>
-              <a:t>1. Approve Sovereign SMIS Deployment: Authorize transition from manual spreadsheets to EduSphere across Mushitala and Urban campuses.</a:t>
-            </a:r>
-          </a:p>
-          <a:p>
-            <a:pPr>
-              <a:spcAft>
-                <a:spcPts val="1000"/>
-              </a:spcAft>
-              <a:defRPr sz="1200" b="1">
+              <a:t>1. Authorize Sovereign Multi-Campus SMIS Adoption: Formally approve EduSphere as the sole official operational platform across Mushitala Day and Kansanshi Boarding campuses.</a:t>
+            </a:r>
+          </a:p>
+          <a:p>
+            <a:pPr>
+              <a:spcAft>
+                <a:spcPts val="800"/>
+              </a:spcAft>
+              <a:defRPr sz="1100" b="1">
                 <a:solidFill>
                   <a:srgbClr val="FFFFFF"/>
                 </a:solidFill>
               </a:defRPr>
             </a:pPr>
             <a:r>
-              <a:t>2. Greenlight Smart Bus Hardware Integration: Commission in-bus Android telematics tablets and 800 NFC learner ID cards for automated boarding verification and SMS parent alerts.</a:t>
-            </a:r>
-          </a:p>
-          <a:p>
-            <a:pPr>
-              <a:spcAft>
-                <a:spcPts val="1000"/>
-              </a:spcAft>
-              <a:defRPr sz="1200" b="1">
+              <a:t>2. Approve Native Android APK Deployment: Authorize distribution of the com.legacyschool.edusphere mobile application to all teachers, boarding masters, and parents.</a:t>
+            </a:r>
+          </a:p>
+          <a:p>
+            <a:pPr>
+              <a:spcAft>
+                <a:spcPts val="800"/>
+              </a:spcAft>
+              <a:defRPr sz="1100" b="1">
                 <a:solidFill>
                   <a:srgbClr val="FFFFFF"/>
                 </a:solidFill>
               </a:defRPr>
             </a:pPr>
             <a:r>
-              <a:t>3. Activate Integrated Mobile Money Gateway: Formalize Airtel &amp; MTN merchant aggregators to allow instant parent tuition settlements, reducing aged debt.</a:t>
-            </a:r>
-          </a:p>
-          <a:p>
-            <a:pPr>
-              <a:spcAft>
-                <a:spcPts val="1000"/>
-              </a:spcAft>
-              <a:defRPr sz="1200" b="1">
+              <a:t>3. Mandate Digital Official Letters: Adopt the automated official document generator with QR verification stamps for all acceptance, offer, and introduction correspondence.</a:t>
+            </a:r>
+          </a:p>
+          <a:p>
+            <a:pPr>
+              <a:spcAft>
+                <a:spcPts val="800"/>
+              </a:spcAft>
+              <a:defRPr sz="1100" b="1">
                 <a:solidFill>
                   <a:srgbClr val="FFFFFF"/>
                 </a:solidFill>
               </a:defRPr>
             </a:pPr>
             <a:r>
-              <a:t>4. Authorize 4-Week Rollout Roadmap: Direct the ICT and Academic departments to commence staff training and data validation for full Term 1 operation.</a:t>
+              <a:t>4. Institutionalize Mobile Money Invoicing: Formally activate integrated Airtel Money and MTN MoMo collection channels to accelerate fee clearance and eliminate unrecorded cash transactions.</a:t>
+            </a:r>
+          </a:p>
+          <a:p>
+            <a:pPr>
+              <a:spcAft>
+                <a:spcPts val="800"/>
+              </a:spcAft>
+              <a:defRPr sz="1100" b="1">
+                <a:solidFill>
+                  <a:srgbClr val="FFFFFF"/>
+                </a:solidFill>
+              </a:defRPr>
+            </a:pPr>
+            <a:r>
+              <a:t>5. Commit to 4-Week Full Cutover Roadmap: Direct the Academic, Finance, and ICT leadership to complete staff onboarding for full Term 3 operational excellence.</a:t>
             </a:r>
           </a:p>
           <a:p>
@@ -4528,7 +6746,7 @@
               </a:defRPr>
             </a:pPr>
             <a:r>
-              <a:t>Prepared with dedication for Legacy School Solwezi  •  We strive for your academic and moral excellence.</a:t>
+              <a:t>Prepared for Legacy School Solwezi • Office of the School Director &amp; Principal, Mr. Emmanuel Mwansa</a:t>
             </a:r>
           </a:p>
         </p:txBody>
@@ -4702,7 +6920,7 @@
               </a:defRPr>
             </a:pPr>
             <a:r>
-              <a:t>Executive Strategic Summary: Moving from Manual Risk to Automated Sovereignty</a:t>
+              <a:t>Dual-Campus Institutional Topology &amp; Operational Realities</a:t>
             </a:r>
           </a:p>
         </p:txBody>
@@ -4715,8 +6933,8 @@
         </p:nvSpPr>
         <p:spPr>
           <a:xfrm>
-            <a:off x="731520" y="1371600"/>
-            <a:ext cx="3474720" cy="3840480"/>
+            <a:off x="731520" y="1280160"/>
+            <a:ext cx="5212080" cy="5029200"/>
           </a:xfrm>
           <a:prstGeom prst="roundRect">
             <a:avLst/>
@@ -4724,7 +6942,7 @@
           <a:solidFill>
             <a:srgbClr val="FFFFFF"/>
           </a:solidFill>
-          <a:ln>
+          <a:ln w="12700">
             <a:solidFill>
               <a:srgbClr val="E2E8F0"/>
             </a:solidFill>
@@ -4760,146 +6978,8 @@
         </p:nvSpPr>
         <p:spPr>
           <a:xfrm>
-            <a:off x="731520" y="1371600"/>
-            <a:ext cx="3474720" cy="109728"/>
-          </a:xfrm>
-          <a:prstGeom prst="rect">
-            <a:avLst/>
-          </a:prstGeom>
-          <a:solidFill>
-            <a:srgbClr val="EF4444"/>
-          </a:solidFill>
-          <a:ln>
-            <a:noFill/>
-          </a:ln>
-        </p:spPr>
-        <p:style>
-          <a:lnRef idx="1">
-            <a:schemeClr val="accent1"/>
-          </a:lnRef>
-          <a:fillRef idx="3">
-            <a:schemeClr val="accent1"/>
-          </a:fillRef>
-          <a:effectRef idx="2">
-            <a:schemeClr val="accent1"/>
-          </a:effectRef>
-          <a:fontRef idx="minor">
-            <a:schemeClr val="lt1"/>
-          </a:fontRef>
-        </p:style>
-        <p:txBody>
-          <a:bodyPr rtlCol="0" anchor="ctr"/>
-          <a:lstStyle/>
-          <a:p>
-            <a:pPr algn="ctr"/>
-          </a:p>
-        </p:txBody>
-      </p:sp>
-      <p:sp>
-        <p:nvSpPr>
-          <p:cNvPr id="8" name="TextBox 7"/>
-          <p:cNvSpPr txBox="1"/>
-          <p:nvPr/>
-        </p:nvSpPr>
-        <p:spPr>
-          <a:xfrm>
-            <a:off x="960120" y="1645920"/>
-            <a:ext cx="3017520" cy="3291840"/>
-          </a:xfrm>
-          <a:prstGeom prst="rect">
-            <a:avLst/>
-          </a:prstGeom>
-          <a:noFill/>
-        </p:spPr>
-        <p:txBody>
-          <a:bodyPr wrap="square">
-            <a:spAutoFit/>
-          </a:bodyPr>
-          <a:lstStyle/>
-          <a:p>
-            <a:pPr>
-              <a:spcAft>
-                <a:spcPts val="1200"/>
-              </a:spcAft>
-              <a:defRPr sz="1400" b="1">
-                <a:solidFill>
-                  <a:srgbClr val="1E293B"/>
-                </a:solidFill>
-              </a:defRPr>
-            </a:pPr>
-            <a:r>
-              <a:t>Operational Fragmentation &amp; Leakage</a:t>
-            </a:r>
-          </a:p>
-          <a:p>
-            <a:pPr>
-              <a:defRPr sz="1100">
-                <a:solidFill>
-                  <a:srgbClr val="64748B"/>
-                </a:solidFill>
-              </a:defRPr>
-            </a:pPr>
-            <a:r>
-              <a:t>Traditional paper-based fee receipts, manual marksheets, and dispersed logbooks created administrative delays, reconciliatory blind spots, and parental anxiety across both Solwezi campuses.</a:t>
-            </a:r>
-          </a:p>
-        </p:txBody>
-      </p:sp>
-      <p:sp>
-        <p:nvSpPr>
-          <p:cNvPr id="9" name="Rounded Rectangle 8"/>
-          <p:cNvSpPr/>
-          <p:nvPr/>
-        </p:nvSpPr>
-        <p:spPr>
-          <a:xfrm>
-            <a:off x="4343400" y="1371600"/>
-            <a:ext cx="3474720" cy="3840480"/>
-          </a:xfrm>
-          <a:prstGeom prst="roundRect">
-            <a:avLst/>
-          </a:prstGeom>
-          <a:solidFill>
-            <a:srgbClr val="FFFFFF"/>
-          </a:solidFill>
-          <a:ln>
-            <a:solidFill>
-              <a:srgbClr val="E2E8F0"/>
-            </a:solidFill>
-          </a:ln>
-        </p:spPr>
-        <p:style>
-          <a:lnRef idx="1">
-            <a:schemeClr val="accent1"/>
-          </a:lnRef>
-          <a:fillRef idx="3">
-            <a:schemeClr val="accent1"/>
-          </a:fillRef>
-          <a:effectRef idx="2">
-            <a:schemeClr val="accent1"/>
-          </a:effectRef>
-          <a:fontRef idx="minor">
-            <a:schemeClr val="lt1"/>
-          </a:fontRef>
-        </p:style>
-        <p:txBody>
-          <a:bodyPr rtlCol="0" anchor="ctr"/>
-          <a:lstStyle/>
-          <a:p>
-            <a:pPr algn="ctr"/>
-          </a:p>
-        </p:txBody>
-      </p:sp>
-      <p:sp>
-        <p:nvSpPr>
-          <p:cNvPr id="10" name="Rectangle 9"/>
-          <p:cNvSpPr/>
-          <p:nvPr/>
-        </p:nvSpPr>
-        <p:spPr>
-          <a:xfrm>
-            <a:off x="4343400" y="1371600"/>
-            <a:ext cx="3474720" cy="109728"/>
+            <a:off x="731520" y="1280160"/>
+            <a:ext cx="5212080" cy="73152"/>
           </a:xfrm>
           <a:prstGeom prst="rect">
             <a:avLst/>
@@ -4935,14 +7015,14 @@
       </p:sp>
       <p:sp>
         <p:nvSpPr>
-          <p:cNvPr id="11" name="TextBox 10"/>
+          <p:cNvPr id="8" name="TextBox 7"/>
           <p:cNvSpPr txBox="1"/>
           <p:nvPr/>
         </p:nvSpPr>
         <p:spPr>
           <a:xfrm>
-            <a:off x="4572000" y="1645920"/>
-            <a:ext cx="3017520" cy="3291840"/>
+            <a:off x="868680" y="1389888"/>
+            <a:ext cx="4937760" cy="4800600"/>
           </a:xfrm>
           <a:prstGeom prst="rect">
             <a:avLst/>
@@ -4957,42 +7037,105 @@
           <a:p>
             <a:pPr>
               <a:spcAft>
-                <a:spcPts val="1200"/>
-              </a:spcAft>
-              <a:defRPr sz="1400" b="1">
+                <a:spcPts val="200"/>
+              </a:spcAft>
+              <a:defRPr sz="1200" b="1">
+                <a:solidFill>
+                  <a:srgbClr val="0B2545"/>
+                </a:solidFill>
+              </a:defRPr>
+            </a:pPr>
+            <a:r>
+              <a:t>Mushitala Day Campus (Solwezi Urban)</a:t>
+            </a:r>
+          </a:p>
+          <a:p>
+            <a:pPr>
+              <a:spcAft>
+                <a:spcPts val="600"/>
+              </a:spcAft>
+              <a:defRPr sz="850">
+                <a:solidFill>
+                  <a:srgbClr val="64748B"/>
+                </a:solidFill>
+              </a:defRPr>
+            </a:pPr>
+            <a:r>
+              <a:t>Day School Focus • High Density Transit • Early Childhood to Grade 9</a:t>
+            </a:r>
+          </a:p>
+          <a:p>
+            <a:pPr>
+              <a:spcAft>
+                <a:spcPts val="400"/>
+              </a:spcAft>
+              <a:defRPr sz="950">
                 <a:solidFill>
                   <a:srgbClr val="1E293B"/>
                 </a:solidFill>
               </a:defRPr>
             </a:pPr>
             <a:r>
-              <a:t>Unified Multi-Campus Orchestration</a:t>
-            </a:r>
-          </a:p>
-          <a:p>
-            <a:pPr>
-              <a:defRPr sz="1100">
-                <a:solidFill>
-                  <a:srgbClr val="64748B"/>
-                </a:solidFill>
-              </a:defRPr>
-            </a:pPr>
-            <a:r>
-              <a:t>EduSphere connects Mushitala Secondary (420 pupils, boarding) and Urban Primary (360 pupils, day) into one synchronized general ledger, single-login dashboard, and ECZ grading standard.</a:t>
-            </a:r>
-          </a:p>
-        </p:txBody>
-      </p:sp>
-      <p:sp>
-        <p:nvSpPr>
-          <p:cNvPr id="12" name="Rounded Rectangle 11"/>
+              <a:t>• Student Body: 520+ Day Scholars spanning ECE, Primary, and Junior Secondary.</a:t>
+            </a:r>
+          </a:p>
+          <a:p>
+            <a:pPr>
+              <a:spcAft>
+                <a:spcPts val="400"/>
+              </a:spcAft>
+              <a:defRPr sz="950">
+                <a:solidFill>
+                  <a:srgbClr val="1E293B"/>
+                </a:solidFill>
+              </a:defRPr>
+            </a:pPr>
+            <a:r>
+              <a:t>• Transit Dynamics: 4 bus transport routes navigating morning/afternoon traffic across Solwezi.</a:t>
+            </a:r>
+          </a:p>
+          <a:p>
+            <a:pPr>
+              <a:spcAft>
+                <a:spcPts val="400"/>
+              </a:spcAft>
+              <a:defRPr sz="950">
+                <a:solidFill>
+                  <a:srgbClr val="1E293B"/>
+                </a:solidFill>
+              </a:defRPr>
+            </a:pPr>
+            <a:r>
+              <a:t>• Operational Priorities: Rapid morning roll-call, contactless student ID bus boarding, tuition fee collection.</a:t>
+            </a:r>
+          </a:p>
+          <a:p>
+            <a:pPr>
+              <a:spcAft>
+                <a:spcPts val="400"/>
+              </a:spcAft>
+              <a:defRPr sz="950">
+                <a:solidFill>
+                  <a:srgbClr val="1E293B"/>
+                </a:solidFill>
+              </a:defRPr>
+            </a:pPr>
+            <a:r>
+              <a:t>• Community Engagement: Direct parent communication via SMS and WhatsApp-compatible gateway.</a:t>
+            </a:r>
+          </a:p>
+        </p:txBody>
+      </p:sp>
+      <p:sp>
+        <p:nvSpPr>
+          <p:cNvPr id="9" name="Rounded Rectangle 8"/>
           <p:cNvSpPr/>
           <p:nvPr/>
         </p:nvSpPr>
         <p:spPr>
           <a:xfrm>
-            <a:off x="7955280" y="1371600"/>
-            <a:ext cx="3474720" cy="3840480"/>
+            <a:off x="6217920" y="1280160"/>
+            <a:ext cx="5212080" cy="5029200"/>
           </a:xfrm>
           <a:prstGeom prst="roundRect">
             <a:avLst/>
@@ -5000,7 +7143,7 @@
           <a:solidFill>
             <a:srgbClr val="FFFFFF"/>
           </a:solidFill>
-          <a:ln>
+          <a:ln w="12700">
             <a:solidFill>
               <a:srgbClr val="E2E8F0"/>
             </a:solidFill>
@@ -5030,14 +7173,14 @@
       </p:sp>
       <p:sp>
         <p:nvSpPr>
-          <p:cNvPr id="13" name="Rectangle 12"/>
+          <p:cNvPr id="10" name="Rectangle 9"/>
           <p:cNvSpPr/>
           <p:nvPr/>
         </p:nvSpPr>
         <p:spPr>
           <a:xfrm>
-            <a:off x="7955280" y="1371600"/>
-            <a:ext cx="3474720" cy="109728"/>
+            <a:off x="6217920" y="1280160"/>
+            <a:ext cx="5212080" cy="73152"/>
           </a:xfrm>
           <a:prstGeom prst="rect">
             <a:avLst/>
@@ -5073,14 +7216,14 @@
       </p:sp>
       <p:sp>
         <p:nvSpPr>
-          <p:cNvPr id="14" name="TextBox 13"/>
+          <p:cNvPr id="11" name="TextBox 10"/>
           <p:cNvSpPr txBox="1"/>
           <p:nvPr/>
         </p:nvSpPr>
         <p:spPr>
           <a:xfrm>
-            <a:off x="8183880" y="1645920"/>
-            <a:ext cx="3017520" cy="3291840"/>
+            <a:off x="6355080" y="1389888"/>
+            <a:ext cx="4937760" cy="4800600"/>
           </a:xfrm>
           <a:prstGeom prst="rect">
             <a:avLst/>
@@ -5095,108 +7238,91 @@
           <a:p>
             <a:pPr>
               <a:spcAft>
-                <a:spcPts val="1200"/>
-              </a:spcAft>
-              <a:defRPr sz="1400" b="1">
+                <a:spcPts val="200"/>
+              </a:spcAft>
+              <a:defRPr sz="1200" b="1">
+                <a:solidFill>
+                  <a:srgbClr val="0B2545"/>
+                </a:solidFill>
+              </a:defRPr>
+            </a:pPr>
+            <a:r>
+              <a:t>Kansanshi Boarding Campus (Residential)</a:t>
+            </a:r>
+          </a:p>
+          <a:p>
+            <a:pPr>
+              <a:spcAft>
+                <a:spcPts val="600"/>
+              </a:spcAft>
+              <a:defRPr sz="850">
+                <a:solidFill>
+                  <a:srgbClr val="64748B"/>
+                </a:solidFill>
+              </a:defRPr>
+            </a:pPr>
+            <a:r>
+              <a:t>Residential Safeguarding • 24/7 Pastoral Care • Senior Secondary &amp; ECZ Centre</a:t>
+            </a:r>
+          </a:p>
+          <a:p>
+            <a:pPr>
+              <a:spcAft>
+                <a:spcPts val="400"/>
+              </a:spcAft>
+              <a:defRPr sz="950">
                 <a:solidFill>
                   <a:srgbClr val="1E293B"/>
                 </a:solidFill>
               </a:defRPr>
             </a:pPr>
             <a:r>
-              <a:t>Measurable Revenue &amp; Safeguarding ROI</a:t>
-            </a:r>
-          </a:p>
-          <a:p>
-            <a:pPr>
-              <a:defRPr sz="1100">
-                <a:solidFill>
-                  <a:srgbClr val="64748B"/>
-                </a:solidFill>
-              </a:defRPr>
-            </a:pPr>
-            <a:r>
-              <a:t>Eliminates ~K279k in aged debtor arrears via direct Mobile Money/Zanaco billing, prevents unverified boarding, and automates real-time SMS alerts when learners tap their ID cards onto school buses.</a:t>
-            </a:r>
-          </a:p>
-        </p:txBody>
-      </p:sp>
-      <p:sp>
-        <p:nvSpPr>
-          <p:cNvPr id="15" name="Rounded Rectangle 14"/>
-          <p:cNvSpPr/>
-          <p:nvPr/>
-        </p:nvSpPr>
-        <p:spPr>
-          <a:xfrm>
-            <a:off x="731520" y="5394960"/>
-            <a:ext cx="10728655" cy="1005840"/>
-          </a:xfrm>
-          <a:prstGeom prst="roundRect">
-            <a:avLst/>
-          </a:prstGeom>
-          <a:solidFill>
-            <a:srgbClr val="EEF2FF"/>
-          </a:solidFill>
-          <a:ln>
-            <a:solidFill>
-              <a:srgbClr val="C7D2FE"/>
-            </a:solidFill>
-          </a:ln>
-        </p:spPr>
-        <p:style>
-          <a:lnRef idx="1">
-            <a:schemeClr val="accent1"/>
-          </a:lnRef>
-          <a:fillRef idx="3">
-            <a:schemeClr val="accent1"/>
-          </a:fillRef>
-          <a:effectRef idx="2">
-            <a:schemeClr val="accent1"/>
-          </a:effectRef>
-          <a:fontRef idx="minor">
-            <a:schemeClr val="lt1"/>
-          </a:fontRef>
-        </p:style>
-        <p:txBody>
-          <a:bodyPr rtlCol="0" anchor="ctr"/>
-          <a:lstStyle/>
-          <a:p>
-            <a:pPr algn="ctr"/>
-          </a:p>
-        </p:txBody>
-      </p:sp>
-      <p:sp>
-        <p:nvSpPr>
-          <p:cNvPr id="16" name="TextBox 15"/>
-          <p:cNvSpPr txBox="1"/>
-          <p:nvPr/>
-        </p:nvSpPr>
-        <p:spPr>
-          <a:xfrm>
-            <a:off x="914400" y="5486400"/>
-            <a:ext cx="10332720" cy="822960"/>
-          </a:xfrm>
-          <a:prstGeom prst="rect">
-            <a:avLst/>
-          </a:prstGeom>
-          <a:noFill/>
-        </p:spPr>
-        <p:txBody>
-          <a:bodyPr wrap="square">
-            <a:spAutoFit/>
-          </a:bodyPr>
-          <a:lstStyle/>
-          <a:p>
-            <a:pPr>
-              <a:defRPr sz="1100" b="1">
-                <a:solidFill>
-                  <a:srgbClr val="0B2545"/>
-                </a:solidFill>
-              </a:defRPr>
-            </a:pPr>
-            <a:r>
-              <a:t>Institutional Scale Overview: 780 Active Learners  •  48 Professional Staff  •  16 Class Cohorts  •  2 Buses (62 Transport Seats)  •  350 Boarding Beds</a:t>
+              <a:t>• Student Body: 280+ Full Residential Boarders &amp; Senior Secondary Scholars.</a:t>
+            </a:r>
+          </a:p>
+          <a:p>
+            <a:pPr>
+              <a:spcAft>
+                <a:spcPts val="400"/>
+              </a:spcAft>
+              <a:defRPr sz="950">
+                <a:solidFill>
+                  <a:srgbClr val="1E293B"/>
+                </a:solidFill>
+              </a:defRPr>
+            </a:pPr>
+            <a:r>
+              <a:t>• Safeguarding Priorities: 21:00 CAT nightly curfew check, dormitory cubicle allocations, medical exeat governance.</a:t>
+            </a:r>
+          </a:p>
+          <a:p>
+            <a:pPr>
+              <a:spcAft>
+                <a:spcPts val="400"/>
+              </a:spcAft>
+              <a:defRPr sz="950">
+                <a:solidFill>
+                  <a:srgbClr val="1E293B"/>
+                </a:solidFill>
+              </a:defRPr>
+            </a:pPr>
+            <a:r>
+              <a:t>• Academic Rigor: Official ECZ Grade 12 National Examination Centre with computerized clearance locks.</a:t>
+            </a:r>
+          </a:p>
+          <a:p>
+            <a:pPr>
+              <a:spcAft>
+                <a:spcPts val="400"/>
+              </a:spcAft>
+              <a:defRPr sz="950">
+                <a:solidFill>
+                  <a:srgbClr val="1E293B"/>
+                </a:solidFill>
+              </a:defRPr>
+            </a:pPr>
+            <a:r>
+              <a:t>• Catering &amp; Logistics: Automated meal rations linked to live resident headcounts to prevent food waste.</a:t>
             </a:r>
           </a:p>
         </p:txBody>
@@ -5370,21 +7496,109 @@
               </a:defRPr>
             </a:pPr>
             <a:r>
-              <a:t>Multi-Campus Spatial Network &amp; Inter-Branch Distance Matrix</a:t>
-            </a:r>
-          </a:p>
-        </p:txBody>
-      </p:sp>
-      <p:sp>
-        <p:nvSpPr>
-          <p:cNvPr id="6" name="TextBox 5"/>
+              <a:t>Sovereign Architecture: Security, RBAC &amp; Zero Vendor Lock-in</a:t>
+            </a:r>
+          </a:p>
+        </p:txBody>
+      </p:sp>
+      <p:sp>
+        <p:nvSpPr>
+          <p:cNvPr id="6" name="Rounded Rectangle 5"/>
+          <p:cNvSpPr/>
+          <p:nvPr/>
+        </p:nvSpPr>
+        <p:spPr>
+          <a:xfrm>
+            <a:off x="731520" y="1280160"/>
+            <a:ext cx="3383280" cy="5029200"/>
+          </a:xfrm>
+          <a:prstGeom prst="roundRect">
+            <a:avLst/>
+          </a:prstGeom>
+          <a:solidFill>
+            <a:srgbClr val="FFFFFF"/>
+          </a:solidFill>
+          <a:ln w="12700">
+            <a:solidFill>
+              <a:srgbClr val="E2E8F0"/>
+            </a:solidFill>
+          </a:ln>
+        </p:spPr>
+        <p:style>
+          <a:lnRef idx="1">
+            <a:schemeClr val="accent1"/>
+          </a:lnRef>
+          <a:fillRef idx="3">
+            <a:schemeClr val="accent1"/>
+          </a:fillRef>
+          <a:effectRef idx="2">
+            <a:schemeClr val="accent1"/>
+          </a:effectRef>
+          <a:fontRef idx="minor">
+            <a:schemeClr val="lt1"/>
+          </a:fontRef>
+        </p:style>
+        <p:txBody>
+          <a:bodyPr rtlCol="0" anchor="ctr"/>
+          <a:lstStyle/>
+          <a:p>
+            <a:pPr algn="ctr"/>
+          </a:p>
+        </p:txBody>
+      </p:sp>
+      <p:sp>
+        <p:nvSpPr>
+          <p:cNvPr id="7" name="Rectangle 6"/>
+          <p:cNvSpPr/>
+          <p:nvPr/>
+        </p:nvSpPr>
+        <p:spPr>
+          <a:xfrm>
+            <a:off x="731520" y="1280160"/>
+            <a:ext cx="3383280" cy="73152"/>
+          </a:xfrm>
+          <a:prstGeom prst="rect">
+            <a:avLst/>
+          </a:prstGeom>
+          <a:solidFill>
+            <a:srgbClr val="0B2545"/>
+          </a:solidFill>
+          <a:ln>
+            <a:noFill/>
+          </a:ln>
+        </p:spPr>
+        <p:style>
+          <a:lnRef idx="1">
+            <a:schemeClr val="accent1"/>
+          </a:lnRef>
+          <a:fillRef idx="3">
+            <a:schemeClr val="accent1"/>
+          </a:fillRef>
+          <a:effectRef idx="2">
+            <a:schemeClr val="accent1"/>
+          </a:effectRef>
+          <a:fontRef idx="minor">
+            <a:schemeClr val="lt1"/>
+          </a:fontRef>
+        </p:style>
+        <p:txBody>
+          <a:bodyPr rtlCol="0" anchor="ctr"/>
+          <a:lstStyle/>
+          <a:p>
+            <a:pPr algn="ctr"/>
+          </a:p>
+        </p:txBody>
+      </p:sp>
+      <p:sp>
+        <p:nvSpPr>
+          <p:cNvPr id="8" name="TextBox 7"/>
           <p:cNvSpPr txBox="1"/>
           <p:nvPr/>
         </p:nvSpPr>
         <p:spPr>
           <a:xfrm>
-            <a:off x="731520" y="1371600"/>
-            <a:ext cx="4114800" cy="4937760"/>
+            <a:off x="868680" y="1389888"/>
+            <a:ext cx="3108960" cy="4800600"/>
           </a:xfrm>
           <a:prstGeom prst="rect">
             <a:avLst/>
@@ -5399,31 +7613,202 @@
           <a:p>
             <a:pPr>
               <a:spcAft>
-                <a:spcPts val="800"/>
-              </a:spcAft>
-              <a:defRPr sz="1400" b="1">
+                <a:spcPts val="200"/>
+              </a:spcAft>
+              <a:defRPr sz="1200" b="1">
                 <a:solidFill>
                   <a:srgbClr val="0B2545"/>
                 </a:solidFill>
               </a:defRPr>
             </a:pPr>
             <a:r>
-              <a:t>Sovereign GIS &amp; Spatial Logistics</a:t>
-            </a:r>
-          </a:p>
-          <a:p>
-            <a:pPr>
-              <a:spcAft>
-                <a:spcPts val="1000"/>
-              </a:spcAft>
-              <a:defRPr sz="1100">
+              <a:t>1. Strict RBAC Governance</a:t>
+            </a:r>
+          </a:p>
+          <a:p>
+            <a:pPr>
+              <a:spcAft>
+                <a:spcPts val="600"/>
+              </a:spcAft>
+              <a:defRPr sz="850">
                 <a:solidFill>
                   <a:srgbClr val="64748B"/>
                 </a:solidFill>
               </a:defRPr>
             </a:pPr>
             <a:r>
-              <a:t>EduSphere embeds high-resolution satellite cartography to calculate exact Haversine distances, catchment feeder zones (21.0 km corridor), and transit buffer times between school centers:</a:t>
+              <a:t>Role-Based Security</a:t>
+            </a:r>
+          </a:p>
+          <a:p>
+            <a:pPr>
+              <a:spcAft>
+                <a:spcPts val="400"/>
+              </a:spcAft>
+              <a:defRPr sz="950">
+                <a:solidFill>
+                  <a:srgbClr val="1E293B"/>
+                </a:solidFill>
+              </a:defRPr>
+            </a:pPr>
+            <a:r>
+              <a:t>• 10 Distinct User Roles: Director, Headteacher, Bursar, Teacher, Boarding Master, Matron, Parent, Auditor.</a:t>
+            </a:r>
+          </a:p>
+          <a:p>
+            <a:pPr>
+              <a:spcAft>
+                <a:spcPts val="400"/>
+              </a:spcAft>
+              <a:defRPr sz="950">
+                <a:solidFill>
+                  <a:srgbClr val="1E293B"/>
+                </a:solidFill>
+              </a:defRPr>
+            </a:pPr>
+            <a:r>
+              <a:t>• Zero Privilege Bleed: Teachers cannot access financial ledgers; parents only see their verified biological children.</a:t>
+            </a:r>
+          </a:p>
+          <a:p>
+            <a:pPr>
+              <a:spcAft>
+                <a:spcPts val="400"/>
+              </a:spcAft>
+              <a:defRPr sz="950">
+                <a:solidFill>
+                  <a:srgbClr val="1E293B"/>
+                </a:solidFill>
+              </a:defRPr>
+            </a:pPr>
+            <a:r>
+              <a:t>• 2FA Protected Ledger: All bursary journal entries and fee adjustments require secondary authorization.</a:t>
+            </a:r>
+          </a:p>
+        </p:txBody>
+      </p:sp>
+      <p:sp>
+        <p:nvSpPr>
+          <p:cNvPr id="9" name="Rounded Rectangle 8"/>
+          <p:cNvSpPr/>
+          <p:nvPr/>
+        </p:nvSpPr>
+        <p:spPr>
+          <a:xfrm>
+            <a:off x="4389120" y="1280160"/>
+            <a:ext cx="3383280" cy="5029200"/>
+          </a:xfrm>
+          <a:prstGeom prst="roundRect">
+            <a:avLst/>
+          </a:prstGeom>
+          <a:solidFill>
+            <a:srgbClr val="FFFFFF"/>
+          </a:solidFill>
+          <a:ln w="12700">
+            <a:solidFill>
+              <a:srgbClr val="E2E8F0"/>
+            </a:solidFill>
+          </a:ln>
+        </p:spPr>
+        <p:style>
+          <a:lnRef idx="1">
+            <a:schemeClr val="accent1"/>
+          </a:lnRef>
+          <a:fillRef idx="3">
+            <a:schemeClr val="accent1"/>
+          </a:fillRef>
+          <a:effectRef idx="2">
+            <a:schemeClr val="accent1"/>
+          </a:effectRef>
+          <a:fontRef idx="minor">
+            <a:schemeClr val="lt1"/>
+          </a:fontRef>
+        </p:style>
+        <p:txBody>
+          <a:bodyPr rtlCol="0" anchor="ctr"/>
+          <a:lstStyle/>
+          <a:p>
+            <a:pPr algn="ctr"/>
+          </a:p>
+        </p:txBody>
+      </p:sp>
+      <p:sp>
+        <p:nvSpPr>
+          <p:cNvPr id="10" name="Rectangle 9"/>
+          <p:cNvSpPr/>
+          <p:nvPr/>
+        </p:nvSpPr>
+        <p:spPr>
+          <a:xfrm>
+            <a:off x="4389120" y="1280160"/>
+            <a:ext cx="3383280" cy="73152"/>
+          </a:xfrm>
+          <a:prstGeom prst="rect">
+            <a:avLst/>
+          </a:prstGeom>
+          <a:solidFill>
+            <a:srgbClr val="134074"/>
+          </a:solidFill>
+          <a:ln>
+            <a:noFill/>
+          </a:ln>
+        </p:spPr>
+        <p:style>
+          <a:lnRef idx="1">
+            <a:schemeClr val="accent1"/>
+          </a:lnRef>
+          <a:fillRef idx="3">
+            <a:schemeClr val="accent1"/>
+          </a:fillRef>
+          <a:effectRef idx="2">
+            <a:schemeClr val="accent1"/>
+          </a:effectRef>
+          <a:fontRef idx="minor">
+            <a:schemeClr val="lt1"/>
+          </a:fontRef>
+        </p:style>
+        <p:txBody>
+          <a:bodyPr rtlCol="0" anchor="ctr"/>
+          <a:lstStyle/>
+          <a:p>
+            <a:pPr algn="ctr"/>
+          </a:p>
+        </p:txBody>
+      </p:sp>
+      <p:sp>
+        <p:nvSpPr>
+          <p:cNvPr id="11" name="TextBox 10"/>
+          <p:cNvSpPr txBox="1"/>
+          <p:nvPr/>
+        </p:nvSpPr>
+        <p:spPr>
+          <a:xfrm>
+            <a:off x="4526280" y="1389888"/>
+            <a:ext cx="3108960" cy="4800600"/>
+          </a:xfrm>
+          <a:prstGeom prst="rect">
+            <a:avLst/>
+          </a:prstGeom>
+          <a:noFill/>
+        </p:spPr>
+        <p:txBody>
+          <a:bodyPr wrap="square">
+            <a:spAutoFit/>
+          </a:bodyPr>
+          <a:lstStyle/>
+          <a:p>
+            <a:pPr>
+              <a:spcAft>
+                <a:spcPts val="200"/>
+              </a:spcAft>
+              <a:defRPr sz="1200" b="1">
+                <a:solidFill>
+                  <a:srgbClr val="0B2545"/>
+                </a:solidFill>
+              </a:defRPr>
+            </a:pPr>
+            <a:r>
+              <a:t>2. Zero Data Loss &amp; UPSERT</a:t>
             </a:r>
           </a:p>
           <a:p>
@@ -5431,14 +7816,185 @@
               <a:spcAft>
                 <a:spcPts val="600"/>
               </a:spcAft>
-              <a:defRPr sz="1000">
+              <a:defRPr sz="850">
+                <a:solidFill>
+                  <a:srgbClr val="64748B"/>
+                </a:solidFill>
+              </a:defRPr>
+            </a:pPr>
+            <a:r>
+              <a:t>Data Safety &amp; Integrity</a:t>
+            </a:r>
+          </a:p>
+          <a:p>
+            <a:pPr>
+              <a:spcAft>
+                <a:spcPts val="400"/>
+              </a:spcAft>
+              <a:defRPr sz="950">
                 <a:solidFill>
                   <a:srgbClr val="1E293B"/>
                 </a:solidFill>
               </a:defRPr>
             </a:pPr>
             <a:r>
-              <a:t>• Mushitala Main Campus: Secondary &amp; Boarding wing, Plot 889 Kansanshi Mine Road (Capacity: 650, Enrolled: 420).</a:t>
+              <a:t>• Strict Upsert-Only Architecture: Existing production records are never wiped or overwritten destructively.</a:t>
+            </a:r>
+          </a:p>
+          <a:p>
+            <a:pPr>
+              <a:spcAft>
+                <a:spcPts val="400"/>
+              </a:spcAft>
+              <a:defRPr sz="950">
+                <a:solidFill>
+                  <a:srgbClr val="1E293B"/>
+                </a:solidFill>
+              </a:defRPr>
+            </a:pPr>
+            <a:r>
+              <a:t>• Immutable Audit Logging: Every attendance modification, score change, and payment transaction is logged.</a:t>
+            </a:r>
+          </a:p>
+          <a:p>
+            <a:pPr>
+              <a:spcAft>
+                <a:spcPts val="400"/>
+              </a:spcAft>
+              <a:defRPr sz="950">
+                <a:solidFill>
+                  <a:srgbClr val="1E293B"/>
+                </a:solidFill>
+              </a:defRPr>
+            </a:pPr>
+            <a:r>
+              <a:t>• Disaster Recovery Engine: Automated nightly database snapshots with one-click restore validation.</a:t>
+            </a:r>
+          </a:p>
+        </p:txBody>
+      </p:sp>
+      <p:sp>
+        <p:nvSpPr>
+          <p:cNvPr id="12" name="Rounded Rectangle 11"/>
+          <p:cNvSpPr/>
+          <p:nvPr/>
+        </p:nvSpPr>
+        <p:spPr>
+          <a:xfrm>
+            <a:off x="8046720" y="1280160"/>
+            <a:ext cx="3383280" cy="5029200"/>
+          </a:xfrm>
+          <a:prstGeom prst="roundRect">
+            <a:avLst/>
+          </a:prstGeom>
+          <a:solidFill>
+            <a:srgbClr val="FFFFFF"/>
+          </a:solidFill>
+          <a:ln w="12700">
+            <a:solidFill>
+              <a:srgbClr val="E2E8F0"/>
+            </a:solidFill>
+          </a:ln>
+        </p:spPr>
+        <p:style>
+          <a:lnRef idx="1">
+            <a:schemeClr val="accent1"/>
+          </a:lnRef>
+          <a:fillRef idx="3">
+            <a:schemeClr val="accent1"/>
+          </a:fillRef>
+          <a:effectRef idx="2">
+            <a:schemeClr val="accent1"/>
+          </a:effectRef>
+          <a:fontRef idx="minor">
+            <a:schemeClr val="lt1"/>
+          </a:fontRef>
+        </p:style>
+        <p:txBody>
+          <a:bodyPr rtlCol="0" anchor="ctr"/>
+          <a:lstStyle/>
+          <a:p>
+            <a:pPr algn="ctr"/>
+          </a:p>
+        </p:txBody>
+      </p:sp>
+      <p:sp>
+        <p:nvSpPr>
+          <p:cNvPr id="13" name="Rectangle 12"/>
+          <p:cNvSpPr/>
+          <p:nvPr/>
+        </p:nvSpPr>
+        <p:spPr>
+          <a:xfrm>
+            <a:off x="8046720" y="1280160"/>
+            <a:ext cx="3383280" cy="73152"/>
+          </a:xfrm>
+          <a:prstGeom prst="rect">
+            <a:avLst/>
+          </a:prstGeom>
+          <a:solidFill>
+            <a:srgbClr val="D4AF37"/>
+          </a:solidFill>
+          <a:ln>
+            <a:noFill/>
+          </a:ln>
+        </p:spPr>
+        <p:style>
+          <a:lnRef idx="1">
+            <a:schemeClr val="accent1"/>
+          </a:lnRef>
+          <a:fillRef idx="3">
+            <a:schemeClr val="accent1"/>
+          </a:fillRef>
+          <a:effectRef idx="2">
+            <a:schemeClr val="accent1"/>
+          </a:effectRef>
+          <a:fontRef idx="minor">
+            <a:schemeClr val="lt1"/>
+          </a:fontRef>
+        </p:style>
+        <p:txBody>
+          <a:bodyPr rtlCol="0" anchor="ctr"/>
+          <a:lstStyle/>
+          <a:p>
+            <a:pPr algn="ctr"/>
+          </a:p>
+        </p:txBody>
+      </p:sp>
+      <p:sp>
+        <p:nvSpPr>
+          <p:cNvPr id="14" name="TextBox 13"/>
+          <p:cNvSpPr txBox="1"/>
+          <p:nvPr/>
+        </p:nvSpPr>
+        <p:spPr>
+          <a:xfrm>
+            <a:off x="8183880" y="1389888"/>
+            <a:ext cx="3108960" cy="4800600"/>
+          </a:xfrm>
+          <a:prstGeom prst="rect">
+            <a:avLst/>
+          </a:prstGeom>
+          <a:noFill/>
+        </p:spPr>
+        <p:txBody>
+          <a:bodyPr wrap="square">
+            <a:spAutoFit/>
+          </a:bodyPr>
+          <a:lstStyle/>
+          <a:p>
+            <a:pPr>
+              <a:spcAft>
+                <a:spcPts val="200"/>
+              </a:spcAft>
+              <a:defRPr sz="1200" b="1">
+                <a:solidFill>
+                  <a:srgbClr val="0B2545"/>
+                </a:solidFill>
+              </a:defRPr>
+            </a:pPr>
+            <a:r>
+              <a:t>3. Offline-First Resilience</a:t>
             </a:r>
           </a:p>
           <a:p>
@@ -5446,72 +8002,63 @@
               <a:spcAft>
                 <a:spcPts val="600"/>
               </a:spcAft>
-              <a:defRPr sz="1000">
+              <a:defRPr sz="850">
+                <a:solidFill>
+                  <a:srgbClr val="64748B"/>
+                </a:solidFill>
+              </a:defRPr>
+            </a:pPr>
+            <a:r>
+              <a:t>Sovereign Control</a:t>
+            </a:r>
+          </a:p>
+          <a:p>
+            <a:pPr>
+              <a:spcAft>
+                <a:spcPts val="400"/>
+              </a:spcAft>
+              <a:defRPr sz="950">
                 <a:solidFill>
                   <a:srgbClr val="1E293B"/>
                 </a:solidFill>
               </a:defRPr>
             </a:pPr>
             <a:r>
-              <a:t>• Urban Campus Central: ECE &amp; Primary Day School, Solwezi Town Corridor (Capacity: 450, Enrolled: 360).</a:t>
-            </a:r>
-          </a:p>
-          <a:p>
-            <a:pPr>
-              <a:spcAft>
-                <a:spcPts val="600"/>
-              </a:spcAft>
-              <a:defRPr sz="1000">
+              <a:t>• Zero-Downtime Classroom Mode: Roll-call functions smoothly when Solwezi telecom cellular towers experience drops.</a:t>
+            </a:r>
+          </a:p>
+          <a:p>
+            <a:pPr>
+              <a:spcAft>
+                <a:spcPts val="400"/>
+              </a:spcAft>
+              <a:defRPr sz="950">
                 <a:solidFill>
                   <a:srgbClr val="1E293B"/>
                 </a:solidFill>
               </a:defRPr>
             </a:pPr>
             <a:r>
-              <a:t>• Pairwise Transit Distance: 3.80 km road distance (~7 mins drive time), facilitating seamless inter-campus shuttle connections.</a:t>
-            </a:r>
-          </a:p>
-          <a:p>
-            <a:pPr>
-              <a:spcAft>
-                <a:spcPts val="600"/>
-              </a:spcAft>
-              <a:defRPr sz="1000">
+              <a:t>• Background Synchronization: Data is stored in secure local storage and syncs automatically once back online.</a:t>
+            </a:r>
+          </a:p>
+          <a:p>
+            <a:pPr>
+              <a:spcAft>
+                <a:spcPts val="400"/>
+              </a:spcAft>
+              <a:defRPr sz="950">
                 <a:solidFill>
                   <a:srgbClr val="1E293B"/>
                 </a:solidFill>
               </a:defRPr>
             </a:pPr>
             <a:r>
-              <a:t>• Catchment Compliance: Auto-resolves applicant coordinates to determine nearest feeder branch during student enrollment.</a:t>
-            </a:r>
-          </a:p>
-        </p:txBody>
-      </p:sp>
-      <p:pic>
-        <p:nvPicPr>
-          <p:cNvPr id="7" name="Picture 6" descr="Screenshot 2026-10-18 102033.png"/>
-          <p:cNvPicPr>
-            <a:picLocks noChangeAspect="1"/>
-          </p:cNvPicPr>
-          <p:nvPr/>
-        </p:nvPicPr>
-        <p:blipFill>
-          <a:blip r:embed="rId2"/>
-          <a:stretch>
-            <a:fillRect/>
-          </a:stretch>
-        </p:blipFill>
-        <p:spPr>
-          <a:xfrm>
-            <a:off x="5120640" y="1371600"/>
-            <a:ext cx="6309360" cy="3646390"/>
-          </a:xfrm>
-          <a:prstGeom prst="rect">
-            <a:avLst/>
-          </a:prstGeom>
-        </p:spPr>
-      </p:pic>
+              <a:t>• No Cloud Dependency Lock-in: Can run on local campus servers or dedicated VPS instances.</a:t>
+            </a:r>
+          </a:p>
+        </p:txBody>
+      </p:sp>
     </p:spTree>
   </p:cSld>
   <p:clrMapOvr>
@@ -5681,21 +8228,109 @@
               </a:defRPr>
             </a:pPr>
             <a:r>
-              <a:t>Smart Transport: Live Shuttle Tracking &amp; Contactless Learner ID Card Boarding</a:t>
-            </a:r>
-          </a:p>
-        </p:txBody>
-      </p:sp>
-      <p:sp>
-        <p:nvSpPr>
-          <p:cNvPr id="6" name="TextBox 5"/>
+              <a:t>Financial Architecture: Automated Revenue Recovery &amp; Ledger</a:t>
+            </a:r>
+          </a:p>
+        </p:txBody>
+      </p:sp>
+      <p:sp>
+        <p:nvSpPr>
+          <p:cNvPr id="6" name="Rounded Rectangle 5"/>
+          <p:cNvSpPr/>
+          <p:nvPr/>
+        </p:nvSpPr>
+        <p:spPr>
+          <a:xfrm>
+            <a:off x="731520" y="1280160"/>
+            <a:ext cx="3383280" cy="5029200"/>
+          </a:xfrm>
+          <a:prstGeom prst="roundRect">
+            <a:avLst/>
+          </a:prstGeom>
+          <a:solidFill>
+            <a:srgbClr val="FFFFFF"/>
+          </a:solidFill>
+          <a:ln w="12700">
+            <a:solidFill>
+              <a:srgbClr val="E2E8F0"/>
+            </a:solidFill>
+          </a:ln>
+        </p:spPr>
+        <p:style>
+          <a:lnRef idx="1">
+            <a:schemeClr val="accent1"/>
+          </a:lnRef>
+          <a:fillRef idx="3">
+            <a:schemeClr val="accent1"/>
+          </a:fillRef>
+          <a:effectRef idx="2">
+            <a:schemeClr val="accent1"/>
+          </a:effectRef>
+          <a:fontRef idx="minor">
+            <a:schemeClr val="lt1"/>
+          </a:fontRef>
+        </p:style>
+        <p:txBody>
+          <a:bodyPr rtlCol="0" anchor="ctr"/>
+          <a:lstStyle/>
+          <a:p>
+            <a:pPr algn="ctr"/>
+          </a:p>
+        </p:txBody>
+      </p:sp>
+      <p:sp>
+        <p:nvSpPr>
+          <p:cNvPr id="7" name="Rectangle 6"/>
+          <p:cNvSpPr/>
+          <p:nvPr/>
+        </p:nvSpPr>
+        <p:spPr>
+          <a:xfrm>
+            <a:off x="731520" y="1280160"/>
+            <a:ext cx="3383280" cy="73152"/>
+          </a:xfrm>
+          <a:prstGeom prst="rect">
+            <a:avLst/>
+          </a:prstGeom>
+          <a:solidFill>
+            <a:srgbClr val="10B981"/>
+          </a:solidFill>
+          <a:ln>
+            <a:noFill/>
+          </a:ln>
+        </p:spPr>
+        <p:style>
+          <a:lnRef idx="1">
+            <a:schemeClr val="accent1"/>
+          </a:lnRef>
+          <a:fillRef idx="3">
+            <a:schemeClr val="accent1"/>
+          </a:fillRef>
+          <a:effectRef idx="2">
+            <a:schemeClr val="accent1"/>
+          </a:effectRef>
+          <a:fontRef idx="minor">
+            <a:schemeClr val="lt1"/>
+          </a:fontRef>
+        </p:style>
+        <p:txBody>
+          <a:bodyPr rtlCol="0" anchor="ctr"/>
+          <a:lstStyle/>
+          <a:p>
+            <a:pPr algn="ctr"/>
+          </a:p>
+        </p:txBody>
+      </p:sp>
+      <p:sp>
+        <p:nvSpPr>
+          <p:cNvPr id="8" name="TextBox 7"/>
           <p:cNvSpPr txBox="1"/>
           <p:nvPr/>
         </p:nvSpPr>
         <p:spPr>
           <a:xfrm>
-            <a:off x="731520" y="1280160"/>
-            <a:ext cx="4389120" cy="5120640"/>
+            <a:off x="868680" y="1389888"/>
+            <a:ext cx="3108960" cy="4800600"/>
           </a:xfrm>
           <a:prstGeom prst="rect">
             <a:avLst/>
@@ -5710,16 +8345,202 @@
           <a:p>
             <a:pPr>
               <a:spcAft>
+                <a:spcPts val="200"/>
+              </a:spcAft>
+              <a:defRPr sz="1200" b="1">
+                <a:solidFill>
+                  <a:srgbClr val="0B2545"/>
+                </a:solidFill>
+              </a:defRPr>
+            </a:pPr>
+            <a:r>
+              <a:t>Tuition &amp; Boarding Invoicing</a:t>
+            </a:r>
+          </a:p>
+          <a:p>
+            <a:pPr>
+              <a:spcAft>
                 <a:spcPts val="600"/>
               </a:spcAft>
-              <a:defRPr sz="1300" b="1">
+              <a:defRPr sz="850">
+                <a:solidFill>
+                  <a:srgbClr val="64748B"/>
+                </a:solidFill>
+              </a:defRPr>
+            </a:pPr>
+            <a:r>
+              <a:t>Revenue Capture</a:t>
+            </a:r>
+          </a:p>
+          <a:p>
+            <a:pPr>
+              <a:spcAft>
+                <a:spcPts val="400"/>
+              </a:spcAft>
+              <a:defRPr sz="950">
+                <a:solidFill>
+                  <a:srgbClr val="1E293B"/>
+                </a:solidFill>
+              </a:defRPr>
+            </a:pPr>
+            <a:r>
+              <a:t>• Termly Batch Invoicing: Automatically generates tuition, boarding levy, PTA, and computer lab invoices.</a:t>
+            </a:r>
+          </a:p>
+          <a:p>
+            <a:pPr>
+              <a:spcAft>
+                <a:spcPts val="400"/>
+              </a:spcAft>
+              <a:defRPr sz="950">
+                <a:solidFill>
+                  <a:srgbClr val="1E293B"/>
+                </a:solidFill>
+              </a:defRPr>
+            </a:pPr>
+            <a:r>
+              <a:t>• Intelligent Sibling Discounts: Automatically recognizes multi-child families to apply accurate bursary policies.</a:t>
+            </a:r>
+          </a:p>
+          <a:p>
+            <a:pPr>
+              <a:spcAft>
+                <a:spcPts val="400"/>
+              </a:spcAft>
+              <a:defRPr sz="950">
+                <a:solidFill>
+                  <a:srgbClr val="1E293B"/>
+                </a:solidFill>
+              </a:defRPr>
+            </a:pPr>
+            <a:r>
+              <a:t>• Aged Debtors Intelligence: Categorizes arrears into 30, 60, and 90+ day chronic delinquency with automated reminders.</a:t>
+            </a:r>
+          </a:p>
+        </p:txBody>
+      </p:sp>
+      <p:sp>
+        <p:nvSpPr>
+          <p:cNvPr id="9" name="Rounded Rectangle 8"/>
+          <p:cNvSpPr/>
+          <p:nvPr/>
+        </p:nvSpPr>
+        <p:spPr>
+          <a:xfrm>
+            <a:off x="4389120" y="1280160"/>
+            <a:ext cx="3383280" cy="5029200"/>
+          </a:xfrm>
+          <a:prstGeom prst="roundRect">
+            <a:avLst/>
+          </a:prstGeom>
+          <a:solidFill>
+            <a:srgbClr val="FFFFFF"/>
+          </a:solidFill>
+          <a:ln w="12700">
+            <a:solidFill>
+              <a:srgbClr val="E2E8F0"/>
+            </a:solidFill>
+          </a:ln>
+        </p:spPr>
+        <p:style>
+          <a:lnRef idx="1">
+            <a:schemeClr val="accent1"/>
+          </a:lnRef>
+          <a:fillRef idx="3">
+            <a:schemeClr val="accent1"/>
+          </a:fillRef>
+          <a:effectRef idx="2">
+            <a:schemeClr val="accent1"/>
+          </a:effectRef>
+          <a:fontRef idx="minor">
+            <a:schemeClr val="lt1"/>
+          </a:fontRef>
+        </p:style>
+        <p:txBody>
+          <a:bodyPr rtlCol="0" anchor="ctr"/>
+          <a:lstStyle/>
+          <a:p>
+            <a:pPr algn="ctr"/>
+          </a:p>
+        </p:txBody>
+      </p:sp>
+      <p:sp>
+        <p:nvSpPr>
+          <p:cNvPr id="10" name="Rectangle 9"/>
+          <p:cNvSpPr/>
+          <p:nvPr/>
+        </p:nvSpPr>
+        <p:spPr>
+          <a:xfrm>
+            <a:off x="4389120" y="1280160"/>
+            <a:ext cx="3383280" cy="73152"/>
+          </a:xfrm>
+          <a:prstGeom prst="rect">
+            <a:avLst/>
+          </a:prstGeom>
+          <a:solidFill>
+            <a:srgbClr val="134074"/>
+          </a:solidFill>
+          <a:ln>
+            <a:noFill/>
+          </a:ln>
+        </p:spPr>
+        <p:style>
+          <a:lnRef idx="1">
+            <a:schemeClr val="accent1"/>
+          </a:lnRef>
+          <a:fillRef idx="3">
+            <a:schemeClr val="accent1"/>
+          </a:fillRef>
+          <a:effectRef idx="2">
+            <a:schemeClr val="accent1"/>
+          </a:effectRef>
+          <a:fontRef idx="minor">
+            <a:schemeClr val="lt1"/>
+          </a:fontRef>
+        </p:style>
+        <p:txBody>
+          <a:bodyPr rtlCol="0" anchor="ctr"/>
+          <a:lstStyle/>
+          <a:p>
+            <a:pPr algn="ctr"/>
+          </a:p>
+        </p:txBody>
+      </p:sp>
+      <p:sp>
+        <p:nvSpPr>
+          <p:cNvPr id="11" name="TextBox 10"/>
+          <p:cNvSpPr txBox="1"/>
+          <p:nvPr/>
+        </p:nvSpPr>
+        <p:spPr>
+          <a:xfrm>
+            <a:off x="4526280" y="1389888"/>
+            <a:ext cx="3108960" cy="4800600"/>
+          </a:xfrm>
+          <a:prstGeom prst="rect">
+            <a:avLst/>
+          </a:prstGeom>
+          <a:noFill/>
+        </p:spPr>
+        <p:txBody>
+          <a:bodyPr wrap="square">
+            <a:spAutoFit/>
+          </a:bodyPr>
+          <a:lstStyle/>
+          <a:p>
+            <a:pPr>
+              <a:spcAft>
+                <a:spcPts val="200"/>
+              </a:spcAft>
+              <a:defRPr sz="1200" b="1">
                 <a:solidFill>
                   <a:srgbClr val="0B2545"/>
                 </a:solidFill>
               </a:defRPr>
             </a:pPr>
             <a:r>
-              <a:t>Learner ID Card Bus Check-in: Technical Advisory</a:t>
+              <a:t>Mobile Money Reconciliation</a:t>
             </a:r>
           </a:p>
           <a:p>
@@ -5727,14 +8548,185 @@
               <a:spcAft>
                 <a:spcPts val="600"/>
               </a:spcAft>
-              <a:defRPr sz="1000">
+              <a:defRPr sz="850">
+                <a:solidFill>
+                  <a:srgbClr val="64748B"/>
+                </a:solidFill>
+              </a:defRPr>
+            </a:pPr>
+            <a:r>
+              <a:t>Zambian Fintech Integration</a:t>
+            </a:r>
+          </a:p>
+          <a:p>
+            <a:pPr>
+              <a:spcAft>
+                <a:spcPts val="400"/>
+              </a:spcAft>
+              <a:defRPr sz="950">
                 <a:solidFill>
                   <a:srgbClr val="1E293B"/>
                 </a:solidFill>
               </a:defRPr>
             </a:pPr>
             <a:r>
-              <a:t>• Dual NFC / QR Student ID Cards: Learners carry durable PVC smart cards with embedded MIFARE 13.56MHz NFC chips and 2D QR fallback codes.</a:t>
+              <a:t>• Instant Airtel Money &amp; MTN MoMo Integration: Parents settle fees directly via mobile handsets.</a:t>
+            </a:r>
+          </a:p>
+          <a:p>
+            <a:pPr>
+              <a:spcAft>
+                <a:spcPts val="400"/>
+              </a:spcAft>
+              <a:defRPr sz="950">
+                <a:solidFill>
+                  <a:srgbClr val="1E293B"/>
+                </a:solidFill>
+              </a:defRPr>
+            </a:pPr>
+            <a:r>
+              <a:t>• Automated Reference Matching: Real-time clearing of invoices without manual bank slip verification.</a:t>
+            </a:r>
+          </a:p>
+          <a:p>
+            <a:pPr>
+              <a:spcAft>
+                <a:spcPts val="400"/>
+              </a:spcAft>
+              <a:defRPr sz="950">
+                <a:solidFill>
+                  <a:srgbClr val="1E293B"/>
+                </a:solidFill>
+              </a:defRPr>
+            </a:pPr>
+            <a:r>
+              <a:t>• Tamper-Evident Digital Receipts: Instant SMS receipt dispatched to parent phone upon settlement.</a:t>
+            </a:r>
+          </a:p>
+        </p:txBody>
+      </p:sp>
+      <p:sp>
+        <p:nvSpPr>
+          <p:cNvPr id="12" name="Rounded Rectangle 11"/>
+          <p:cNvSpPr/>
+          <p:nvPr/>
+        </p:nvSpPr>
+        <p:spPr>
+          <a:xfrm>
+            <a:off x="8046720" y="1280160"/>
+            <a:ext cx="3383280" cy="5029200"/>
+          </a:xfrm>
+          <a:prstGeom prst="roundRect">
+            <a:avLst/>
+          </a:prstGeom>
+          <a:solidFill>
+            <a:srgbClr val="FFFFFF"/>
+          </a:solidFill>
+          <a:ln w="12700">
+            <a:solidFill>
+              <a:srgbClr val="E2E8F0"/>
+            </a:solidFill>
+          </a:ln>
+        </p:spPr>
+        <p:style>
+          <a:lnRef idx="1">
+            <a:schemeClr val="accent1"/>
+          </a:lnRef>
+          <a:fillRef idx="3">
+            <a:schemeClr val="accent1"/>
+          </a:fillRef>
+          <a:effectRef idx="2">
+            <a:schemeClr val="accent1"/>
+          </a:effectRef>
+          <a:fontRef idx="minor">
+            <a:schemeClr val="lt1"/>
+          </a:fontRef>
+        </p:style>
+        <p:txBody>
+          <a:bodyPr rtlCol="0" anchor="ctr"/>
+          <a:lstStyle/>
+          <a:p>
+            <a:pPr algn="ctr"/>
+          </a:p>
+        </p:txBody>
+      </p:sp>
+      <p:sp>
+        <p:nvSpPr>
+          <p:cNvPr id="13" name="Rectangle 12"/>
+          <p:cNvSpPr/>
+          <p:nvPr/>
+        </p:nvSpPr>
+        <p:spPr>
+          <a:xfrm>
+            <a:off x="8046720" y="1280160"/>
+            <a:ext cx="3383280" cy="73152"/>
+          </a:xfrm>
+          <a:prstGeom prst="rect">
+            <a:avLst/>
+          </a:prstGeom>
+          <a:solidFill>
+            <a:srgbClr val="0B2545"/>
+          </a:solidFill>
+          <a:ln>
+            <a:noFill/>
+          </a:ln>
+        </p:spPr>
+        <p:style>
+          <a:lnRef idx="1">
+            <a:schemeClr val="accent1"/>
+          </a:lnRef>
+          <a:fillRef idx="3">
+            <a:schemeClr val="accent1"/>
+          </a:fillRef>
+          <a:effectRef idx="2">
+            <a:schemeClr val="accent1"/>
+          </a:effectRef>
+          <a:fontRef idx="minor">
+            <a:schemeClr val="lt1"/>
+          </a:fontRef>
+        </p:style>
+        <p:txBody>
+          <a:bodyPr rtlCol="0" anchor="ctr"/>
+          <a:lstStyle/>
+          <a:p>
+            <a:pPr algn="ctr"/>
+          </a:p>
+        </p:txBody>
+      </p:sp>
+      <p:sp>
+        <p:nvSpPr>
+          <p:cNvPr id="14" name="TextBox 13"/>
+          <p:cNvSpPr txBox="1"/>
+          <p:nvPr/>
+        </p:nvSpPr>
+        <p:spPr>
+          <a:xfrm>
+            <a:off x="8183880" y="1389888"/>
+            <a:ext cx="3108960" cy="4800600"/>
+          </a:xfrm>
+          <a:prstGeom prst="rect">
+            <a:avLst/>
+          </a:prstGeom>
+          <a:noFill/>
+        </p:spPr>
+        <p:txBody>
+          <a:bodyPr wrap="square">
+            <a:spAutoFit/>
+          </a:bodyPr>
+          <a:lstStyle/>
+          <a:p>
+            <a:pPr>
+              <a:spcAft>
+                <a:spcPts val="200"/>
+              </a:spcAft>
+              <a:defRPr sz="1200" b="1">
+                <a:solidFill>
+                  <a:srgbClr val="0B2545"/>
+                </a:solidFill>
+              </a:defRPr>
+            </a:pPr>
+            <a:r>
+              <a:t>Double-Entry General Ledger</a:t>
             </a:r>
           </a:p>
           <a:p>
@@ -5742,87 +8734,63 @@
               <a:spcAft>
                 <a:spcPts val="600"/>
               </a:spcAft>
-              <a:defRPr sz="1000">
+              <a:defRPr sz="850">
+                <a:solidFill>
+                  <a:srgbClr val="64748B"/>
+                </a:solidFill>
+              </a:defRPr>
+            </a:pPr>
+            <a:r>
+              <a:t>Statutory Audit Readiness</a:t>
+            </a:r>
+          </a:p>
+          <a:p>
+            <a:pPr>
+              <a:spcAft>
+                <a:spcPts val="400"/>
+              </a:spcAft>
+              <a:defRPr sz="950">
                 <a:solidFill>
                   <a:srgbClr val="1E293B"/>
                 </a:solidFill>
               </a:defRPr>
             </a:pPr>
             <a:r>
-              <a:t>• In-Bus Telematics Tablet: Mounted 7-inch rugged Android tablet with 4G LTE and GPS validates card taps in under 0.3 seconds.</a:t>
-            </a:r>
-          </a:p>
-          <a:p>
-            <a:pPr>
-              <a:spcAft>
-                <a:spcPts val="600"/>
-              </a:spcAft>
-              <a:defRPr sz="1000">
+              <a:t>• 100% Reconciled Financials: Complete chart of accounts mapping income vs operational expenditures.</a:t>
+            </a:r>
+          </a:p>
+          <a:p>
+            <a:pPr>
+              <a:spcAft>
+                <a:spcPts val="400"/>
+              </a:spcAft>
+              <a:defRPr sz="950">
                 <a:solidFill>
                   <a:srgbClr val="1E293B"/>
                 </a:solidFill>
               </a:defRPr>
             </a:pPr>
             <a:r>
-              <a:t>• Instant Parent SMS Alert: '[EduSphere] Bupe Mwewa boarded BUS-SOL-02 at Kansanshi Golf Estate at 06:46 AM. ETA School: 20 mins.'</a:t>
-            </a:r>
-          </a:p>
-          <a:p>
-            <a:pPr>
-              <a:spcAft>
-                <a:spcPts val="600"/>
-              </a:spcAft>
-              <a:defRPr sz="1000">
+              <a:t>• Expenditure Tracking: Authorizations for boarding rations, diesel fuel, teacher salaries, and facility repairs.</a:t>
+            </a:r>
+          </a:p>
+          <a:p>
+            <a:pPr>
+              <a:spcAft>
+                <a:spcPts val="400"/>
+              </a:spcAft>
+              <a:defRPr sz="950">
                 <a:solidFill>
                   <a:srgbClr val="1E293B"/>
                 </a:solidFill>
               </a:defRPr>
             </a:pPr>
             <a:r>
-              <a:t>• Wrong-Bus Lockout Protection: Tablet screen sounds audible warning if a learner attempts to board the wrong route or exits at the wrong stop.</a:t>
-            </a:r>
-          </a:p>
-          <a:p>
-            <a:pPr>
-              <a:spcAft>
-                <a:spcPts val="600"/>
-              </a:spcAft>
-              <a:defRPr sz="1000">
-                <a:solidFill>
-                  <a:srgbClr val="1E293B"/>
-                </a:solidFill>
-              </a:defRPr>
-            </a:pPr>
-            <a:r>
-              <a:t>• Offline Store-and-Forward: Pockets along Kansanshi Mine Road with low cellular coverage store taps locally in SQLite and auto-sync when reconnected.</a:t>
-            </a:r>
-          </a:p>
-        </p:txBody>
-      </p:sp>
-      <p:pic>
-        <p:nvPicPr>
-          <p:cNvPr id="7" name="Picture 6" descr="Screenshot 2026-10-18 102033.png"/>
-          <p:cNvPicPr>
-            <a:picLocks noChangeAspect="1"/>
-          </p:cNvPicPr>
-          <p:nvPr/>
-        </p:nvPicPr>
-        <p:blipFill>
-          <a:blip r:embed="rId2"/>
-          <a:stretch>
-            <a:fillRect/>
-          </a:stretch>
-        </p:blipFill>
-        <p:spPr>
-          <a:xfrm>
-            <a:off x="5303520" y="1371600"/>
-            <a:ext cx="6126480" cy="3540698"/>
-          </a:xfrm>
-          <a:prstGeom prst="rect">
-            <a:avLst/>
-          </a:prstGeom>
-        </p:spPr>
-      </p:pic>
+              <a:t>• Auditor-Ready Statements: Formatted Income &amp; Expenditure Statements exportable to Excel and PDF.</a:t>
+            </a:r>
+          </a:p>
+        </p:txBody>
+      </p:sp>
     </p:spTree>
   </p:cSld>
   <p:clrMapOvr>
@@ -5992,21 +8960,109 @@
               </a:defRPr>
             </a:pPr>
             <a:r>
-              <a:t>Fees Management, Inflows Ledger &amp; Complete Cashbook Control</a:t>
-            </a:r>
-          </a:p>
-        </p:txBody>
-      </p:sp>
-      <p:sp>
-        <p:nvSpPr>
-          <p:cNvPr id="6" name="TextBox 5"/>
+              <a:t>Academic Engine: ECZ Markbooks &amp; Terminal Report Cards</a:t>
+            </a:r>
+          </a:p>
+        </p:txBody>
+      </p:sp>
+      <p:sp>
+        <p:nvSpPr>
+          <p:cNvPr id="6" name="Rounded Rectangle 5"/>
+          <p:cNvSpPr/>
+          <p:nvPr/>
+        </p:nvSpPr>
+        <p:spPr>
+          <a:xfrm>
+            <a:off x="731520" y="1280160"/>
+            <a:ext cx="5212080" cy="5029200"/>
+          </a:xfrm>
+          <a:prstGeom prst="roundRect">
+            <a:avLst/>
+          </a:prstGeom>
+          <a:solidFill>
+            <a:srgbClr val="FFFFFF"/>
+          </a:solidFill>
+          <a:ln w="12700">
+            <a:solidFill>
+              <a:srgbClr val="E2E8F0"/>
+            </a:solidFill>
+          </a:ln>
+        </p:spPr>
+        <p:style>
+          <a:lnRef idx="1">
+            <a:schemeClr val="accent1"/>
+          </a:lnRef>
+          <a:fillRef idx="3">
+            <a:schemeClr val="accent1"/>
+          </a:fillRef>
+          <a:effectRef idx="2">
+            <a:schemeClr val="accent1"/>
+          </a:effectRef>
+          <a:fontRef idx="minor">
+            <a:schemeClr val="lt1"/>
+          </a:fontRef>
+        </p:style>
+        <p:txBody>
+          <a:bodyPr rtlCol="0" anchor="ctr"/>
+          <a:lstStyle/>
+          <a:p>
+            <a:pPr algn="ctr"/>
+          </a:p>
+        </p:txBody>
+      </p:sp>
+      <p:sp>
+        <p:nvSpPr>
+          <p:cNvPr id="7" name="Rectangle 6"/>
+          <p:cNvSpPr/>
+          <p:nvPr/>
+        </p:nvSpPr>
+        <p:spPr>
+          <a:xfrm>
+            <a:off x="731520" y="1280160"/>
+            <a:ext cx="5212080" cy="73152"/>
+          </a:xfrm>
+          <a:prstGeom prst="rect">
+            <a:avLst/>
+          </a:prstGeom>
+          <a:solidFill>
+            <a:srgbClr val="0B2545"/>
+          </a:solidFill>
+          <a:ln>
+            <a:noFill/>
+          </a:ln>
+        </p:spPr>
+        <p:style>
+          <a:lnRef idx="1">
+            <a:schemeClr val="accent1"/>
+          </a:lnRef>
+          <a:fillRef idx="3">
+            <a:schemeClr val="accent1"/>
+          </a:fillRef>
+          <a:effectRef idx="2">
+            <a:schemeClr val="accent1"/>
+          </a:effectRef>
+          <a:fontRef idx="minor">
+            <a:schemeClr val="lt1"/>
+          </a:fontRef>
+        </p:style>
+        <p:txBody>
+          <a:bodyPr rtlCol="0" anchor="ctr"/>
+          <a:lstStyle/>
+          <a:p>
+            <a:pPr algn="ctr"/>
+          </a:p>
+        </p:txBody>
+      </p:sp>
+      <p:sp>
+        <p:nvSpPr>
+          <p:cNvPr id="8" name="TextBox 7"/>
           <p:cNvSpPr txBox="1"/>
           <p:nvPr/>
         </p:nvSpPr>
         <p:spPr>
           <a:xfrm>
-            <a:off x="731520" y="1280160"/>
-            <a:ext cx="4297680" cy="5120640"/>
+            <a:off x="868680" y="1389888"/>
+            <a:ext cx="4937760" cy="4800600"/>
           </a:xfrm>
           <a:prstGeom prst="rect">
             <a:avLst/>
@@ -6021,16 +9077,217 @@
           <a:p>
             <a:pPr>
               <a:spcAft>
+                <a:spcPts val="200"/>
+              </a:spcAft>
+              <a:defRPr sz="1200" b="1">
+                <a:solidFill>
+                  <a:srgbClr val="0B2545"/>
+                </a:solidFill>
+              </a:defRPr>
+            </a:pPr>
+            <a:r>
+              <a:t>Curriculum &amp; Grading Automation</a:t>
+            </a:r>
+          </a:p>
+          <a:p>
+            <a:pPr>
+              <a:spcAft>
                 <a:spcPts val="600"/>
               </a:spcAft>
-              <a:defRPr sz="1300" b="1">
+              <a:defRPr sz="850">
+                <a:solidFill>
+                  <a:srgbClr val="64748B"/>
+                </a:solidFill>
+              </a:defRPr>
+            </a:pPr>
+            <a:r>
+              <a:t>National Curriculum Standards</a:t>
+            </a:r>
+          </a:p>
+          <a:p>
+            <a:pPr>
+              <a:spcAft>
+                <a:spcPts val="400"/>
+              </a:spcAft>
+              <a:defRPr sz="950">
+                <a:solidFill>
+                  <a:srgbClr val="1E293B"/>
+                </a:solidFill>
+              </a:defRPr>
+            </a:pPr>
+            <a:r>
+              <a:t>• Examinations Council of Zambia (ECZ) 8-Scale: Built-in distinction (1-2), merit (3-4), credit (5-6), pass (7-8), fail (9).</a:t>
+            </a:r>
+          </a:p>
+          <a:p>
+            <a:pPr>
+              <a:spcAft>
+                <a:spcPts val="400"/>
+              </a:spcAft>
+              <a:defRPr sz="950">
+                <a:solidFill>
+                  <a:srgbClr val="1E293B"/>
+                </a:solidFill>
+              </a:defRPr>
+            </a:pPr>
+            <a:r>
+              <a:t>• Continuous Assessment (CA): Weighting of CA1, CA2, midterm mocks, and end-of-term examinations.</a:t>
+            </a:r>
+          </a:p>
+          <a:p>
+            <a:pPr>
+              <a:spcAft>
+                <a:spcPts val="400"/>
+              </a:spcAft>
+              <a:defRPr sz="950">
+                <a:solidFill>
+                  <a:srgbClr val="1E293B"/>
+                </a:solidFill>
+              </a:defRPr>
+            </a:pPr>
+            <a:r>
+              <a:t>• ECE Developmental Rubrics: Multi-domain observation tools for nursery and kindergarten cognitive growth.</a:t>
+            </a:r>
+          </a:p>
+          <a:p>
+            <a:pPr>
+              <a:spcAft>
+                <a:spcPts val="400"/>
+              </a:spcAft>
+              <a:defRPr sz="950">
+                <a:solidFill>
+                  <a:srgbClr val="1E293B"/>
+                </a:solidFill>
+              </a:defRPr>
+            </a:pPr>
+            <a:r>
+              <a:t>• Automated Subject Ranking &amp; Cohort Analysis: Pinpoints underperforming academic subjects for prompt intervention.</a:t>
+            </a:r>
+          </a:p>
+        </p:txBody>
+      </p:sp>
+      <p:sp>
+        <p:nvSpPr>
+          <p:cNvPr id="9" name="Rounded Rectangle 8"/>
+          <p:cNvSpPr/>
+          <p:nvPr/>
+        </p:nvSpPr>
+        <p:spPr>
+          <a:xfrm>
+            <a:off x="6217920" y="1280160"/>
+            <a:ext cx="5212080" cy="5029200"/>
+          </a:xfrm>
+          <a:prstGeom prst="roundRect">
+            <a:avLst/>
+          </a:prstGeom>
+          <a:solidFill>
+            <a:srgbClr val="FFFFFF"/>
+          </a:solidFill>
+          <a:ln w="12700">
+            <a:solidFill>
+              <a:srgbClr val="E2E8F0"/>
+            </a:solidFill>
+          </a:ln>
+        </p:spPr>
+        <p:style>
+          <a:lnRef idx="1">
+            <a:schemeClr val="accent1"/>
+          </a:lnRef>
+          <a:fillRef idx="3">
+            <a:schemeClr val="accent1"/>
+          </a:fillRef>
+          <a:effectRef idx="2">
+            <a:schemeClr val="accent1"/>
+          </a:effectRef>
+          <a:fontRef idx="minor">
+            <a:schemeClr val="lt1"/>
+          </a:fontRef>
+        </p:style>
+        <p:txBody>
+          <a:bodyPr rtlCol="0" anchor="ctr"/>
+          <a:lstStyle/>
+          <a:p>
+            <a:pPr algn="ctr"/>
+          </a:p>
+        </p:txBody>
+      </p:sp>
+      <p:sp>
+        <p:nvSpPr>
+          <p:cNvPr id="10" name="Rectangle 9"/>
+          <p:cNvSpPr/>
+          <p:nvPr/>
+        </p:nvSpPr>
+        <p:spPr>
+          <a:xfrm>
+            <a:off x="6217920" y="1280160"/>
+            <a:ext cx="5212080" cy="73152"/>
+          </a:xfrm>
+          <a:prstGeom prst="rect">
+            <a:avLst/>
+          </a:prstGeom>
+          <a:solidFill>
+            <a:srgbClr val="D4AF37"/>
+          </a:solidFill>
+          <a:ln>
+            <a:noFill/>
+          </a:ln>
+        </p:spPr>
+        <p:style>
+          <a:lnRef idx="1">
+            <a:schemeClr val="accent1"/>
+          </a:lnRef>
+          <a:fillRef idx="3">
+            <a:schemeClr val="accent1"/>
+          </a:fillRef>
+          <a:effectRef idx="2">
+            <a:schemeClr val="accent1"/>
+          </a:effectRef>
+          <a:fontRef idx="minor">
+            <a:schemeClr val="lt1"/>
+          </a:fontRef>
+        </p:style>
+        <p:txBody>
+          <a:bodyPr rtlCol="0" anchor="ctr"/>
+          <a:lstStyle/>
+          <a:p>
+            <a:pPr algn="ctr"/>
+          </a:p>
+        </p:txBody>
+      </p:sp>
+      <p:sp>
+        <p:nvSpPr>
+          <p:cNvPr id="11" name="TextBox 10"/>
+          <p:cNvSpPr txBox="1"/>
+          <p:nvPr/>
+        </p:nvSpPr>
+        <p:spPr>
+          <a:xfrm>
+            <a:off x="6355080" y="1389888"/>
+            <a:ext cx="4937760" cy="4800600"/>
+          </a:xfrm>
+          <a:prstGeom prst="rect">
+            <a:avLst/>
+          </a:prstGeom>
+          <a:noFill/>
+        </p:spPr>
+        <p:txBody>
+          <a:bodyPr wrap="square">
+            <a:spAutoFit/>
+          </a:bodyPr>
+          <a:lstStyle/>
+          <a:p>
+            <a:pPr>
+              <a:spcAft>
+                <a:spcPts val="200"/>
+              </a:spcAft>
+              <a:defRPr sz="1200" b="1">
                 <a:solidFill>
                   <a:srgbClr val="0B2545"/>
                 </a:solidFill>
               </a:defRPr>
             </a:pPr>
             <a:r>
-              <a:t>Financial Governance &amp; Multi-Channel Inflows</a:t>
+              <a:t>Official Report Cards &amp; Exam Clearance</a:t>
             </a:r>
           </a:p>
           <a:p>
@@ -6038,102 +9295,78 @@
               <a:spcAft>
                 <a:spcPts val="600"/>
               </a:spcAft>
-              <a:defRPr sz="1000">
+              <a:defRPr sz="850">
+                <a:solidFill>
+                  <a:srgbClr val="64748B"/>
+                </a:solidFill>
+              </a:defRPr>
+            </a:pPr>
+            <a:r>
+              <a:t>Tamper-Proof Certification</a:t>
+            </a:r>
+          </a:p>
+          <a:p>
+            <a:pPr>
+              <a:spcAft>
+                <a:spcPts val="400"/>
+              </a:spcAft>
+              <a:defRPr sz="950">
                 <a:solidFill>
                   <a:srgbClr val="1E293B"/>
                 </a:solidFill>
               </a:defRPr>
             </a:pPr>
             <a:r>
-              <a:t>• Zero-Variance Reconciliation: All 780 student ledger accounts match official receipts with zero discrepancy across Zanaco, Stanbic, and Mobile Money.</a:t>
-            </a:r>
-          </a:p>
-          <a:p>
-            <a:pPr>
-              <a:spcAft>
-                <a:spcPts val="600"/>
-              </a:spcAft>
-              <a:defRPr sz="1000">
+              <a:t>• 1-Click Batch Terminal Reports: High-resolution PDF generation with school crest, grading legend, and teacher remarks.</a:t>
+            </a:r>
+          </a:p>
+          <a:p>
+            <a:pPr>
+              <a:spcAft>
+                <a:spcPts val="400"/>
+              </a:spcAft>
+              <a:defRPr sz="950">
                 <a:solidFill>
                   <a:srgbClr val="1E293B"/>
                 </a:solidFill>
               </a:defRPr>
             </a:pPr>
             <a:r>
-              <a:t>• Multi-Campus Fee Isolation: Independent billing schedules for Urban Primary (Day Tuition K2,800) and Mushitala (Tuition + Boarding K10,400).</a:t>
-            </a:r>
-          </a:p>
-          <a:p>
-            <a:pPr>
-              <a:spcAft>
-                <a:spcPts val="600"/>
-              </a:spcAft>
-              <a:defRPr sz="1000">
+              <a:t>• Digital Security Stamp: Includes anti-fraud QR code linking back to sovereign institutional verification portal.</a:t>
+            </a:r>
+          </a:p>
+          <a:p>
+            <a:pPr>
+              <a:spcAft>
+                <a:spcPts val="400"/>
+              </a:spcAft>
+              <a:defRPr sz="950">
                 <a:solidFill>
                   <a:srgbClr val="1E293B"/>
                 </a:solidFill>
               </a:defRPr>
             </a:pPr>
             <a:r>
-              <a:t>• Real-Time Transparent Receipts: 2,123 reconciled institutional receipts generated with audit trails and instant PDF receipt generation.</a:t>
-            </a:r>
-          </a:p>
-          <a:p>
-            <a:pPr>
-              <a:spcAft>
-                <a:spcPts val="600"/>
-              </a:spcAft>
-              <a:defRPr sz="1000">
+              <a:t>• ECZ Candidate Clearance Lock: Automatically verifies student has achieved 75% attendance and 100% fee clearance before exam issuance.</a:t>
+            </a:r>
+          </a:p>
+          <a:p>
+            <a:pPr>
+              <a:spcAft>
+                <a:spcPts val="400"/>
+              </a:spcAft>
+              <a:defRPr sz="950">
                 <a:solidFill>
                   <a:srgbClr val="1E293B"/>
                 </a:solidFill>
               </a:defRPr>
             </a:pPr>
             <a:r>
-              <a:t>• Expenditure Control (Outflows): Strict authorization workflow for operational disbursements, fuel rations, food dining provisions, and payroll.</a:t>
-            </a:r>
-          </a:p>
-          <a:p>
-            <a:pPr>
-              <a:spcAft>
-                <a:spcPts val="600"/>
-              </a:spcAft>
-              <a:defRPr sz="1000">
-                <a:solidFill>
-                  <a:srgbClr val="1E293B"/>
-                </a:solidFill>
-              </a:defRPr>
-            </a:pPr>
-            <a:r>
-              <a:t>• Recovery Rate Optimization: Visual aged debtors ledger categorizing 30, 60, and 90+ day balances to systematically close out arrears.</a:t>
-            </a:r>
-          </a:p>
-        </p:txBody>
-      </p:sp>
-      <p:pic>
-        <p:nvPicPr>
-          <p:cNvPr id="7" name="Picture 6" descr="Screenshot 2026-10-18 100745.png"/>
-          <p:cNvPicPr>
-            <a:picLocks noChangeAspect="1"/>
-          </p:cNvPicPr>
-          <p:nvPr/>
-        </p:nvPicPr>
-        <p:blipFill>
-          <a:blip r:embed="rId2"/>
-          <a:stretch>
-            <a:fillRect/>
-          </a:stretch>
-        </p:blipFill>
-        <p:spPr>
-          <a:xfrm>
-            <a:off x="5212080" y="1371600"/>
-            <a:ext cx="6217920" cy="3957056"/>
-          </a:xfrm>
-          <a:prstGeom prst="rect">
-            <a:avLst/>
-          </a:prstGeom>
-        </p:spPr>
-      </p:pic>
+              <a:t>• Parent Portal Publishing: Headteacher approves reports online for instant guardian download.</a:t>
+            </a:r>
+          </a:p>
+        </p:txBody>
+      </p:sp>
     </p:spTree>
   </p:cSld>
   <p:clrMapOvr>
@@ -6303,21 +9536,109 @@
               </a:defRPr>
             </a:pPr>
             <a:r>
-              <a:t>Teacher Workspace: ECZ Assessment Suite &amp; 3-Tier Supervisory Sign-Off</a:t>
-            </a:r>
-          </a:p>
-        </p:txBody>
-      </p:sp>
-      <p:sp>
-        <p:nvSpPr>
-          <p:cNvPr id="6" name="TextBox 5"/>
+              <a:t>360° Boarding House Management: Pastoral Care &amp; Curfews</a:t>
+            </a:r>
+          </a:p>
+        </p:txBody>
+      </p:sp>
+      <p:sp>
+        <p:nvSpPr>
+          <p:cNvPr id="6" name="Rounded Rectangle 5"/>
+          <p:cNvSpPr/>
+          <p:nvPr/>
+        </p:nvSpPr>
+        <p:spPr>
+          <a:xfrm>
+            <a:off x="731520" y="1280160"/>
+            <a:ext cx="3383280" cy="5029200"/>
+          </a:xfrm>
+          <a:prstGeom prst="roundRect">
+            <a:avLst/>
+          </a:prstGeom>
+          <a:solidFill>
+            <a:srgbClr val="FFFFFF"/>
+          </a:solidFill>
+          <a:ln w="12700">
+            <a:solidFill>
+              <a:srgbClr val="E2E8F0"/>
+            </a:solidFill>
+          </a:ln>
+        </p:spPr>
+        <p:style>
+          <a:lnRef idx="1">
+            <a:schemeClr val="accent1"/>
+          </a:lnRef>
+          <a:fillRef idx="3">
+            <a:schemeClr val="accent1"/>
+          </a:fillRef>
+          <a:effectRef idx="2">
+            <a:schemeClr val="accent1"/>
+          </a:effectRef>
+          <a:fontRef idx="minor">
+            <a:schemeClr val="lt1"/>
+          </a:fontRef>
+        </p:style>
+        <p:txBody>
+          <a:bodyPr rtlCol="0" anchor="ctr"/>
+          <a:lstStyle/>
+          <a:p>
+            <a:pPr algn="ctr"/>
+          </a:p>
+        </p:txBody>
+      </p:sp>
+      <p:sp>
+        <p:nvSpPr>
+          <p:cNvPr id="7" name="Rectangle 6"/>
+          <p:cNvSpPr/>
+          <p:nvPr/>
+        </p:nvSpPr>
+        <p:spPr>
+          <a:xfrm>
+            <a:off x="731520" y="1280160"/>
+            <a:ext cx="3383280" cy="73152"/>
+          </a:xfrm>
+          <a:prstGeom prst="rect">
+            <a:avLst/>
+          </a:prstGeom>
+          <a:solidFill>
+            <a:srgbClr val="134074"/>
+          </a:solidFill>
+          <a:ln>
+            <a:noFill/>
+          </a:ln>
+        </p:spPr>
+        <p:style>
+          <a:lnRef idx="1">
+            <a:schemeClr val="accent1"/>
+          </a:lnRef>
+          <a:fillRef idx="3">
+            <a:schemeClr val="accent1"/>
+          </a:fillRef>
+          <a:effectRef idx="2">
+            <a:schemeClr val="accent1"/>
+          </a:effectRef>
+          <a:fontRef idx="minor">
+            <a:schemeClr val="lt1"/>
+          </a:fontRef>
+        </p:style>
+        <p:txBody>
+          <a:bodyPr rtlCol="0" anchor="ctr"/>
+          <a:lstStyle/>
+          <a:p>
+            <a:pPr algn="ctr"/>
+          </a:p>
+        </p:txBody>
+      </p:sp>
+      <p:sp>
+        <p:nvSpPr>
+          <p:cNvPr id="8" name="TextBox 7"/>
           <p:cNvSpPr txBox="1"/>
           <p:nvPr/>
         </p:nvSpPr>
         <p:spPr>
           <a:xfrm>
-            <a:off x="731520" y="1280160"/>
-            <a:ext cx="4297680" cy="5120640"/>
+            <a:off x="868680" y="1389888"/>
+            <a:ext cx="3108960" cy="4800600"/>
           </a:xfrm>
           <a:prstGeom prst="rect">
             <a:avLst/>
@@ -6332,16 +9653,202 @@
           <a:p>
             <a:pPr>
               <a:spcAft>
+                <a:spcPts val="200"/>
+              </a:spcAft>
+              <a:defRPr sz="1200" b="1">
+                <a:solidFill>
+                  <a:srgbClr val="0B2545"/>
+                </a:solidFill>
+              </a:defRPr>
+            </a:pPr>
+            <a:r>
+              <a:t>Hostel &amp; Bed Allocation</a:t>
+            </a:r>
+          </a:p>
+          <a:p>
+            <a:pPr>
+              <a:spcAft>
                 <a:spcPts val="600"/>
               </a:spcAft>
-              <a:defRPr sz="1300" b="1">
+              <a:defRPr sz="850">
+                <a:solidFill>
+                  <a:srgbClr val="64748B"/>
+                </a:solidFill>
+              </a:defRPr>
+            </a:pPr>
+            <a:r>
+              <a:t>Hostel Inventory</a:t>
+            </a:r>
+          </a:p>
+          <a:p>
+            <a:pPr>
+              <a:spcAft>
+                <a:spcPts val="400"/>
+              </a:spcAft>
+              <a:defRPr sz="950">
+                <a:solidFill>
+                  <a:srgbClr val="1E293B"/>
+                </a:solidFill>
+              </a:defRPr>
+            </a:pPr>
+            <a:r>
+              <a:t>• Visual Room &amp; Bed Mapping: Tracks occupancy across boys' and girls' residential blocks at Kansanshi Campus.</a:t>
+            </a:r>
+          </a:p>
+          <a:p>
+            <a:pPr>
+              <a:spcAft>
+                <a:spcPts val="400"/>
+              </a:spcAft>
+              <a:defRPr sz="950">
+                <a:solidFill>
+                  <a:srgbClr val="1E293B"/>
+                </a:solidFill>
+              </a:defRPr>
+            </a:pPr>
+            <a:r>
+              <a:t>• Safeguarding Segregation: Junior vs. Senior dorm separation enforced by system rules.</a:t>
+            </a:r>
+          </a:p>
+          <a:p>
+            <a:pPr>
+              <a:spcAft>
+                <a:spcPts val="400"/>
+              </a:spcAft>
+              <a:defRPr sz="950">
+                <a:solidFill>
+                  <a:srgbClr val="1E293B"/>
+                </a:solidFill>
+              </a:defRPr>
+            </a:pPr>
+            <a:r>
+              <a:t>• Capacity Planning: Prevents over-enrolment beyond certified health board hostel allowances.</a:t>
+            </a:r>
+          </a:p>
+        </p:txBody>
+      </p:sp>
+      <p:sp>
+        <p:nvSpPr>
+          <p:cNvPr id="9" name="Rounded Rectangle 8"/>
+          <p:cNvSpPr/>
+          <p:nvPr/>
+        </p:nvSpPr>
+        <p:spPr>
+          <a:xfrm>
+            <a:off x="4389120" y="1280160"/>
+            <a:ext cx="3383280" cy="5029200"/>
+          </a:xfrm>
+          <a:prstGeom prst="roundRect">
+            <a:avLst/>
+          </a:prstGeom>
+          <a:solidFill>
+            <a:srgbClr val="FFFFFF"/>
+          </a:solidFill>
+          <a:ln w="12700">
+            <a:solidFill>
+              <a:srgbClr val="E2E8F0"/>
+            </a:solidFill>
+          </a:ln>
+        </p:spPr>
+        <p:style>
+          <a:lnRef idx="1">
+            <a:schemeClr val="accent1"/>
+          </a:lnRef>
+          <a:fillRef idx="3">
+            <a:schemeClr val="accent1"/>
+          </a:fillRef>
+          <a:effectRef idx="2">
+            <a:schemeClr val="accent1"/>
+          </a:effectRef>
+          <a:fontRef idx="minor">
+            <a:schemeClr val="lt1"/>
+          </a:fontRef>
+        </p:style>
+        <p:txBody>
+          <a:bodyPr rtlCol="0" anchor="ctr"/>
+          <a:lstStyle/>
+          <a:p>
+            <a:pPr algn="ctr"/>
+          </a:p>
+        </p:txBody>
+      </p:sp>
+      <p:sp>
+        <p:nvSpPr>
+          <p:cNvPr id="10" name="Rectangle 9"/>
+          <p:cNvSpPr/>
+          <p:nvPr/>
+        </p:nvSpPr>
+        <p:spPr>
+          <a:xfrm>
+            <a:off x="4389120" y="1280160"/>
+            <a:ext cx="3383280" cy="73152"/>
+          </a:xfrm>
+          <a:prstGeom prst="rect">
+            <a:avLst/>
+          </a:prstGeom>
+          <a:solidFill>
+            <a:srgbClr val="10B981"/>
+          </a:solidFill>
+          <a:ln>
+            <a:noFill/>
+          </a:ln>
+        </p:spPr>
+        <p:style>
+          <a:lnRef idx="1">
+            <a:schemeClr val="accent1"/>
+          </a:lnRef>
+          <a:fillRef idx="3">
+            <a:schemeClr val="accent1"/>
+          </a:fillRef>
+          <a:effectRef idx="2">
+            <a:schemeClr val="accent1"/>
+          </a:effectRef>
+          <a:fontRef idx="minor">
+            <a:schemeClr val="lt1"/>
+          </a:fontRef>
+        </p:style>
+        <p:txBody>
+          <a:bodyPr rtlCol="0" anchor="ctr"/>
+          <a:lstStyle/>
+          <a:p>
+            <a:pPr algn="ctr"/>
+          </a:p>
+        </p:txBody>
+      </p:sp>
+      <p:sp>
+        <p:nvSpPr>
+          <p:cNvPr id="11" name="TextBox 10"/>
+          <p:cNvSpPr txBox="1"/>
+          <p:nvPr/>
+        </p:nvSpPr>
+        <p:spPr>
+          <a:xfrm>
+            <a:off x="4526280" y="1389888"/>
+            <a:ext cx="3108960" cy="4800600"/>
+          </a:xfrm>
+          <a:prstGeom prst="rect">
+            <a:avLst/>
+          </a:prstGeom>
+          <a:noFill/>
+        </p:spPr>
+        <p:txBody>
+          <a:bodyPr wrap="square">
+            <a:spAutoFit/>
+          </a:bodyPr>
+          <a:lstStyle/>
+          <a:p>
+            <a:pPr>
+              <a:spcAft>
+                <a:spcPts val="200"/>
+              </a:spcAft>
+              <a:defRPr sz="1200" b="1">
                 <a:solidFill>
                   <a:srgbClr val="0B2545"/>
                 </a:solidFill>
               </a:defRPr>
             </a:pPr>
             <a:r>
-              <a:t>Standardized Scholastic Markbook</a:t>
+              <a:t>21:00 Curfew Roll-Call</a:t>
             </a:r>
           </a:p>
           <a:p>
@@ -6349,14 +9856,185 @@
               <a:spcAft>
                 <a:spcPts val="600"/>
               </a:spcAft>
-              <a:defRPr sz="1000">
+              <a:defRPr sz="850">
+                <a:solidFill>
+                  <a:srgbClr val="64748B"/>
+                </a:solidFill>
+              </a:defRPr>
+            </a:pPr>
+            <a:r>
+              <a:t>Nightly Safeguarding</a:t>
+            </a:r>
+          </a:p>
+          <a:p>
+            <a:pPr>
+              <a:spcAft>
+                <a:spcPts val="400"/>
+              </a:spcAft>
+              <a:defRPr sz="950">
                 <a:solidFill>
                   <a:srgbClr val="1E293B"/>
                 </a:solidFill>
               </a:defRPr>
             </a:pPr>
             <a:r>
-              <a:t>• All 16 Cohorts Selectable: Seamlessly switches between Early Years, Grades 1-7, and Forms 1-5 with full 30 to 44 student rosters loaded dynamically.</a:t>
+              <a:t>• Digital Nightly Bed Check: Housemasters conduct roll-call via mobile Android phone at each bed cubicle.</a:t>
+            </a:r>
+          </a:p>
+          <a:p>
+            <a:pPr>
+              <a:spcAft>
+                <a:spcPts val="400"/>
+              </a:spcAft>
+              <a:defRPr sz="950">
+                <a:solidFill>
+                  <a:srgbClr val="1E293B"/>
+                </a:solidFill>
+              </a:defRPr>
+            </a:pPr>
+            <a:r>
+              <a:t>• Instant Absentee Escalation: Any missing pupil triggers an urgent red alert on the Director's phone.</a:t>
+            </a:r>
+          </a:p>
+          <a:p>
+            <a:pPr>
+              <a:spcAft>
+                <a:spcPts val="400"/>
+              </a:spcAft>
+              <a:defRPr sz="950">
+                <a:solidFill>
+                  <a:srgbClr val="1E293B"/>
+                </a:solidFill>
+              </a:defRPr>
+            </a:pPr>
+            <a:r>
+              <a:t>• Historical Curfew Logs: Identifies repeat violators for pastoral counselling.</a:t>
+            </a:r>
+          </a:p>
+        </p:txBody>
+      </p:sp>
+      <p:sp>
+        <p:nvSpPr>
+          <p:cNvPr id="12" name="Rounded Rectangle 11"/>
+          <p:cNvSpPr/>
+          <p:nvPr/>
+        </p:nvSpPr>
+        <p:spPr>
+          <a:xfrm>
+            <a:off x="8046720" y="1280160"/>
+            <a:ext cx="3383280" cy="5029200"/>
+          </a:xfrm>
+          <a:prstGeom prst="roundRect">
+            <a:avLst/>
+          </a:prstGeom>
+          <a:solidFill>
+            <a:srgbClr val="FFFFFF"/>
+          </a:solidFill>
+          <a:ln w="12700">
+            <a:solidFill>
+              <a:srgbClr val="E2E8F0"/>
+            </a:solidFill>
+          </a:ln>
+        </p:spPr>
+        <p:style>
+          <a:lnRef idx="1">
+            <a:schemeClr val="accent1"/>
+          </a:lnRef>
+          <a:fillRef idx="3">
+            <a:schemeClr val="accent1"/>
+          </a:fillRef>
+          <a:effectRef idx="2">
+            <a:schemeClr val="accent1"/>
+          </a:effectRef>
+          <a:fontRef idx="minor">
+            <a:schemeClr val="lt1"/>
+          </a:fontRef>
+        </p:style>
+        <p:txBody>
+          <a:bodyPr rtlCol="0" anchor="ctr"/>
+          <a:lstStyle/>
+          <a:p>
+            <a:pPr algn="ctr"/>
+          </a:p>
+        </p:txBody>
+      </p:sp>
+      <p:sp>
+        <p:nvSpPr>
+          <p:cNvPr id="13" name="Rectangle 12"/>
+          <p:cNvSpPr/>
+          <p:nvPr/>
+        </p:nvSpPr>
+        <p:spPr>
+          <a:xfrm>
+            <a:off x="8046720" y="1280160"/>
+            <a:ext cx="3383280" cy="73152"/>
+          </a:xfrm>
+          <a:prstGeom prst="rect">
+            <a:avLst/>
+          </a:prstGeom>
+          <a:solidFill>
+            <a:srgbClr val="D4AF37"/>
+          </a:solidFill>
+          <a:ln>
+            <a:noFill/>
+          </a:ln>
+        </p:spPr>
+        <p:style>
+          <a:lnRef idx="1">
+            <a:schemeClr val="accent1"/>
+          </a:lnRef>
+          <a:fillRef idx="3">
+            <a:schemeClr val="accent1"/>
+          </a:fillRef>
+          <a:effectRef idx="2">
+            <a:schemeClr val="accent1"/>
+          </a:effectRef>
+          <a:fontRef idx="minor">
+            <a:schemeClr val="lt1"/>
+          </a:fontRef>
+        </p:style>
+        <p:txBody>
+          <a:bodyPr rtlCol="0" anchor="ctr"/>
+          <a:lstStyle/>
+          <a:p>
+            <a:pPr algn="ctr"/>
+          </a:p>
+        </p:txBody>
+      </p:sp>
+      <p:sp>
+        <p:nvSpPr>
+          <p:cNvPr id="14" name="TextBox 13"/>
+          <p:cNvSpPr txBox="1"/>
+          <p:nvPr/>
+        </p:nvSpPr>
+        <p:spPr>
+          <a:xfrm>
+            <a:off x="8183880" y="1389888"/>
+            <a:ext cx="3108960" cy="4800600"/>
+          </a:xfrm>
+          <a:prstGeom prst="rect">
+            <a:avLst/>
+          </a:prstGeom>
+          <a:noFill/>
+        </p:spPr>
+        <p:txBody>
+          <a:bodyPr wrap="square">
+            <a:spAutoFit/>
+          </a:bodyPr>
+          <a:lstStyle/>
+          <a:p>
+            <a:pPr>
+              <a:spcAft>
+                <a:spcPts val="200"/>
+              </a:spcAft>
+              <a:defRPr sz="1200" b="1">
+                <a:solidFill>
+                  <a:srgbClr val="0B2545"/>
+                </a:solidFill>
+              </a:defRPr>
+            </a:pPr>
+            <a:r>
+              <a:t>Exeat &amp; Gate Pass Governance</a:t>
             </a:r>
           </a:p>
           <a:p>
@@ -6364,87 +10042,63 @@
               <a:spcAft>
                 <a:spcPts val="600"/>
               </a:spcAft>
-              <a:defRPr sz="1000">
+              <a:defRPr sz="850">
+                <a:solidFill>
+                  <a:srgbClr val="64748B"/>
+                </a:solidFill>
+              </a:defRPr>
+            </a:pPr>
+            <a:r>
+              <a:t>Perimeter Security</a:t>
+            </a:r>
+          </a:p>
+          <a:p>
+            <a:pPr>
+              <a:spcAft>
+                <a:spcPts val="400"/>
+              </a:spcAft>
+              <a:defRPr sz="950">
                 <a:solidFill>
                   <a:srgbClr val="1E293B"/>
                 </a:solidFill>
               </a:defRPr>
             </a:pPr>
             <a:r>
-              <a:t>• Full ECZ Curriculum Spectrum: Captures all subjects: Sciences, Mathematics, English, ICT, Social Studies, Zambian Languages, and Commerce.</a:t>
-            </a:r>
-          </a:p>
-          <a:p>
-            <a:pPr>
-              <a:spcAft>
-                <a:spcPts val="600"/>
-              </a:spcAft>
-              <a:defRPr sz="1000">
+              <a:t>• Tri-Party Approval: Parent phone request -&gt; Housemaster endorsement -&gt; Security gate clearance.</a:t>
+            </a:r>
+          </a:p>
+          <a:p>
+            <a:pPr>
+              <a:spcAft>
+                <a:spcPts val="400"/>
+              </a:spcAft>
+              <a:defRPr sz="950">
                 <a:solidFill>
                   <a:srgbClr val="1E293B"/>
                 </a:solidFill>
               </a:defRPr>
             </a:pPr>
             <a:r>
-              <a:t>• 4-Tier Assessment Breakdown: Weekly Topic Tests (15%), Continuous Assessments (25%), Mock Exams (20%), and Term Finals (40%) = 100% total.</a:t>
-            </a:r>
-          </a:p>
-          <a:p>
-            <a:pPr>
-              <a:spcAft>
-                <a:spcPts val="600"/>
-              </a:spcAft>
-              <a:defRPr sz="1000">
+              <a:t>• Medical vs. Weekend Exeats: Tracks medical referral to Solwezi General Hospital vs family weekend leave.</a:t>
+            </a:r>
+          </a:p>
+          <a:p>
+            <a:pPr>
+              <a:spcAft>
+                <a:spcPts val="400"/>
+              </a:spcAft>
+              <a:defRPr sz="950">
                 <a:solidFill>
                   <a:srgbClr val="1E293B"/>
                 </a:solidFill>
               </a:defRPr>
             </a:pPr>
             <a:r>
-              <a:t>• 3-Tier Supervisory Workflow: Class Teacher submits -&gt; Senior Teacher / HOD endorses -&gt; Principal gives final approval before publication.</a:t>
-            </a:r>
-          </a:p>
-          <a:p>
-            <a:pPr>
-              <a:spcAft>
-                <a:spcPts val="600"/>
-              </a:spcAft>
-              <a:defRPr sz="1000">
-                <a:solidFill>
-                  <a:srgbClr val="1E293B"/>
-                </a:solidFill>
-              </a:defRPr>
-            </a:pPr>
-            <a:r>
-              <a:t>• Offline Markbook Entry: Teachers can grade test papers without active internet; marks store locally and auto-sync when Wi-Fi connects.</a:t>
-            </a:r>
-          </a:p>
-        </p:txBody>
-      </p:sp>
-      <p:pic>
-        <p:nvPicPr>
-          <p:cNvPr id="7" name="Picture 6" descr="Screenshot 2026-10-18 102645.png"/>
-          <p:cNvPicPr>
-            <a:picLocks noChangeAspect="1"/>
-          </p:cNvPicPr>
-          <p:nvPr/>
-        </p:nvPicPr>
-        <p:blipFill>
-          <a:blip r:embed="rId2"/>
-          <a:stretch>
-            <a:fillRect/>
-          </a:stretch>
-        </p:blipFill>
-        <p:spPr>
-          <a:xfrm>
-            <a:off x="5212080" y="1371600"/>
-            <a:ext cx="6217920" cy="3073954"/>
-          </a:xfrm>
-          <a:prstGeom prst="rect">
-            <a:avLst/>
-          </a:prstGeom>
-        </p:spPr>
-      </p:pic>
+              <a:t>• Gatehouse QR Scanning: Kansanshi main security gate scans pass on phone before barrier release.</a:t>
+            </a:r>
+          </a:p>
+        </p:txBody>
+      </p:sp>
     </p:spTree>
   </p:cSld>
   <p:clrMapOvr>
@@ -6614,21 +10268,109 @@
               </a:defRPr>
             </a:pPr>
             <a:r>
-              <a:t>Parent Portal: Multi-Child Family Academic, Attendance &amp; Fee Center</a:t>
-            </a:r>
-          </a:p>
-        </p:txBody>
-      </p:sp>
-      <p:sp>
-        <p:nvSpPr>
-          <p:cNvPr id="6" name="TextBox 5"/>
+              <a:t>Multi-Horizon Attendance Matrix: From Daily Roll-Call to Annual Return</a:t>
+            </a:r>
+          </a:p>
+        </p:txBody>
+      </p:sp>
+      <p:sp>
+        <p:nvSpPr>
+          <p:cNvPr id="6" name="Rounded Rectangle 5"/>
+          <p:cNvSpPr/>
+          <p:nvPr/>
+        </p:nvSpPr>
+        <p:spPr>
+          <a:xfrm>
+            <a:off x="731520" y="1371600"/>
+            <a:ext cx="2606040" cy="4846320"/>
+          </a:xfrm>
+          <a:prstGeom prst="roundRect">
+            <a:avLst/>
+          </a:prstGeom>
+          <a:solidFill>
+            <a:srgbClr val="FFFFFF"/>
+          </a:solidFill>
+          <a:ln>
+            <a:solidFill>
+              <a:srgbClr val="E2E8F0"/>
+            </a:solidFill>
+          </a:ln>
+        </p:spPr>
+        <p:style>
+          <a:lnRef idx="1">
+            <a:schemeClr val="accent1"/>
+          </a:lnRef>
+          <a:fillRef idx="3">
+            <a:schemeClr val="accent1"/>
+          </a:fillRef>
+          <a:effectRef idx="2">
+            <a:schemeClr val="accent1"/>
+          </a:effectRef>
+          <a:fontRef idx="minor">
+            <a:schemeClr val="lt1"/>
+          </a:fontRef>
+        </p:style>
+        <p:txBody>
+          <a:bodyPr rtlCol="0" anchor="ctr"/>
+          <a:lstStyle/>
+          <a:p>
+            <a:pPr algn="ctr"/>
+          </a:p>
+        </p:txBody>
+      </p:sp>
+      <p:sp>
+        <p:nvSpPr>
+          <p:cNvPr id="7" name="Rectangle 6"/>
+          <p:cNvSpPr/>
+          <p:nvPr/>
+        </p:nvSpPr>
+        <p:spPr>
+          <a:xfrm>
+            <a:off x="731520" y="1371600"/>
+            <a:ext cx="2606040" cy="109728"/>
+          </a:xfrm>
+          <a:prstGeom prst="rect">
+            <a:avLst/>
+          </a:prstGeom>
+          <a:solidFill>
+            <a:srgbClr val="134074"/>
+          </a:solidFill>
+          <a:ln>
+            <a:noFill/>
+          </a:ln>
+        </p:spPr>
+        <p:style>
+          <a:lnRef idx="1">
+            <a:schemeClr val="accent1"/>
+          </a:lnRef>
+          <a:fillRef idx="3">
+            <a:schemeClr val="accent1"/>
+          </a:fillRef>
+          <a:effectRef idx="2">
+            <a:schemeClr val="accent1"/>
+          </a:effectRef>
+          <a:fontRef idx="minor">
+            <a:schemeClr val="lt1"/>
+          </a:fontRef>
+        </p:style>
+        <p:txBody>
+          <a:bodyPr rtlCol="0" anchor="ctr"/>
+          <a:lstStyle/>
+          <a:p>
+            <a:pPr algn="ctr"/>
+          </a:p>
+        </p:txBody>
+      </p:sp>
+      <p:sp>
+        <p:nvSpPr>
+          <p:cNvPr id="8" name="TextBox 7"/>
           <p:cNvSpPr txBox="1"/>
           <p:nvPr/>
         </p:nvSpPr>
         <p:spPr>
           <a:xfrm>
-            <a:off x="731520" y="1280160"/>
-            <a:ext cx="4297680" cy="5120640"/>
+            <a:off x="868680" y="1554480"/>
+            <a:ext cx="2331720" cy="4389120"/>
           </a:xfrm>
           <a:prstGeom prst="rect">
             <a:avLst/>
@@ -6642,9 +10384,6 @@
           <a:lstStyle/>
           <a:p>
             <a:pPr>
-              <a:spcAft>
-                <a:spcPts val="600"/>
-              </a:spcAft>
               <a:defRPr sz="1300" b="1">
                 <a:solidFill>
                   <a:srgbClr val="0B2545"/>
@@ -6652,14 +10391,26 @@
               </a:defRPr>
             </a:pPr>
             <a:r>
-              <a:t>Transparent Family Engagement</a:t>
-            </a:r>
-          </a:p>
-          <a:p>
-            <a:pPr>
-              <a:spcAft>
-                <a:spcPts val="600"/>
-              </a:spcAft>
+              <a:t>Daily Horizon</a:t>
+            </a:r>
+          </a:p>
+          <a:p>
+            <a:pPr>
+              <a:spcAft>
+                <a:spcPts val="1000"/>
+              </a:spcAft>
+              <a:defRPr sz="900">
+                <a:solidFill>
+                  <a:srgbClr val="134074"/>
+                </a:solidFill>
+              </a:defRPr>
+            </a:pPr>
+            <a:r>
+              <a:t>Morning Roll-Call</a:t>
+            </a:r>
+          </a:p>
+          <a:p>
+            <a:pPr>
               <a:defRPr sz="1000">
                 <a:solidFill>
                   <a:srgbClr val="1E293B"/>
@@ -6667,14 +10418,149 @@
               </a:defRPr>
             </a:pPr>
             <a:r>
-              <a:t>• Multi-Ward Switcher: Parents with multiple children (e.g. Bupe, Kondwani, Natasha, Chileshe) switch between all wards in one unified portal.</a:t>
-            </a:r>
-          </a:p>
-          <a:p>
-            <a:pPr>
-              <a:spcAft>
-                <a:spcPts val="600"/>
-              </a:spcAft>
+              <a:t>1-Tap 'Mark All Present' with late minute tracking and excuse categorization. Dispatches SMS alerts to guardians.</a:t>
+            </a:r>
+          </a:p>
+        </p:txBody>
+      </p:sp>
+      <p:sp>
+        <p:nvSpPr>
+          <p:cNvPr id="9" name="Rounded Rectangle 8"/>
+          <p:cNvSpPr/>
+          <p:nvPr/>
+        </p:nvSpPr>
+        <p:spPr>
+          <a:xfrm>
+            <a:off x="3429000" y="1371600"/>
+            <a:ext cx="2606040" cy="4846320"/>
+          </a:xfrm>
+          <a:prstGeom prst="roundRect">
+            <a:avLst/>
+          </a:prstGeom>
+          <a:solidFill>
+            <a:srgbClr val="FFFFFF"/>
+          </a:solidFill>
+          <a:ln>
+            <a:solidFill>
+              <a:srgbClr val="E2E8F0"/>
+            </a:solidFill>
+          </a:ln>
+        </p:spPr>
+        <p:style>
+          <a:lnRef idx="1">
+            <a:schemeClr val="accent1"/>
+          </a:lnRef>
+          <a:fillRef idx="3">
+            <a:schemeClr val="accent1"/>
+          </a:fillRef>
+          <a:effectRef idx="2">
+            <a:schemeClr val="accent1"/>
+          </a:effectRef>
+          <a:fontRef idx="minor">
+            <a:schemeClr val="lt1"/>
+          </a:fontRef>
+        </p:style>
+        <p:txBody>
+          <a:bodyPr rtlCol="0" anchor="ctr"/>
+          <a:lstStyle/>
+          <a:p>
+            <a:pPr algn="ctr"/>
+          </a:p>
+        </p:txBody>
+      </p:sp>
+      <p:sp>
+        <p:nvSpPr>
+          <p:cNvPr id="10" name="Rectangle 9"/>
+          <p:cNvSpPr/>
+          <p:nvPr/>
+        </p:nvSpPr>
+        <p:spPr>
+          <a:xfrm>
+            <a:off x="3429000" y="1371600"/>
+            <a:ext cx="2606040" cy="109728"/>
+          </a:xfrm>
+          <a:prstGeom prst="rect">
+            <a:avLst/>
+          </a:prstGeom>
+          <a:solidFill>
+            <a:srgbClr val="10B981"/>
+          </a:solidFill>
+          <a:ln>
+            <a:noFill/>
+          </a:ln>
+        </p:spPr>
+        <p:style>
+          <a:lnRef idx="1">
+            <a:schemeClr val="accent1"/>
+          </a:lnRef>
+          <a:fillRef idx="3">
+            <a:schemeClr val="accent1"/>
+          </a:fillRef>
+          <a:effectRef idx="2">
+            <a:schemeClr val="accent1"/>
+          </a:effectRef>
+          <a:fontRef idx="minor">
+            <a:schemeClr val="lt1"/>
+          </a:fontRef>
+        </p:style>
+        <p:txBody>
+          <a:bodyPr rtlCol="0" anchor="ctr"/>
+          <a:lstStyle/>
+          <a:p>
+            <a:pPr algn="ctr"/>
+          </a:p>
+        </p:txBody>
+      </p:sp>
+      <p:sp>
+        <p:nvSpPr>
+          <p:cNvPr id="11" name="TextBox 10"/>
+          <p:cNvSpPr txBox="1"/>
+          <p:nvPr/>
+        </p:nvSpPr>
+        <p:spPr>
+          <a:xfrm>
+            <a:off x="3566160" y="1554480"/>
+            <a:ext cx="2331720" cy="4389120"/>
+          </a:xfrm>
+          <a:prstGeom prst="rect">
+            <a:avLst/>
+          </a:prstGeom>
+          <a:noFill/>
+        </p:spPr>
+        <p:txBody>
+          <a:bodyPr wrap="square">
+            <a:spAutoFit/>
+          </a:bodyPr>
+          <a:lstStyle/>
+          <a:p>
+            <a:pPr>
+              <a:defRPr sz="1300" b="1">
+                <a:solidFill>
+                  <a:srgbClr val="0B2545"/>
+                </a:solidFill>
+              </a:defRPr>
+            </a:pPr>
+            <a:r>
+              <a:t>Weekly Horizon</a:t>
+            </a:r>
+          </a:p>
+          <a:p>
+            <a:pPr>
+              <a:spcAft>
+                <a:spcPts val="1000"/>
+              </a:spcAft>
+              <a:defRPr sz="900">
+                <a:solidFill>
+                  <a:srgbClr val="10B981"/>
+                </a:solidFill>
+              </a:defRPr>
+            </a:pPr>
+            <a:r>
+              <a:t>Instructional Progression</a:t>
+            </a:r>
+          </a:p>
+          <a:p>
+            <a:pPr>
               <a:defRPr sz="1000">
                 <a:solidFill>
                   <a:srgbClr val="1E293B"/>
@@ -6682,14 +10568,149 @@
               </a:defRPr>
             </a:pPr>
             <a:r>
-              <a:t>• Historical Performance Graphs: Multi-term trend charts (2024 to 2026) illustrate grade progression and classroom rankings over time.</a:t>
-            </a:r>
-          </a:p>
-          <a:p>
-            <a:pPr>
-              <a:spcAft>
-                <a:spcPts val="600"/>
-              </a:spcAft>
+              <a:t>Tracks attendance stability across W1 to W13 of Term 3. Visualizes cohort retention fluctuations.</a:t>
+            </a:r>
+          </a:p>
+        </p:txBody>
+      </p:sp>
+      <p:sp>
+        <p:nvSpPr>
+          <p:cNvPr id="12" name="Rounded Rectangle 11"/>
+          <p:cNvSpPr/>
+          <p:nvPr/>
+        </p:nvSpPr>
+        <p:spPr>
+          <a:xfrm>
+            <a:off x="6126480" y="1371600"/>
+            <a:ext cx="2606040" cy="4846320"/>
+          </a:xfrm>
+          <a:prstGeom prst="roundRect">
+            <a:avLst/>
+          </a:prstGeom>
+          <a:solidFill>
+            <a:srgbClr val="FFFFFF"/>
+          </a:solidFill>
+          <a:ln>
+            <a:solidFill>
+              <a:srgbClr val="E2E8F0"/>
+            </a:solidFill>
+          </a:ln>
+        </p:spPr>
+        <p:style>
+          <a:lnRef idx="1">
+            <a:schemeClr val="accent1"/>
+          </a:lnRef>
+          <a:fillRef idx="3">
+            <a:schemeClr val="accent1"/>
+          </a:fillRef>
+          <a:effectRef idx="2">
+            <a:schemeClr val="accent1"/>
+          </a:effectRef>
+          <a:fontRef idx="minor">
+            <a:schemeClr val="lt1"/>
+          </a:fontRef>
+        </p:style>
+        <p:txBody>
+          <a:bodyPr rtlCol="0" anchor="ctr"/>
+          <a:lstStyle/>
+          <a:p>
+            <a:pPr algn="ctr"/>
+          </a:p>
+        </p:txBody>
+      </p:sp>
+      <p:sp>
+        <p:nvSpPr>
+          <p:cNvPr id="13" name="Rectangle 12"/>
+          <p:cNvSpPr/>
+          <p:nvPr/>
+        </p:nvSpPr>
+        <p:spPr>
+          <a:xfrm>
+            <a:off x="6126480" y="1371600"/>
+            <a:ext cx="2606040" cy="109728"/>
+          </a:xfrm>
+          <a:prstGeom prst="rect">
+            <a:avLst/>
+          </a:prstGeom>
+          <a:solidFill>
+            <a:srgbClr val="0B2545"/>
+          </a:solidFill>
+          <a:ln>
+            <a:noFill/>
+          </a:ln>
+        </p:spPr>
+        <p:style>
+          <a:lnRef idx="1">
+            <a:schemeClr val="accent1"/>
+          </a:lnRef>
+          <a:fillRef idx="3">
+            <a:schemeClr val="accent1"/>
+          </a:fillRef>
+          <a:effectRef idx="2">
+            <a:schemeClr val="accent1"/>
+          </a:effectRef>
+          <a:fontRef idx="minor">
+            <a:schemeClr val="lt1"/>
+          </a:fontRef>
+        </p:style>
+        <p:txBody>
+          <a:bodyPr rtlCol="0" anchor="ctr"/>
+          <a:lstStyle/>
+          <a:p>
+            <a:pPr algn="ctr"/>
+          </a:p>
+        </p:txBody>
+      </p:sp>
+      <p:sp>
+        <p:nvSpPr>
+          <p:cNvPr id="14" name="TextBox 13"/>
+          <p:cNvSpPr txBox="1"/>
+          <p:nvPr/>
+        </p:nvSpPr>
+        <p:spPr>
+          <a:xfrm>
+            <a:off x="6263640" y="1554480"/>
+            <a:ext cx="2331720" cy="4389120"/>
+          </a:xfrm>
+          <a:prstGeom prst="rect">
+            <a:avLst/>
+          </a:prstGeom>
+          <a:noFill/>
+        </p:spPr>
+        <p:txBody>
+          <a:bodyPr wrap="square">
+            <a:spAutoFit/>
+          </a:bodyPr>
+          <a:lstStyle/>
+          <a:p>
+            <a:pPr>
+              <a:defRPr sz="1300" b="1">
+                <a:solidFill>
+                  <a:srgbClr val="0B2545"/>
+                </a:solidFill>
+              </a:defRPr>
+            </a:pPr>
+            <a:r>
+              <a:t>Monthly Horizon</a:t>
+            </a:r>
+          </a:p>
+          <a:p>
+            <a:pPr>
+              <a:spcAft>
+                <a:spcPts val="1000"/>
+              </a:spcAft>
+              <a:defRPr sz="900">
+                <a:solidFill>
+                  <a:srgbClr val="0B2545"/>
+                </a:solidFill>
+              </a:defRPr>
+            </a:pPr>
+            <a:r>
+              <a:t>Academic Register</a:t>
+            </a:r>
+          </a:p>
+          <a:p>
+            <a:pPr>
               <a:defRPr sz="1000">
                 <a:solidFill>
                   <a:srgbClr val="1E293B"/>
@@ -6697,14 +10718,149 @@
               </a:defRPr>
             </a:pPr>
             <a:r>
-              <a:t>• Complete ECZ Subject Breakdown: Itemized marks across all 10 to 12 subjects with personalized teacher remarks and conduct ratings.</a:t>
-            </a:r>
-          </a:p>
-          <a:p>
-            <a:pPr>
-              <a:spcAft>
-                <a:spcPts val="600"/>
-              </a:spcAft>
+              <a:t>31-Day statutory sheet matching Ministry of Education classroom registers for all 12 calendar months.</a:t>
+            </a:r>
+          </a:p>
+        </p:txBody>
+      </p:sp>
+      <p:sp>
+        <p:nvSpPr>
+          <p:cNvPr id="15" name="Rounded Rectangle 14"/>
+          <p:cNvSpPr/>
+          <p:nvPr/>
+        </p:nvSpPr>
+        <p:spPr>
+          <a:xfrm>
+            <a:off x="8823960" y="1371600"/>
+            <a:ext cx="2606040" cy="4846320"/>
+          </a:xfrm>
+          <a:prstGeom prst="roundRect">
+            <a:avLst/>
+          </a:prstGeom>
+          <a:solidFill>
+            <a:srgbClr val="FFFFFF"/>
+          </a:solidFill>
+          <a:ln>
+            <a:solidFill>
+              <a:srgbClr val="E2E8F0"/>
+            </a:solidFill>
+          </a:ln>
+        </p:spPr>
+        <p:style>
+          <a:lnRef idx="1">
+            <a:schemeClr val="accent1"/>
+          </a:lnRef>
+          <a:fillRef idx="3">
+            <a:schemeClr val="accent1"/>
+          </a:fillRef>
+          <a:effectRef idx="2">
+            <a:schemeClr val="accent1"/>
+          </a:effectRef>
+          <a:fontRef idx="minor">
+            <a:schemeClr val="lt1"/>
+          </a:fontRef>
+        </p:style>
+        <p:txBody>
+          <a:bodyPr rtlCol="0" anchor="ctr"/>
+          <a:lstStyle/>
+          <a:p>
+            <a:pPr algn="ctr"/>
+          </a:p>
+        </p:txBody>
+      </p:sp>
+      <p:sp>
+        <p:nvSpPr>
+          <p:cNvPr id="16" name="Rectangle 15"/>
+          <p:cNvSpPr/>
+          <p:nvPr/>
+        </p:nvSpPr>
+        <p:spPr>
+          <a:xfrm>
+            <a:off x="8823960" y="1371600"/>
+            <a:ext cx="2606040" cy="109728"/>
+          </a:xfrm>
+          <a:prstGeom prst="rect">
+            <a:avLst/>
+          </a:prstGeom>
+          <a:solidFill>
+            <a:srgbClr val="D4AF37"/>
+          </a:solidFill>
+          <a:ln>
+            <a:noFill/>
+          </a:ln>
+        </p:spPr>
+        <p:style>
+          <a:lnRef idx="1">
+            <a:schemeClr val="accent1"/>
+          </a:lnRef>
+          <a:fillRef idx="3">
+            <a:schemeClr val="accent1"/>
+          </a:fillRef>
+          <a:effectRef idx="2">
+            <a:schemeClr val="accent1"/>
+          </a:effectRef>
+          <a:fontRef idx="minor">
+            <a:schemeClr val="lt1"/>
+          </a:fontRef>
+        </p:style>
+        <p:txBody>
+          <a:bodyPr rtlCol="0" anchor="ctr"/>
+          <a:lstStyle/>
+          <a:p>
+            <a:pPr algn="ctr"/>
+          </a:p>
+        </p:txBody>
+      </p:sp>
+      <p:sp>
+        <p:nvSpPr>
+          <p:cNvPr id="17" name="TextBox 16"/>
+          <p:cNvSpPr txBox="1"/>
+          <p:nvPr/>
+        </p:nvSpPr>
+        <p:spPr>
+          <a:xfrm>
+            <a:off x="8961120" y="1554480"/>
+            <a:ext cx="2331720" cy="4389120"/>
+          </a:xfrm>
+          <a:prstGeom prst="rect">
+            <a:avLst/>
+          </a:prstGeom>
+          <a:noFill/>
+        </p:spPr>
+        <p:txBody>
+          <a:bodyPr wrap="square">
+            <a:spAutoFit/>
+          </a:bodyPr>
+          <a:lstStyle/>
+          <a:p>
+            <a:pPr>
+              <a:defRPr sz="1300" b="1">
+                <a:solidFill>
+                  <a:srgbClr val="0B2545"/>
+                </a:solidFill>
+              </a:defRPr>
+            </a:pPr>
+            <a:r>
+              <a:t>Termly &amp; Annual</a:t>
+            </a:r>
+          </a:p>
+          <a:p>
+            <a:pPr>
+              <a:spcAft>
+                <a:spcPts val="1000"/>
+              </a:spcAft>
+              <a:defRPr sz="900">
+                <a:solidFill>
+                  <a:srgbClr val="D4AF37"/>
+                </a:solidFill>
+              </a:defRPr>
+            </a:pPr>
+            <a:r>
+              <a:t>Statutory Return &amp; ECZ</a:t>
+            </a:r>
+          </a:p>
+          <a:p>
+            <a:pPr>
               <a:defRPr sz="1000">
                 <a:solidFill>
                   <a:srgbClr val="1E293B"/>
@@ -6712,50 +10868,11 @@
               </a:defRPr>
             </a:pPr>
             <a:r>
-              <a:t>• Instant Mobile Money Settlement: Direct push-prompt fee payment via Airtel Money and MTN MoMo with instant receipt generation.</a:t>
-            </a:r>
-          </a:p>
-          <a:p>
-            <a:pPr>
-              <a:spcAft>
-                <a:spcPts val="600"/>
-              </a:spcAft>
-              <a:defRPr sz="1000">
-                <a:solidFill>
-                  <a:srgbClr val="1E293B"/>
-                </a:solidFill>
-              </a:defRPr>
-            </a:pPr>
-            <a:r>
-              <a:t>• Official Printable Report Cards: Parents can download and print official Ministry-formatted report cards with digital school stamps and signatures.</a:t>
-            </a:r>
-          </a:p>
-        </p:txBody>
-      </p:sp>
-      <p:pic>
-        <p:nvPicPr>
-          <p:cNvPr id="7" name="Picture 6" descr="Screenshot 2026-10-18 102357.png"/>
-          <p:cNvPicPr>
-            <a:picLocks noChangeAspect="1"/>
-          </p:cNvPicPr>
-          <p:nvPr/>
-        </p:nvPicPr>
-        <p:blipFill>
-          <a:blip r:embed="rId2"/>
-          <a:stretch>
-            <a:fillRect/>
-          </a:stretch>
-        </p:blipFill>
-        <p:spPr>
-          <a:xfrm>
-            <a:off x="5212080" y="1371600"/>
-            <a:ext cx="6217920" cy="3899741"/>
-          </a:xfrm>
-          <a:prstGeom prst="rect">
-            <a:avLst/>
-          </a:prstGeom>
-        </p:spPr>
-      </p:pic>
+              <a:t>Aggregates 187 annual instructional days. Computes official DEBS statistical returns and student progression standing.</a:t>
+            </a:r>
+          </a:p>
+        </p:txBody>
+      </p:sp>
     </p:spTree>
   </p:cSld>
   <p:clrMapOvr>
@@ -6925,21 +11042,109 @@
               </a:defRPr>
             </a:pPr>
             <a:r>
-              <a:t>Boarding Village &amp; Student 360° Safeguarding Dossiers</a:t>
-            </a:r>
-          </a:p>
-        </p:txBody>
-      </p:sp>
-      <p:sp>
-        <p:nvSpPr>
-          <p:cNvPr id="6" name="TextBox 5"/>
+              <a:t>Official Document Generator: Letters, Badges &amp; Verification</a:t>
+            </a:r>
+          </a:p>
+        </p:txBody>
+      </p:sp>
+      <p:sp>
+        <p:nvSpPr>
+          <p:cNvPr id="6" name="Rounded Rectangle 5"/>
+          <p:cNvSpPr/>
+          <p:nvPr/>
+        </p:nvSpPr>
+        <p:spPr>
+          <a:xfrm>
+            <a:off x="731520" y="1280160"/>
+            <a:ext cx="5212080" cy="5029200"/>
+          </a:xfrm>
+          <a:prstGeom prst="roundRect">
+            <a:avLst/>
+          </a:prstGeom>
+          <a:solidFill>
+            <a:srgbClr val="FFFFFF"/>
+          </a:solidFill>
+          <a:ln w="12700">
+            <a:solidFill>
+              <a:srgbClr val="E2E8F0"/>
+            </a:solidFill>
+          </a:ln>
+        </p:spPr>
+        <p:style>
+          <a:lnRef idx="1">
+            <a:schemeClr val="accent1"/>
+          </a:lnRef>
+          <a:fillRef idx="3">
+            <a:schemeClr val="accent1"/>
+          </a:fillRef>
+          <a:effectRef idx="2">
+            <a:schemeClr val="accent1"/>
+          </a:effectRef>
+          <a:fontRef idx="minor">
+            <a:schemeClr val="lt1"/>
+          </a:fontRef>
+        </p:style>
+        <p:txBody>
+          <a:bodyPr rtlCol="0" anchor="ctr"/>
+          <a:lstStyle/>
+          <a:p>
+            <a:pPr algn="ctr"/>
+          </a:p>
+        </p:txBody>
+      </p:sp>
+      <p:sp>
+        <p:nvSpPr>
+          <p:cNvPr id="7" name="Rectangle 6"/>
+          <p:cNvSpPr/>
+          <p:nvPr/>
+        </p:nvSpPr>
+        <p:spPr>
+          <a:xfrm>
+            <a:off x="731520" y="1280160"/>
+            <a:ext cx="5212080" cy="73152"/>
+          </a:xfrm>
+          <a:prstGeom prst="rect">
+            <a:avLst/>
+          </a:prstGeom>
+          <a:solidFill>
+            <a:srgbClr val="0B2545"/>
+          </a:solidFill>
+          <a:ln>
+            <a:noFill/>
+          </a:ln>
+        </p:spPr>
+        <p:style>
+          <a:lnRef idx="1">
+            <a:schemeClr val="accent1"/>
+          </a:lnRef>
+          <a:fillRef idx="3">
+            <a:schemeClr val="accent1"/>
+          </a:fillRef>
+          <a:effectRef idx="2">
+            <a:schemeClr val="accent1"/>
+          </a:effectRef>
+          <a:fontRef idx="minor">
+            <a:schemeClr val="lt1"/>
+          </a:fontRef>
+        </p:style>
+        <p:txBody>
+          <a:bodyPr rtlCol="0" anchor="ctr"/>
+          <a:lstStyle/>
+          <a:p>
+            <a:pPr algn="ctr"/>
+          </a:p>
+        </p:txBody>
+      </p:sp>
+      <p:sp>
+        <p:nvSpPr>
+          <p:cNvPr id="8" name="TextBox 7"/>
           <p:cNvSpPr txBox="1"/>
           <p:nvPr/>
         </p:nvSpPr>
         <p:spPr>
           <a:xfrm>
-            <a:off x="731520" y="1280160"/>
-            <a:ext cx="4297680" cy="5120640"/>
+            <a:off x="868680" y="1389888"/>
+            <a:ext cx="4937760" cy="4800600"/>
           </a:xfrm>
           <a:prstGeom prst="rect">
             <a:avLst/>
@@ -6954,16 +11159,232 @@
           <a:p>
             <a:pPr>
               <a:spcAft>
+                <a:spcPts val="200"/>
+              </a:spcAft>
+              <a:defRPr sz="1200" b="1">
+                <a:solidFill>
+                  <a:srgbClr val="0B2545"/>
+                </a:solidFill>
+              </a:defRPr>
+            </a:pPr>
+            <a:r>
+              <a:t>Suite of Standardized Institutional Letters</a:t>
+            </a:r>
+          </a:p>
+          <a:p>
+            <a:pPr>
+              <a:spcAft>
                 <a:spcPts val="600"/>
               </a:spcAft>
-              <a:defRPr sz="1300" b="1">
+              <a:defRPr sz="850">
+                <a:solidFill>
+                  <a:srgbClr val="64748B"/>
+                </a:solidFill>
+              </a:defRPr>
+            </a:pPr>
+            <a:r>
+              <a:t>Institutional Integrity • Standardized Branding</a:t>
+            </a:r>
+          </a:p>
+          <a:p>
+            <a:pPr>
+              <a:spcAft>
+                <a:spcPts val="400"/>
+              </a:spcAft>
+              <a:defRPr sz="950">
+                <a:solidFill>
+                  <a:srgbClr val="1E293B"/>
+                </a:solidFill>
+              </a:defRPr>
+            </a:pPr>
+            <a:r>
+              <a:t>• Provisional Admission Offer Letter: Formally communicates placement terms, requirements, and fee deadlines.</a:t>
+            </a:r>
+          </a:p>
+          <a:p>
+            <a:pPr>
+              <a:spcAft>
+                <a:spcPts val="400"/>
+              </a:spcAft>
+              <a:defRPr sz="950">
+                <a:solidFill>
+                  <a:srgbClr val="1E293B"/>
+                </a:solidFill>
+              </a:defRPr>
+            </a:pPr>
+            <a:r>
+              <a:t>• Official Acceptance Letter: Confirms verified enrolment for the academic year.</a:t>
+            </a:r>
+          </a:p>
+          <a:p>
+            <a:pPr>
+              <a:spcAft>
+                <a:spcPts val="400"/>
+              </a:spcAft>
+              <a:defRPr sz="950">
+                <a:solidFill>
+                  <a:srgbClr val="1E293B"/>
+                </a:solidFill>
+              </a:defRPr>
+            </a:pPr>
+            <a:r>
+              <a:t>• Introduction &amp; Visa Letters: Standardized correspondence for Ministry, immigration, and commercial bank sponsorship.</a:t>
+            </a:r>
+          </a:p>
+          <a:p>
+            <a:pPr>
+              <a:spcAft>
+                <a:spcPts val="400"/>
+              </a:spcAft>
+              <a:defRPr sz="950">
+                <a:solidFill>
+                  <a:srgbClr val="1E293B"/>
+                </a:solidFill>
+              </a:defRPr>
+            </a:pPr>
+            <a:r>
+              <a:t>• ECZ Examination Clearance: Formal certificate confirming student has met academic and financial benchmarks.</a:t>
+            </a:r>
+          </a:p>
+          <a:p>
+            <a:pPr>
+              <a:spcAft>
+                <a:spcPts val="400"/>
+              </a:spcAft>
+              <a:defRPr sz="950">
+                <a:solidFill>
+                  <a:srgbClr val="1E293B"/>
+                </a:solidFill>
+              </a:defRPr>
+            </a:pPr>
+            <a:r>
+              <a:t>• Boarding House Accommodation Notice: Confirms dormitory room, cubicle, and assigned housemaster.</a:t>
+            </a:r>
+          </a:p>
+        </p:txBody>
+      </p:sp>
+      <p:sp>
+        <p:nvSpPr>
+          <p:cNvPr id="9" name="Rounded Rectangle 8"/>
+          <p:cNvSpPr/>
+          <p:nvPr/>
+        </p:nvSpPr>
+        <p:spPr>
+          <a:xfrm>
+            <a:off x="6217920" y="1280160"/>
+            <a:ext cx="5212080" cy="5029200"/>
+          </a:xfrm>
+          <a:prstGeom prst="roundRect">
+            <a:avLst/>
+          </a:prstGeom>
+          <a:solidFill>
+            <a:srgbClr val="FFFFFF"/>
+          </a:solidFill>
+          <a:ln w="12700">
+            <a:solidFill>
+              <a:srgbClr val="E2E8F0"/>
+            </a:solidFill>
+          </a:ln>
+        </p:spPr>
+        <p:style>
+          <a:lnRef idx="1">
+            <a:schemeClr val="accent1"/>
+          </a:lnRef>
+          <a:fillRef idx="3">
+            <a:schemeClr val="accent1"/>
+          </a:fillRef>
+          <a:effectRef idx="2">
+            <a:schemeClr val="accent1"/>
+          </a:effectRef>
+          <a:fontRef idx="minor">
+            <a:schemeClr val="lt1"/>
+          </a:fontRef>
+        </p:style>
+        <p:txBody>
+          <a:bodyPr rtlCol="0" anchor="ctr"/>
+          <a:lstStyle/>
+          <a:p>
+            <a:pPr algn="ctr"/>
+          </a:p>
+        </p:txBody>
+      </p:sp>
+      <p:sp>
+        <p:nvSpPr>
+          <p:cNvPr id="10" name="Rectangle 9"/>
+          <p:cNvSpPr/>
+          <p:nvPr/>
+        </p:nvSpPr>
+        <p:spPr>
+          <a:xfrm>
+            <a:off x="6217920" y="1280160"/>
+            <a:ext cx="5212080" cy="73152"/>
+          </a:xfrm>
+          <a:prstGeom prst="rect">
+            <a:avLst/>
+          </a:prstGeom>
+          <a:solidFill>
+            <a:srgbClr val="D4AF37"/>
+          </a:solidFill>
+          <a:ln>
+            <a:noFill/>
+          </a:ln>
+        </p:spPr>
+        <p:style>
+          <a:lnRef idx="1">
+            <a:schemeClr val="accent1"/>
+          </a:lnRef>
+          <a:fillRef idx="3">
+            <a:schemeClr val="accent1"/>
+          </a:fillRef>
+          <a:effectRef idx="2">
+            <a:schemeClr val="accent1"/>
+          </a:effectRef>
+          <a:fontRef idx="minor">
+            <a:schemeClr val="lt1"/>
+          </a:fontRef>
+        </p:style>
+        <p:txBody>
+          <a:bodyPr rtlCol="0" anchor="ctr"/>
+          <a:lstStyle/>
+          <a:p>
+            <a:pPr algn="ctr"/>
+          </a:p>
+        </p:txBody>
+      </p:sp>
+      <p:sp>
+        <p:nvSpPr>
+          <p:cNvPr id="11" name="TextBox 10"/>
+          <p:cNvSpPr txBox="1"/>
+          <p:nvPr/>
+        </p:nvSpPr>
+        <p:spPr>
+          <a:xfrm>
+            <a:off x="6355080" y="1389888"/>
+            <a:ext cx="4937760" cy="4800600"/>
+          </a:xfrm>
+          <a:prstGeom prst="rect">
+            <a:avLst/>
+          </a:prstGeom>
+          <a:noFill/>
+        </p:spPr>
+        <p:txBody>
+          <a:bodyPr wrap="square">
+            <a:spAutoFit/>
+          </a:bodyPr>
+          <a:lstStyle/>
+          <a:p>
+            <a:pPr>
+              <a:spcAft>
+                <a:spcPts val="200"/>
+              </a:spcAft>
+              <a:defRPr sz="1200" b="1">
                 <a:solidFill>
                   <a:srgbClr val="0B2545"/>
                 </a:solidFill>
               </a:defRPr>
             </a:pPr>
             <a:r>
-              <a:t>Holistic Pastoral Care &amp; Resident Welfare</a:t>
+              <a:t>Security Features &amp; Verification Architecture</a:t>
             </a:r>
           </a:p>
           <a:p>
@@ -6971,102 +11392,78 @@
               <a:spcAft>
                 <a:spcPts val="600"/>
               </a:spcAft>
-              <a:defRPr sz="1000">
+              <a:defRPr sz="850">
+                <a:solidFill>
+                  <a:srgbClr val="64748B"/>
+                </a:solidFill>
+              </a:defRPr>
+            </a:pPr>
+            <a:r>
+              <a:t>Anti-Fraud Safeguards • Digital QR Verification</a:t>
+            </a:r>
+          </a:p>
+          <a:p>
+            <a:pPr>
+              <a:spcAft>
+                <a:spcPts val="400"/>
+              </a:spcAft>
+              <a:defRPr sz="950">
                 <a:solidFill>
                   <a:srgbClr val="1E293B"/>
                 </a:solidFill>
               </a:defRPr>
             </a:pPr>
             <a:r>
-              <a:t>• Accommodation Tracking: Real-time bed, wing, and dorm assignments for 315 boarders across Kansanshi Boys and Kalumbila Girls Halls.</a:t>
-            </a:r>
-          </a:p>
-          <a:p>
-            <a:pPr>
-              <a:spcAft>
-                <a:spcPts val="600"/>
-              </a:spcAft>
-              <a:defRPr sz="1000">
+              <a:t>• High-Definition Legacy Crest: Crisp, authentic school emblem rendering on all official printouts.</a:t>
+            </a:r>
+          </a:p>
+          <a:p>
+            <a:pPr>
+              <a:spcAft>
+                <a:spcPts val="400"/>
+              </a:spcAft>
+              <a:defRPr sz="950">
                 <a:solidFill>
                   <a:srgbClr val="1E293B"/>
                 </a:solidFill>
               </a:defRPr>
             </a:pPr>
             <a:r>
-              <a:t>• Multi-Year Residential History: Preserves records of dorm rooms, bed numbers, locker codes, and inspection ratings from Form 1 to Form 5.</a:t>
-            </a:r>
-          </a:p>
-          <a:p>
-            <a:pPr>
-              <a:spcAft>
-                <a:spcPts val="600"/>
-              </a:spcAft>
-              <a:defRPr sz="1000">
+              <a:t>• Dynamic Verification QR Code: Instantly verifiable by scanning with any smartphone camera.</a:t>
+            </a:r>
+          </a:p>
+          <a:p>
+            <a:pPr>
+              <a:spcAft>
+                <a:spcPts val="400"/>
+              </a:spcAft>
+              <a:defRPr sz="950">
                 <a:solidFill>
                   <a:srgbClr val="1E293B"/>
                 </a:solidFill>
               </a:defRPr>
             </a:pPr>
             <a:r>
-              <a:t>• Digital Exeat Pass Workflow: Automated approval trail for weekend exeats, medical clinic visits, and sports travel with SMS verification.</a:t>
-            </a:r>
-          </a:p>
-          <a:p>
-            <a:pPr>
-              <a:spcAft>
-                <a:spcPts val="600"/>
-              </a:spcAft>
-              <a:defRPr sz="1000">
+              <a:t>• Authorized Signatory Metadata: Pre-configured signatures of Director Mr. Emmanuel Mwansa and Registrar.</a:t>
+            </a:r>
+          </a:p>
+          <a:p>
+            <a:pPr>
+              <a:spcAft>
+                <a:spcPts val="400"/>
+              </a:spcAft>
+              <a:defRPr sz="950">
                 <a:solidFill>
                   <a:srgbClr val="1E293B"/>
                 </a:solidFill>
               </a:defRPr>
             </a:pPr>
             <a:r>
-              <a:t>• 24/7 Sickbay Health Records: Resident nurse incident logging, chronic condition medication monitoring, and emergency doctor referrals.</a:t>
-            </a:r>
-          </a:p>
-          <a:p>
-            <a:pPr>
-              <a:spcAft>
-                <a:spcPts val="600"/>
-              </a:spcAft>
-              <a:defRPr sz="1000">
-                <a:solidFill>
-                  <a:srgbClr val="1E293B"/>
-                </a:solidFill>
-              </a:defRPr>
-            </a:pPr>
-            <a:r>
-              <a:t>• Day Scholar Terminal Management: Separate locker and transit marshaling for day pupils, with one-click conversion to boarding status.</a:t>
-            </a:r>
-          </a:p>
-        </p:txBody>
-      </p:sp>
-      <p:pic>
-        <p:nvPicPr>
-          <p:cNvPr id="7" name="Picture 6" descr="Screenshot 2026-10-18 100114.png"/>
-          <p:cNvPicPr>
-            <a:picLocks noChangeAspect="1"/>
-          </p:cNvPicPr>
-          <p:nvPr/>
-        </p:nvPicPr>
-        <p:blipFill>
-          <a:blip r:embed="rId2"/>
-          <a:stretch>
-            <a:fillRect/>
-          </a:stretch>
-        </p:blipFill>
-        <p:spPr>
-          <a:xfrm>
-            <a:off x="5212080" y="1371600"/>
-            <a:ext cx="6217920" cy="4670493"/>
-          </a:xfrm>
-          <a:prstGeom prst="rect">
-            <a:avLst/>
-          </a:prstGeom>
-        </p:spPr>
-      </p:pic>
+              <a:t>• Tamper-Evident Security Stamp: Includes official school registration numbers (MOE/NWP/SOL/SEC/2026/044).</a:t>
+            </a:r>
+          </a:p>
+        </p:txBody>
+      </p:sp>
     </p:spTree>
   </p:cSld>
   <p:clrMapOvr>
@@ -7236,627 +11633,109 @@
               </a:defRPr>
             </a:pPr>
             <a:r>
-              <a:t>Commercial Investment Breakdown: Turnkey Software, IoT Hardware &amp; Support</a:t>
-            </a:r>
-          </a:p>
-        </p:txBody>
-      </p:sp>
-      <p:graphicFrame>
-        <p:nvGraphicFramePr>
-          <p:cNvPr id="6" name="Table 5"/>
-          <p:cNvGraphicFramePr>
-            <a:graphicFrameLocks noGrp="1"/>
-          </p:cNvGraphicFramePr>
-          <p:nvPr/>
-        </p:nvGraphicFramePr>
-        <p:xfrm>
-          <a:off x="731520" y="1371600"/>
-          <a:ext cx="10728655" cy="3931920"/>
-        </p:xfrm>
-        <a:graphic>
-          <a:graphicData uri="http://schemas.openxmlformats.org/drawingml/2006/table">
-            <a:tbl>
-              <a:tblPr firstRow="1" bandRow="1">
-                <a:tableStyleId>{5C22544A-7EE6-4342-B048-85BDC9FD1C3A}</a:tableStyleId>
-              </a:tblPr>
-              <a:tblGrid>
-                <a:gridCol w="3840480"/>
-                <a:gridCol w="3657600"/>
-                <a:gridCol w="1645920"/>
-                <a:gridCol w="1584655"/>
-              </a:tblGrid>
-              <a:tr h="561702">
-                <a:tc>
-                  <a:txBody>
-                    <a:bodyPr/>
-                    <a:lstStyle/>
-                    <a:p>
-                      <a:pPr>
-                        <a:defRPr sz="1000" b="1">
-                          <a:solidFill>
-                            <a:srgbClr val="D4AF37"/>
-                          </a:solidFill>
-                        </a:defRPr>
-                      </a:pPr>
-                      <a:r>
-                        <a:t>Investment Component / Deliverable</a:t>
-                      </a:r>
-                    </a:p>
-                  </a:txBody>
-                  <a:tcPr>
-                    <a:solidFill>
-                      <a:srgbClr val="0B2545"/>
-                    </a:solidFill>
-                  </a:tcPr>
-                </a:tc>
-                <a:tc>
-                  <a:txBody>
-                    <a:bodyPr/>
-                    <a:lstStyle/>
-                    <a:p>
-                      <a:pPr>
-                        <a:defRPr sz="1000" b="1">
-                          <a:solidFill>
-                            <a:srgbClr val="D4AF37"/>
-                          </a:solidFill>
-                        </a:defRPr>
-                      </a:pPr>
-                      <a:r>
-                        <a:t>Scope of Coverage &amp; Specifications</a:t>
-                      </a:r>
-                    </a:p>
-                  </a:txBody>
-                  <a:tcPr>
-                    <a:solidFill>
-                      <a:srgbClr val="0B2545"/>
-                    </a:solidFill>
-                  </a:tcPr>
-                </a:tc>
-                <a:tc>
-                  <a:txBody>
-                    <a:bodyPr/>
-                    <a:lstStyle/>
-                    <a:p>
-                      <a:pPr>
-                        <a:defRPr sz="1000" b="1">
-                          <a:solidFill>
-                            <a:srgbClr val="D4AF37"/>
-                          </a:solidFill>
-                        </a:defRPr>
-                      </a:pPr>
-                      <a:r>
-                        <a:t>Year 1 (ZMW)</a:t>
-                      </a:r>
-                    </a:p>
-                  </a:txBody>
-                  <a:tcPr>
-                    <a:solidFill>
-                      <a:srgbClr val="0B2545"/>
-                    </a:solidFill>
-                  </a:tcPr>
-                </a:tc>
-                <a:tc>
-                  <a:txBody>
-                    <a:bodyPr/>
-                    <a:lstStyle/>
-                    <a:p>
-                      <a:pPr>
-                        <a:defRPr sz="1000" b="1">
-                          <a:solidFill>
-                            <a:srgbClr val="D4AF37"/>
-                          </a:solidFill>
-                        </a:defRPr>
-                      </a:pPr>
-                      <a:r>
-                        <a:t>USD Equiv.</a:t>
-                      </a:r>
-                    </a:p>
-                  </a:txBody>
-                  <a:tcPr>
-                    <a:solidFill>
-                      <a:srgbClr val="0B2545"/>
-                    </a:solidFill>
-                  </a:tcPr>
-                </a:tc>
-              </a:tr>
-              <a:tr h="561702">
-                <a:tc>
-                  <a:txBody>
-                    <a:bodyPr/>
-                    <a:lstStyle/>
-                    <a:p>
-                      <a:pPr>
-                        <a:defRPr sz="1000" b="0">
-                          <a:solidFill>
-                            <a:srgbClr val="1E293B"/>
-                          </a:solidFill>
-                        </a:defRPr>
-                      </a:pPr>
-                      <a:r>
-                        <a:t>EduSphere Sovereign Enterprise Platform Core</a:t>
-                      </a:r>
-                    </a:p>
-                  </a:txBody>
-                  <a:tcPr/>
-                </a:tc>
-                <a:tc>
-                  <a:txBody>
-                    <a:bodyPr/>
-                    <a:lstStyle/>
-                    <a:p>
-                      <a:pPr>
-                        <a:defRPr sz="1000" b="0">
-                          <a:solidFill>
-                            <a:srgbClr val="1E293B"/>
-                          </a:solidFill>
-                        </a:defRPr>
-                      </a:pPr>
-                      <a:r>
-                        <a:t>Multi-Campus License, Finance, SIS, Academics, GIS &amp; Parent Portal (Unlimited Admin &amp; Teacher Users)</a:t>
-                      </a:r>
-                    </a:p>
-                  </a:txBody>
-                  <a:tcPr/>
-                </a:tc>
-                <a:tc>
-                  <a:txBody>
-                    <a:bodyPr/>
-                    <a:lstStyle/>
-                    <a:p>
-                      <a:pPr>
-                        <a:defRPr sz="1000" b="0">
-                          <a:solidFill>
-                            <a:srgbClr val="1E293B"/>
-                          </a:solidFill>
-                        </a:defRPr>
-                      </a:pPr>
-                      <a:r>
-                        <a:t>K 65,000</a:t>
-                      </a:r>
-                    </a:p>
-                  </a:txBody>
-                  <a:tcPr/>
-                </a:tc>
-                <a:tc>
-                  <a:txBody>
-                    <a:bodyPr/>
-                    <a:lstStyle/>
-                    <a:p>
-                      <a:pPr>
-                        <a:defRPr sz="1000" b="0">
-                          <a:solidFill>
-                            <a:srgbClr val="1E293B"/>
-                          </a:solidFill>
-                        </a:defRPr>
-                      </a:pPr>
-                      <a:r>
-                        <a:t>$ 2,500</a:t>
-                      </a:r>
-                    </a:p>
-                  </a:txBody>
-                  <a:tcPr/>
-                </a:tc>
-              </a:tr>
-              <a:tr h="561702">
-                <a:tc>
-                  <a:txBody>
-                    <a:bodyPr/>
-                    <a:lstStyle/>
-                    <a:p>
-                      <a:pPr>
-                        <a:defRPr sz="1000" b="0">
-                          <a:solidFill>
-                            <a:srgbClr val="1E293B"/>
-                          </a:solidFill>
-                        </a:defRPr>
-                      </a:pPr>
-                      <a:r>
-                        <a:t>Implementation, Historical Seeding &amp; Setup</a:t>
-                      </a:r>
-                    </a:p>
-                  </a:txBody>
-                  <a:tcPr/>
-                </a:tc>
-                <a:tc>
-                  <a:txBody>
-                    <a:bodyPr/>
-                    <a:lstStyle/>
-                    <a:p>
-                      <a:pPr>
-                        <a:defRPr sz="1000" b="0">
-                          <a:solidFill>
-                            <a:srgbClr val="1E293B"/>
-                          </a:solidFill>
-                        </a:defRPr>
-                      </a:pPr>
-                      <a:r>
-                        <a:t>Data migration of 780 students, 48 staff profiles, database configuration, and backup server setup</a:t>
-                      </a:r>
-                    </a:p>
-                  </a:txBody>
-                  <a:tcPr/>
-                </a:tc>
-                <a:tc>
-                  <a:txBody>
-                    <a:bodyPr/>
-                    <a:lstStyle/>
-                    <a:p>
-                      <a:pPr>
-                        <a:defRPr sz="1000" b="0">
-                          <a:solidFill>
-                            <a:srgbClr val="1E293B"/>
-                          </a:solidFill>
-                        </a:defRPr>
-                      </a:pPr>
-                      <a:r>
-                        <a:t>K 28,000</a:t>
-                      </a:r>
-                    </a:p>
-                  </a:txBody>
-                  <a:tcPr/>
-                </a:tc>
-                <a:tc>
-                  <a:txBody>
-                    <a:bodyPr/>
-                    <a:lstStyle/>
-                    <a:p>
-                      <a:pPr>
-                        <a:defRPr sz="1000" b="0">
-                          <a:solidFill>
-                            <a:srgbClr val="1E293B"/>
-                          </a:solidFill>
-                        </a:defRPr>
-                      </a:pPr>
-                      <a:r>
-                        <a:t>$ 1,075</a:t>
-                      </a:r>
-                    </a:p>
-                  </a:txBody>
-                  <a:tcPr/>
-                </a:tc>
-              </a:tr>
-              <a:tr h="561702">
-                <a:tc>
-                  <a:txBody>
-                    <a:bodyPr/>
-                    <a:lstStyle/>
-                    <a:p>
-                      <a:pPr>
-                        <a:defRPr sz="1000" b="0">
-                          <a:solidFill>
-                            <a:srgbClr val="1E293B"/>
-                          </a:solidFill>
-                        </a:defRPr>
-                      </a:pPr>
-                      <a:r>
-                        <a:t>Smart Bus Hardware (2 In-Vehicle Telematics Tablets)</a:t>
-                      </a:r>
-                    </a:p>
-                  </a:txBody>
-                  <a:tcPr/>
-                </a:tc>
-                <a:tc>
-                  <a:txBody>
-                    <a:bodyPr/>
-                    <a:lstStyle/>
-                    <a:p>
-                      <a:pPr>
-                        <a:defRPr sz="1000" b="0">
-                          <a:solidFill>
-                            <a:srgbClr val="1E293B"/>
-                          </a:solidFill>
-                        </a:defRPr>
-                      </a:pPr>
-                      <a:r>
-                        <a:t>2x Rugged 7-inch Android In-Bus Tablets, NFC RFID readers, GPS mounts, and 4G SIM integration</a:t>
-                      </a:r>
-                    </a:p>
-                  </a:txBody>
-                  <a:tcPr/>
-                </a:tc>
-                <a:tc>
-                  <a:txBody>
-                    <a:bodyPr/>
-                    <a:lstStyle/>
-                    <a:p>
-                      <a:pPr>
-                        <a:defRPr sz="1000" b="0">
-                          <a:solidFill>
-                            <a:srgbClr val="1E293B"/>
-                          </a:solidFill>
-                        </a:defRPr>
-                      </a:pPr>
-                      <a:r>
-                        <a:t>K 19,500</a:t>
-                      </a:r>
-                    </a:p>
-                  </a:txBody>
-                  <a:tcPr/>
-                </a:tc>
-                <a:tc>
-                  <a:txBody>
-                    <a:bodyPr/>
-                    <a:lstStyle/>
-                    <a:p>
-                      <a:pPr>
-                        <a:defRPr sz="1000" b="0">
-                          <a:solidFill>
-                            <a:srgbClr val="1E293B"/>
-                          </a:solidFill>
-                        </a:defRPr>
-                      </a:pPr>
-                      <a:r>
-                        <a:t>$ 750</a:t>
-                      </a:r>
-                    </a:p>
-                  </a:txBody>
-                  <a:tcPr/>
-                </a:tc>
-              </a:tr>
-              <a:tr h="561702">
-                <a:tc>
-                  <a:txBody>
-                    <a:bodyPr/>
-                    <a:lstStyle/>
-                    <a:p>
-                      <a:pPr>
-                        <a:defRPr sz="1000" b="0">
-                          <a:solidFill>
-                            <a:srgbClr val="1E293B"/>
-                          </a:solidFill>
-                        </a:defRPr>
-                      </a:pPr>
-                      <a:r>
-                        <a:t>Smart Student Contactless ID Cards (800 Cards)</a:t>
-                      </a:r>
-                    </a:p>
-                  </a:txBody>
-                  <a:tcPr/>
-                </a:tc>
-                <a:tc>
-                  <a:txBody>
-                    <a:bodyPr/>
-                    <a:lstStyle/>
-                    <a:p>
-                      <a:pPr>
-                        <a:defRPr sz="1000" b="0">
-                          <a:solidFill>
-                            <a:srgbClr val="1E293B"/>
-                          </a:solidFill>
-                        </a:defRPr>
-                      </a:pPr>
-                      <a:r>
-                        <a:t>800 Dual-Frequency MIFARE 13.56MHz + QR printed PVC student smart identification badges</a:t>
-                      </a:r>
-                    </a:p>
-                  </a:txBody>
-                  <a:tcPr/>
-                </a:tc>
-                <a:tc>
-                  <a:txBody>
-                    <a:bodyPr/>
-                    <a:lstStyle/>
-                    <a:p>
-                      <a:pPr>
-                        <a:defRPr sz="1000" b="0">
-                          <a:solidFill>
-                            <a:srgbClr val="1E293B"/>
-                          </a:solidFill>
-                        </a:defRPr>
-                      </a:pPr>
-                      <a:r>
-                        <a:t>K 16,000</a:t>
-                      </a:r>
-                    </a:p>
-                  </a:txBody>
-                  <a:tcPr/>
-                </a:tc>
-                <a:tc>
-                  <a:txBody>
-                    <a:bodyPr/>
-                    <a:lstStyle/>
-                    <a:p>
-                      <a:pPr>
-                        <a:defRPr sz="1000" b="0">
-                          <a:solidFill>
-                            <a:srgbClr val="1E293B"/>
-                          </a:solidFill>
-                        </a:defRPr>
-                      </a:pPr>
-                      <a:r>
-                        <a:t>$ 615</a:t>
-                      </a:r>
-                    </a:p>
-                  </a:txBody>
-                  <a:tcPr/>
-                </a:tc>
-              </a:tr>
-              <a:tr h="561702">
-                <a:tc>
-                  <a:txBody>
-                    <a:bodyPr/>
-                    <a:lstStyle/>
-                    <a:p>
-                      <a:pPr>
-                        <a:defRPr sz="1000" b="0">
-                          <a:solidFill>
-                            <a:srgbClr val="1E293B"/>
-                          </a:solidFill>
-                        </a:defRPr>
-                      </a:pPr>
-                      <a:r>
-                        <a:t>Staff Onboarding &amp; Operational Training</a:t>
-                      </a:r>
-                    </a:p>
-                  </a:txBody>
-                  <a:tcPr/>
-                </a:tc>
-                <a:tc>
-                  <a:txBody>
-                    <a:bodyPr/>
-                    <a:lstStyle/>
-                    <a:p>
-                      <a:pPr>
-                        <a:defRPr sz="1000" b="0">
-                          <a:solidFill>
-                            <a:srgbClr val="1E293B"/>
-                          </a:solidFill>
-                        </a:defRPr>
-                      </a:pPr>
-                      <a:r>
-                        <a:t>Hands-on workshops for 48 staff (Bursars, HODs, Teachers, Matrons, Drivers, and Executive Management)</a:t>
-                      </a:r>
-                    </a:p>
-                  </a:txBody>
-                  <a:tcPr/>
-                </a:tc>
-                <a:tc>
-                  <a:txBody>
-                    <a:bodyPr/>
-                    <a:lstStyle/>
-                    <a:p>
-                      <a:pPr>
-                        <a:defRPr sz="1000" b="0">
-                          <a:solidFill>
-                            <a:srgbClr val="1E293B"/>
-                          </a:solidFill>
-                        </a:defRPr>
-                      </a:pPr>
-                      <a:r>
-                        <a:t>K 14,500</a:t>
-                      </a:r>
-                    </a:p>
-                  </a:txBody>
-                  <a:tcPr/>
-                </a:tc>
-                <a:tc>
-                  <a:txBody>
-                    <a:bodyPr/>
-                    <a:lstStyle/>
-                    <a:p>
-                      <a:pPr>
-                        <a:defRPr sz="1000" b="0">
-                          <a:solidFill>
-                            <a:srgbClr val="1E293B"/>
-                          </a:solidFill>
-                        </a:defRPr>
-                      </a:pPr>
-                      <a:r>
-                        <a:t>$ 560</a:t>
-                      </a:r>
-                    </a:p>
-                  </a:txBody>
-                  <a:tcPr/>
-                </a:tc>
-              </a:tr>
-              <a:tr h="561708">
-                <a:tc>
-                  <a:txBody>
-                    <a:bodyPr/>
-                    <a:lstStyle/>
-                    <a:p>
-                      <a:pPr>
-                        <a:defRPr sz="1100" b="1">
-                          <a:solidFill>
-                            <a:srgbClr val="0B2545"/>
-                          </a:solidFill>
-                        </a:defRPr>
-                      </a:pPr>
-                      <a:r>
-                        <a:t>TOTAL YEAR 1 CAPITAL &amp; IMPLEMENTATION INVESTMENT</a:t>
-                      </a:r>
-                    </a:p>
-                  </a:txBody>
-                  <a:tcPr>
-                    <a:solidFill>
-                      <a:srgbClr val="EEF2FF"/>
-                    </a:solidFill>
-                  </a:tcPr>
-                </a:tc>
-                <a:tc>
-                  <a:txBody>
-                    <a:bodyPr/>
-                    <a:lstStyle/>
-                    <a:p>
-                      <a:pPr>
-                        <a:defRPr sz="1100" b="1">
-                          <a:solidFill>
-                            <a:srgbClr val="0B2545"/>
-                          </a:solidFill>
-                        </a:defRPr>
-                      </a:pPr>
-                      <a:r>
-                        <a:t>Complete sovereign school digital ecosystem with full warranty, support, and backups</a:t>
-                      </a:r>
-                    </a:p>
-                  </a:txBody>
-                  <a:tcPr>
-                    <a:solidFill>
-                      <a:srgbClr val="EEF2FF"/>
-                    </a:solidFill>
-                  </a:tcPr>
-                </a:tc>
-                <a:tc>
-                  <a:txBody>
-                    <a:bodyPr/>
-                    <a:lstStyle/>
-                    <a:p>
-                      <a:pPr>
-                        <a:defRPr sz="1100" b="1">
-                          <a:solidFill>
-                            <a:srgbClr val="0B2545"/>
-                          </a:solidFill>
-                        </a:defRPr>
-                      </a:pPr>
-                      <a:r>
-                        <a:t>K 143,000</a:t>
-                      </a:r>
-                    </a:p>
-                  </a:txBody>
-                  <a:tcPr>
-                    <a:solidFill>
-                      <a:srgbClr val="EEF2FF"/>
-                    </a:solidFill>
-                  </a:tcPr>
-                </a:tc>
-                <a:tc>
-                  <a:txBody>
-                    <a:bodyPr/>
-                    <a:lstStyle/>
-                    <a:p>
-                      <a:pPr>
-                        <a:defRPr sz="1100" b="1">
-                          <a:solidFill>
-                            <a:srgbClr val="0B2545"/>
-                          </a:solidFill>
-                        </a:defRPr>
-                      </a:pPr>
-                      <a:r>
-                        <a:t>$ 5,500</a:t>
-                      </a:r>
-                    </a:p>
-                  </a:txBody>
-                  <a:tcPr>
-                    <a:solidFill>
-                      <a:srgbClr val="EEF2FF"/>
-                    </a:solidFill>
-                  </a:tcPr>
-                </a:tc>
-              </a:tr>
-            </a:tbl>
-          </a:graphicData>
-        </a:graphic>
-      </p:graphicFrame>
-      <p:sp>
-        <p:nvSpPr>
-          <p:cNvPr id="7" name="TextBox 6"/>
+              <a:t>Multi-Campus GIS &amp; Smart Transport Telematics</a:t>
+            </a:r>
+          </a:p>
+        </p:txBody>
+      </p:sp>
+      <p:sp>
+        <p:nvSpPr>
+          <p:cNvPr id="6" name="Rounded Rectangle 5"/>
+          <p:cNvSpPr/>
+          <p:nvPr/>
+        </p:nvSpPr>
+        <p:spPr>
+          <a:xfrm>
+            <a:off x="731520" y="1280160"/>
+            <a:ext cx="5212080" cy="5029200"/>
+          </a:xfrm>
+          <a:prstGeom prst="roundRect">
+            <a:avLst/>
+          </a:prstGeom>
+          <a:solidFill>
+            <a:srgbClr val="FFFFFF"/>
+          </a:solidFill>
+          <a:ln w="12700">
+            <a:solidFill>
+              <a:srgbClr val="E2E8F0"/>
+            </a:solidFill>
+          </a:ln>
+        </p:spPr>
+        <p:style>
+          <a:lnRef idx="1">
+            <a:schemeClr val="accent1"/>
+          </a:lnRef>
+          <a:fillRef idx="3">
+            <a:schemeClr val="accent1"/>
+          </a:fillRef>
+          <a:effectRef idx="2">
+            <a:schemeClr val="accent1"/>
+          </a:effectRef>
+          <a:fontRef idx="minor">
+            <a:schemeClr val="lt1"/>
+          </a:fontRef>
+        </p:style>
+        <p:txBody>
+          <a:bodyPr rtlCol="0" anchor="ctr"/>
+          <a:lstStyle/>
+          <a:p>
+            <a:pPr algn="ctr"/>
+          </a:p>
+        </p:txBody>
+      </p:sp>
+      <p:sp>
+        <p:nvSpPr>
+          <p:cNvPr id="7" name="Rectangle 6"/>
+          <p:cNvSpPr/>
+          <p:nvPr/>
+        </p:nvSpPr>
+        <p:spPr>
+          <a:xfrm>
+            <a:off x="731520" y="1280160"/>
+            <a:ext cx="5212080" cy="73152"/>
+          </a:xfrm>
+          <a:prstGeom prst="rect">
+            <a:avLst/>
+          </a:prstGeom>
+          <a:solidFill>
+            <a:srgbClr val="134074"/>
+          </a:solidFill>
+          <a:ln>
+            <a:noFill/>
+          </a:ln>
+        </p:spPr>
+        <p:style>
+          <a:lnRef idx="1">
+            <a:schemeClr val="accent1"/>
+          </a:lnRef>
+          <a:fillRef idx="3">
+            <a:schemeClr val="accent1"/>
+          </a:fillRef>
+          <a:effectRef idx="2">
+            <a:schemeClr val="accent1"/>
+          </a:effectRef>
+          <a:fontRef idx="minor">
+            <a:schemeClr val="lt1"/>
+          </a:fontRef>
+        </p:style>
+        <p:txBody>
+          <a:bodyPr rtlCol="0" anchor="ctr"/>
+          <a:lstStyle/>
+          <a:p>
+            <a:pPr algn="ctr"/>
+          </a:p>
+        </p:txBody>
+      </p:sp>
+      <p:sp>
+        <p:nvSpPr>
+          <p:cNvPr id="8" name="TextBox 7"/>
           <p:cNvSpPr txBox="1"/>
           <p:nvPr/>
         </p:nvSpPr>
         <p:spPr>
           <a:xfrm>
-            <a:off x="731520" y="5486400"/>
-            <a:ext cx="10728655" cy="1005840"/>
+            <a:off x="868680" y="1389888"/>
+            <a:ext cx="4937760" cy="4800600"/>
           </a:xfrm>
           <a:prstGeom prst="rect">
             <a:avLst/>
@@ -7870,34 +11749,263 @@
           <a:lstStyle/>
           <a:p>
             <a:pPr>
-              <a:defRPr sz="1100" b="1">
+              <a:spcAft>
+                <a:spcPts val="200"/>
+              </a:spcAft>
+              <a:defRPr sz="1200" b="1">
                 <a:solidFill>
                   <a:srgbClr val="0B2545"/>
                 </a:solidFill>
               </a:defRPr>
             </a:pPr>
             <a:r>
-              <a:t>Return on Investment (ROI) Justification for Executive Management:</a:t>
-            </a:r>
-          </a:p>
-          <a:p>
-            <a:pPr>
+              <a:t>Geospatial Intelligence &amp; Catchment Mapping</a:t>
+            </a:r>
+          </a:p>
+          <a:p>
+            <a:pPr>
+              <a:spcAft>
+                <a:spcPts val="600"/>
+              </a:spcAft>
+              <a:defRPr sz="850">
+                <a:solidFill>
+                  <a:srgbClr val="64748B"/>
+                </a:solidFill>
+              </a:defRPr>
+            </a:pPr>
+            <a:r>
+              <a:t>Spatial Campus Analytics</a:t>
+            </a:r>
+          </a:p>
+          <a:p>
+            <a:pPr>
+              <a:spcAft>
+                <a:spcPts val="400"/>
+              </a:spcAft>
               <a:defRPr sz="950">
                 <a:solidFill>
+                  <a:srgbClr val="1E293B"/>
+                </a:solidFill>
+              </a:defRPr>
+            </a:pPr>
+            <a:r>
+              <a:t>• Dual-Campus Mapping: Pinpoints Mushitala Day Campus (-12.184° S, 26.398° E) and Kansanshi Campus (-12.132° S, 26.415° E).</a:t>
+            </a:r>
+          </a:p>
+          <a:p>
+            <a:pPr>
+              <a:spcAft>
+                <a:spcPts val="400"/>
+              </a:spcAft>
+              <a:defRPr sz="950">
+                <a:solidFill>
+                  <a:srgbClr val="1E293B"/>
+                </a:solidFill>
+              </a:defRPr>
+            </a:pPr>
+            <a:r>
+              <a:t>• Student Demographic Heatmaps: Visualizes student residential distribution across Solwezi to plan new bus stops.</a:t>
+            </a:r>
+          </a:p>
+          <a:p>
+            <a:pPr>
+              <a:spcAft>
+                <a:spcPts val="400"/>
+              </a:spcAft>
+              <a:defRPr sz="950">
+                <a:solidFill>
+                  <a:srgbClr val="1E293B"/>
+                </a:solidFill>
+              </a:defRPr>
+            </a:pPr>
+            <a:r>
+              <a:t>• Zoning &amp; Commute Analytics: Identifies day scholars walking excessive distances for transport support.</a:t>
+            </a:r>
+          </a:p>
+        </p:txBody>
+      </p:sp>
+      <p:sp>
+        <p:nvSpPr>
+          <p:cNvPr id="9" name="Rounded Rectangle 8"/>
+          <p:cNvSpPr/>
+          <p:nvPr/>
+        </p:nvSpPr>
+        <p:spPr>
+          <a:xfrm>
+            <a:off x="6217920" y="1280160"/>
+            <a:ext cx="5212080" cy="5029200"/>
+          </a:xfrm>
+          <a:prstGeom prst="roundRect">
+            <a:avLst/>
+          </a:prstGeom>
+          <a:solidFill>
+            <a:srgbClr val="FFFFFF"/>
+          </a:solidFill>
+          <a:ln w="12700">
+            <a:solidFill>
+              <a:srgbClr val="E2E8F0"/>
+            </a:solidFill>
+          </a:ln>
+        </p:spPr>
+        <p:style>
+          <a:lnRef idx="1">
+            <a:schemeClr val="accent1"/>
+          </a:lnRef>
+          <a:fillRef idx="3">
+            <a:schemeClr val="accent1"/>
+          </a:fillRef>
+          <a:effectRef idx="2">
+            <a:schemeClr val="accent1"/>
+          </a:effectRef>
+          <a:fontRef idx="minor">
+            <a:schemeClr val="lt1"/>
+          </a:fontRef>
+        </p:style>
+        <p:txBody>
+          <a:bodyPr rtlCol="0" anchor="ctr"/>
+          <a:lstStyle/>
+          <a:p>
+            <a:pPr algn="ctr"/>
+          </a:p>
+        </p:txBody>
+      </p:sp>
+      <p:sp>
+        <p:nvSpPr>
+          <p:cNvPr id="10" name="Rectangle 9"/>
+          <p:cNvSpPr/>
+          <p:nvPr/>
+        </p:nvSpPr>
+        <p:spPr>
+          <a:xfrm>
+            <a:off x="6217920" y="1280160"/>
+            <a:ext cx="5212080" cy="73152"/>
+          </a:xfrm>
+          <a:prstGeom prst="rect">
+            <a:avLst/>
+          </a:prstGeom>
+          <a:solidFill>
+            <a:srgbClr val="10B981"/>
+          </a:solidFill>
+          <a:ln>
+            <a:noFill/>
+          </a:ln>
+        </p:spPr>
+        <p:style>
+          <a:lnRef idx="1">
+            <a:schemeClr val="accent1"/>
+          </a:lnRef>
+          <a:fillRef idx="3">
+            <a:schemeClr val="accent1"/>
+          </a:fillRef>
+          <a:effectRef idx="2">
+            <a:schemeClr val="accent1"/>
+          </a:effectRef>
+          <a:fontRef idx="minor">
+            <a:schemeClr val="lt1"/>
+          </a:fontRef>
+        </p:style>
+        <p:txBody>
+          <a:bodyPr rtlCol="0" anchor="ctr"/>
+          <a:lstStyle/>
+          <a:p>
+            <a:pPr algn="ctr"/>
+          </a:p>
+        </p:txBody>
+      </p:sp>
+      <p:sp>
+        <p:nvSpPr>
+          <p:cNvPr id="11" name="TextBox 10"/>
+          <p:cNvSpPr txBox="1"/>
+          <p:nvPr/>
+        </p:nvSpPr>
+        <p:spPr>
+          <a:xfrm>
+            <a:off x="6355080" y="1389888"/>
+            <a:ext cx="4937760" cy="4800600"/>
+          </a:xfrm>
+          <a:prstGeom prst="rect">
+            <a:avLst/>
+          </a:prstGeom>
+          <a:noFill/>
+        </p:spPr>
+        <p:txBody>
+          <a:bodyPr wrap="square">
+            <a:spAutoFit/>
+          </a:bodyPr>
+          <a:lstStyle/>
+          <a:p>
+            <a:pPr>
+              <a:spcAft>
+                <a:spcPts val="200"/>
+              </a:spcAft>
+              <a:defRPr sz="1200" b="1">
+                <a:solidFill>
+                  <a:srgbClr val="0B2545"/>
+                </a:solidFill>
+              </a:defRPr>
+            </a:pPr>
+            <a:r>
+              <a:t>Contactless Smart Bus Boarding</a:t>
+            </a:r>
+          </a:p>
+          <a:p>
+            <a:pPr>
+              <a:spcAft>
+                <a:spcPts val="600"/>
+              </a:spcAft>
+              <a:defRPr sz="850">
+                <a:solidFill>
                   <a:srgbClr val="64748B"/>
                 </a:solidFill>
               </a:defRPr>
             </a:pPr>
             <a:r>
-              <a:t>1. Immediate Arrears Recovery: Automating parent Mobile Money prompts captures ~15% of the K279,000 pending fee balances within 30 days (+K41,850 recovered).</a:t>
-            </a:r>
-            <a:br/>
-            <a:r>
-              <a:t>2. Printing Cost Elimination: Eliminating physical carbon-copy paper receipts and printed report cards saves ~K22,000 annually.</a:t>
-            </a:r>
-            <a:br/>
-            <a:r>
-              <a:t>3. Fuel &amp; Route Optimization: Smart GPS route stop planning saves ~10-15% on diesel transport costs across both shuttles.</a:t>
+              <a:t>Student Transit Safeguarding</a:t>
+            </a:r>
+          </a:p>
+          <a:p>
+            <a:pPr>
+              <a:spcAft>
+                <a:spcPts val="400"/>
+              </a:spcAft>
+              <a:defRPr sz="950">
+                <a:solidFill>
+                  <a:srgbClr val="1E293B"/>
+                </a:solidFill>
+              </a:defRPr>
+            </a:pPr>
+            <a:r>
+              <a:t>• In-Bus Tablet Driver App: Drivers and bus conductors record student boarding at designated pickup points.</a:t>
+            </a:r>
+          </a:p>
+          <a:p>
+            <a:pPr>
+              <a:spcAft>
+                <a:spcPts val="400"/>
+              </a:spcAft>
+              <a:defRPr sz="950">
+                <a:solidFill>
+                  <a:srgbClr val="1E293B"/>
+                </a:solidFill>
+              </a:defRPr>
+            </a:pPr>
+            <a:r>
+              <a:t>• Automated Guardian SMS Notifications: Parents receive instant alerts when their child safely boards or alights.</a:t>
+            </a:r>
+          </a:p>
+          <a:p>
+            <a:pPr>
+              <a:spcAft>
+                <a:spcPts val="400"/>
+              </a:spcAft>
+              <a:defRPr sz="950">
+                <a:solidFill>
+                  <a:srgbClr val="1E293B"/>
+                </a:solidFill>
+              </a:defRPr>
+            </a:pPr>
+            <a:r>
+              <a:t>• Fleet Fuel &amp; Maintenance Ledger: Logs fuel consumption and servicing intervals for all school minibuses and coasters.</a:t>
             </a:r>
           </a:p>
         </p:txBody>
